--- a/clients/sara/Sara-Proposal.pptx
+++ b/clients/sara/Sara-Proposal.pptx
@@ -3133,7 +3133,7 @@
                 </a:solidFill>
                 <a:latin typeface="Calibri"/>
               </a:rPr>
-              <a:t>CLAUDE COWORK SETUP · PROPOSTA · MAIO 2026</a:t>
+              <a:t>PRACTICE COMMAND · CODE + COWORK · PROPOSTA · MAIO 2026</a:t>
             </a:r>
           </a:p>
         </p:txBody>
@@ -3182,28 +3182,28 @@
         <p:spPr>
           <a:xfrm>
             <a:off x="914400" y="3529584"/>
-            <a:ext cx="10972800" cy="914400"/>
-          </a:xfrm>
-          <a:prstGeom prst="rect">
-            <a:avLst/>
-          </a:prstGeom>
-          <a:noFill/>
-        </p:spPr>
-        <p:txBody>
-          <a:bodyPr wrap="square" lIns="0" rIns="0" tIns="0" bIns="0" anchor="t">
-            <a:spAutoFit/>
-          </a:bodyPr>
-          <a:lstStyle/>
-          <a:p>
-            <a:pPr algn="l"/>
-            <a:r>
-              <a:rPr sz="1800" b="0" i="0">
+            <a:ext cx="10972800" cy="1097280"/>
+          </a:xfrm>
+          <a:prstGeom prst="rect">
+            <a:avLst/>
+          </a:prstGeom>
+          <a:noFill/>
+        </p:spPr>
+        <p:txBody>
+          <a:bodyPr wrap="square" lIns="0" rIns="0" tIns="0" bIns="0" anchor="t">
+            <a:spAutoFit/>
+          </a:bodyPr>
+          <a:lstStyle/>
+          <a:p>
+            <a:pPr algn="l"/>
+            <a:r>
+              <a:rPr sz="1700" b="0" i="0">
                 <a:solidFill>
                   <a:srgbClr val="4B5563"/>
                 </a:solidFill>
                 <a:latin typeface="Calibri"/>
               </a:rPr>
-              <a:t>Quatro prioridades, uma camada de inteligência sobre a automação que já tem em funcionamento. Não substitui — amplia.</a:t>
+              <a:t>Quatro prioridades. Dois runtimes Claude — Code sempre ligado para o tempo real, Cowork como cockpit da proprietária. Uma camada de inteligência sobre a automação que já tem em funcionamento.</a:t>
             </a:r>
           </a:p>
         </p:txBody>
@@ -5723,7 +5723,7 @@
                 </a:solidFill>
                 <a:latin typeface="Calibri"/>
               </a:rPr>
-              <a:t>ARQUITETURA · LOOP AUTO-MELHORÁVEL</a:t>
+              <a:t>ARQUITETURA · LOOP AUTO-MELHORÁVEL · CODE + COWORK</a:t>
             </a:r>
           </a:p>
         </p:txBody>
@@ -5793,7 +5793,7 @@
                 </a:solidFill>
                 <a:latin typeface="Calibri"/>
               </a:rPr>
-              <a:t>Não vai ficar com automações. Vai ficar com um sistema que se compõe com o uso — uma base de dados permanente, um loop de cinco passos, e os humanos só onde a realidade exige.</a:t>
+              <a:t>Dois runtimes Claude sobre a mesma base de dados central: Claude Code (motor sempre ligado para tempo-real) + Claude Cowork (cockpit da proprietária). Mesmas tabelas, mesmas ferramentas, mesma voz da clínica.</a:t>
             </a:r>
           </a:p>
         </p:txBody>
@@ -5806,8 +5806,398 @@
         </p:nvSpPr>
         <p:spPr>
           <a:xfrm>
-            <a:off x="914400" y="3657600"/>
-            <a:ext cx="3017520" cy="2926080"/>
+            <a:off x="914400" y="3520440"/>
+            <a:ext cx="8001000" cy="1371600"/>
+          </a:xfrm>
+          <a:prstGeom prst="roundRect">
+            <a:avLst>
+              <a:gd name="adj" fmla="val 3000"/>
+            </a:avLst>
+          </a:prstGeom>
+          <a:solidFill>
+            <a:srgbClr val="F7F1E8"/>
+          </a:solidFill>
+          <a:ln>
+            <a:noFill/>
+          </a:ln>
+          <a:effectLst/>
+        </p:spPr>
+        <p:style>
+          <a:lnRef idx="1">
+            <a:schemeClr val="accent1"/>
+          </a:lnRef>
+          <a:fillRef idx="3">
+            <a:schemeClr val="accent1"/>
+          </a:fillRef>
+          <a:effectRef idx="2">
+            <a:schemeClr val="accent1"/>
+          </a:effectRef>
+          <a:fontRef idx="minor">
+            <a:schemeClr val="lt1"/>
+          </a:fontRef>
+        </p:style>
+        <p:txBody>
+          <a:bodyPr rtlCol="0" anchor="ctr"/>
+          <a:lstStyle/>
+          <a:p>
+            <a:pPr algn="ctr"/>
+          </a:p>
+        </p:txBody>
+      </p:sp>
+      <p:sp>
+        <p:nvSpPr>
+          <p:cNvPr id="6" name="Rectangle 5"/>
+          <p:cNvSpPr/>
+          <p:nvPr/>
+        </p:nvSpPr>
+        <p:spPr>
+          <a:xfrm>
+            <a:off x="914400" y="3520440"/>
+            <a:ext cx="73152" cy="1371600"/>
+          </a:xfrm>
+          <a:prstGeom prst="rect">
+            <a:avLst/>
+          </a:prstGeom>
+          <a:solidFill>
+            <a:srgbClr val="FF8449"/>
+          </a:solidFill>
+          <a:ln>
+            <a:noFill/>
+          </a:ln>
+          <a:effectLst/>
+        </p:spPr>
+        <p:style>
+          <a:lnRef idx="1">
+            <a:schemeClr val="accent1"/>
+          </a:lnRef>
+          <a:fillRef idx="3">
+            <a:schemeClr val="accent1"/>
+          </a:fillRef>
+          <a:effectRef idx="2">
+            <a:schemeClr val="accent1"/>
+          </a:effectRef>
+          <a:fontRef idx="minor">
+            <a:schemeClr val="lt1"/>
+          </a:fontRef>
+        </p:style>
+        <p:txBody>
+          <a:bodyPr rtlCol="0" anchor="ctr"/>
+          <a:lstStyle/>
+          <a:p>
+            <a:pPr algn="ctr"/>
+          </a:p>
+        </p:txBody>
+      </p:sp>
+      <p:sp>
+        <p:nvSpPr>
+          <p:cNvPr id="7" name="TextBox 6"/>
+          <p:cNvSpPr txBox="1"/>
+          <p:nvPr/>
+        </p:nvSpPr>
+        <p:spPr>
+          <a:xfrm>
+            <a:off x="1188720" y="3685032"/>
+            <a:ext cx="7452360" cy="274320"/>
+          </a:xfrm>
+          <a:prstGeom prst="rect">
+            <a:avLst/>
+          </a:prstGeom>
+          <a:noFill/>
+        </p:spPr>
+        <p:txBody>
+          <a:bodyPr wrap="square" lIns="0" rIns="0" tIns="0" bIns="0" anchor="t">
+            <a:spAutoFit/>
+          </a:bodyPr>
+          <a:lstStyle/>
+          <a:p>
+            <a:pPr algn="l"/>
+            <a:r>
+              <a:rPr sz="825" b="0" i="0" spc="80">
+                <a:solidFill>
+                  <a:srgbClr val="FF8449"/>
+                </a:solidFill>
+                <a:latin typeface="Calibri"/>
+              </a:rPr>
+              <a:t>DAEMON · TEMPO REAL</a:t>
+            </a:r>
+          </a:p>
+        </p:txBody>
+      </p:sp>
+      <p:sp>
+        <p:nvSpPr>
+          <p:cNvPr id="8" name="TextBox 7"/>
+          <p:cNvSpPr txBox="1"/>
+          <p:nvPr/>
+        </p:nvSpPr>
+        <p:spPr>
+          <a:xfrm>
+            <a:off x="1188720" y="3913632"/>
+            <a:ext cx="7452360" cy="384048"/>
+          </a:xfrm>
+          <a:prstGeom prst="rect">
+            <a:avLst/>
+          </a:prstGeom>
+          <a:noFill/>
+        </p:spPr>
+        <p:txBody>
+          <a:bodyPr wrap="square" lIns="0" rIns="0" tIns="0" bIns="0" anchor="t">
+            <a:spAutoFit/>
+          </a:bodyPr>
+          <a:lstStyle/>
+          <a:p>
+            <a:pPr algn="l"/>
+            <a:r>
+              <a:rPr sz="2000" b="0" i="0">
+                <a:solidFill>
+                  <a:srgbClr val="000000"/>
+                </a:solidFill>
+                <a:latin typeface="Georgia"/>
+              </a:rPr>
+              <a:t>Claude Code</a:t>
+            </a:r>
+          </a:p>
+        </p:txBody>
+      </p:sp>
+      <p:sp>
+        <p:nvSpPr>
+          <p:cNvPr id="9" name="TextBox 8"/>
+          <p:cNvSpPr txBox="1"/>
+          <p:nvPr/>
+        </p:nvSpPr>
+        <p:spPr>
+          <a:xfrm>
+            <a:off x="1188720" y="4343400"/>
+            <a:ext cx="7452360" cy="457200"/>
+          </a:xfrm>
+          <a:prstGeom prst="rect">
+            <a:avLst/>
+          </a:prstGeom>
+          <a:noFill/>
+        </p:spPr>
+        <p:txBody>
+          <a:bodyPr wrap="square" lIns="0" rIns="0" tIns="0" bIns="0" anchor="t">
+            <a:spAutoFit/>
+          </a:bodyPr>
+          <a:lstStyle/>
+          <a:p>
+            <a:pPr algn="l"/>
+            <a:r>
+              <a:rPr sz="1050" b="0" i="0">
+                <a:solidFill>
+                  <a:srgbClr val="4B5563"/>
+                </a:solidFill>
+                <a:latin typeface="Calibri"/>
+              </a:rPr>
+              <a:t>Sempre ligado no VPS da clínica. Webhooks + cron. Sub-minuto. Owns mensagens automáticas, triagem inbound, tempos críticos (T-24h, T+6h, reativação).</a:t>
+            </a:r>
+          </a:p>
+        </p:txBody>
+      </p:sp>
+      <p:sp>
+        <p:nvSpPr>
+          <p:cNvPr id="10" name="Rounded Rectangle 9"/>
+          <p:cNvSpPr/>
+          <p:nvPr/>
+        </p:nvSpPr>
+        <p:spPr>
+          <a:xfrm>
+            <a:off x="9372600" y="3520440"/>
+            <a:ext cx="8001000" cy="1371600"/>
+          </a:xfrm>
+          <a:prstGeom prst="roundRect">
+            <a:avLst>
+              <a:gd name="adj" fmla="val 3000"/>
+            </a:avLst>
+          </a:prstGeom>
+          <a:solidFill>
+            <a:srgbClr val="F7F1E8"/>
+          </a:solidFill>
+          <a:ln>
+            <a:noFill/>
+          </a:ln>
+          <a:effectLst/>
+        </p:spPr>
+        <p:style>
+          <a:lnRef idx="1">
+            <a:schemeClr val="accent1"/>
+          </a:lnRef>
+          <a:fillRef idx="3">
+            <a:schemeClr val="accent1"/>
+          </a:fillRef>
+          <a:effectRef idx="2">
+            <a:schemeClr val="accent1"/>
+          </a:effectRef>
+          <a:fontRef idx="minor">
+            <a:schemeClr val="lt1"/>
+          </a:fontRef>
+        </p:style>
+        <p:txBody>
+          <a:bodyPr rtlCol="0" anchor="ctr"/>
+          <a:lstStyle/>
+          <a:p>
+            <a:pPr algn="ctr"/>
+          </a:p>
+        </p:txBody>
+      </p:sp>
+      <p:sp>
+        <p:nvSpPr>
+          <p:cNvPr id="11" name="Rectangle 10"/>
+          <p:cNvSpPr/>
+          <p:nvPr/>
+        </p:nvSpPr>
+        <p:spPr>
+          <a:xfrm>
+            <a:off x="9372600" y="3520440"/>
+            <a:ext cx="73152" cy="1371600"/>
+          </a:xfrm>
+          <a:prstGeom prst="rect">
+            <a:avLst/>
+          </a:prstGeom>
+          <a:solidFill>
+            <a:srgbClr val="FF8449"/>
+          </a:solidFill>
+          <a:ln>
+            <a:noFill/>
+          </a:ln>
+          <a:effectLst/>
+        </p:spPr>
+        <p:style>
+          <a:lnRef idx="1">
+            <a:schemeClr val="accent1"/>
+          </a:lnRef>
+          <a:fillRef idx="3">
+            <a:schemeClr val="accent1"/>
+          </a:fillRef>
+          <a:effectRef idx="2">
+            <a:schemeClr val="accent1"/>
+          </a:effectRef>
+          <a:fontRef idx="minor">
+            <a:schemeClr val="lt1"/>
+          </a:fontRef>
+        </p:style>
+        <p:txBody>
+          <a:bodyPr rtlCol="0" anchor="ctr"/>
+          <a:lstStyle/>
+          <a:p>
+            <a:pPr algn="ctr"/>
+          </a:p>
+        </p:txBody>
+      </p:sp>
+      <p:sp>
+        <p:nvSpPr>
+          <p:cNvPr id="12" name="TextBox 11"/>
+          <p:cNvSpPr txBox="1"/>
+          <p:nvPr/>
+        </p:nvSpPr>
+        <p:spPr>
+          <a:xfrm>
+            <a:off x="9646920" y="3685032"/>
+            <a:ext cx="7452360" cy="274320"/>
+          </a:xfrm>
+          <a:prstGeom prst="rect">
+            <a:avLst/>
+          </a:prstGeom>
+          <a:noFill/>
+        </p:spPr>
+        <p:txBody>
+          <a:bodyPr wrap="square" lIns="0" rIns="0" tIns="0" bIns="0" anchor="t">
+            <a:spAutoFit/>
+          </a:bodyPr>
+          <a:lstStyle/>
+          <a:p>
+            <a:pPr algn="l"/>
+            <a:r>
+              <a:rPr sz="825" b="0" i="0" spc="80">
+                <a:solidFill>
+                  <a:srgbClr val="FF8449"/>
+                </a:solidFill>
+                <a:latin typeface="Calibri"/>
+              </a:rPr>
+              <a:t>COCKPIT · PROPRIETÁRIA</a:t>
+            </a:r>
+          </a:p>
+        </p:txBody>
+      </p:sp>
+      <p:sp>
+        <p:nvSpPr>
+          <p:cNvPr id="13" name="TextBox 12"/>
+          <p:cNvSpPr txBox="1"/>
+          <p:nvPr/>
+        </p:nvSpPr>
+        <p:spPr>
+          <a:xfrm>
+            <a:off x="9646920" y="3913632"/>
+            <a:ext cx="7452360" cy="384048"/>
+          </a:xfrm>
+          <a:prstGeom prst="rect">
+            <a:avLst/>
+          </a:prstGeom>
+          <a:noFill/>
+        </p:spPr>
+        <p:txBody>
+          <a:bodyPr wrap="square" lIns="0" rIns="0" tIns="0" bIns="0" anchor="t">
+            <a:spAutoFit/>
+          </a:bodyPr>
+          <a:lstStyle/>
+          <a:p>
+            <a:pPr algn="l"/>
+            <a:r>
+              <a:rPr sz="2000" b="0" i="0">
+                <a:solidFill>
+                  <a:srgbClr val="000000"/>
+                </a:solidFill>
+                <a:latin typeface="Georgia"/>
+              </a:rPr>
+              <a:t>Claude Cowork</a:t>
+            </a:r>
+          </a:p>
+        </p:txBody>
+      </p:sp>
+      <p:sp>
+        <p:nvSpPr>
+          <p:cNvPr id="14" name="TextBox 13"/>
+          <p:cNvSpPr txBox="1"/>
+          <p:nvPr/>
+        </p:nvSpPr>
+        <p:spPr>
+          <a:xfrm>
+            <a:off x="9646920" y="4343400"/>
+            <a:ext cx="7452360" cy="457200"/>
+          </a:xfrm>
+          <a:prstGeom prst="rect">
+            <a:avLst/>
+          </a:prstGeom>
+          <a:noFill/>
+        </p:spPr>
+        <p:txBody>
+          <a:bodyPr wrap="square" lIns="0" rIns="0" tIns="0" bIns="0" anchor="t">
+            <a:spAutoFit/>
+          </a:bodyPr>
+          <a:lstStyle/>
+          <a:p>
+            <a:pPr algn="l"/>
+            <a:r>
+              <a:rPr sz="1050" b="0" i="0">
+                <a:solidFill>
+                  <a:srgbClr val="4B5563"/>
+                </a:solidFill>
+                <a:latin typeface="Calibri"/>
+              </a:rPr>
+              <a:t>Desktop da Sara. Briefing diário, fila de aprovação, learning loop semanal, conversas ad-hoc, revisões mensais.</a:t>
+            </a:r>
+          </a:p>
+        </p:txBody>
+      </p:sp>
+      <p:sp>
+        <p:nvSpPr>
+          <p:cNvPr id="15" name="Rounded Rectangle 14"/>
+          <p:cNvSpPr/>
+          <p:nvPr/>
+        </p:nvSpPr>
+        <p:spPr>
+          <a:xfrm>
+            <a:off x="914400" y="5212080"/>
+            <a:ext cx="3017520" cy="2651760"/>
           </a:xfrm>
           <a:prstGeom prst="roundRect">
             <a:avLst>
@@ -5846,13 +6236,13 @@
       </p:sp>
       <p:sp>
         <p:nvSpPr>
-          <p:cNvPr id="6" name="TextBox 5"/>
-          <p:cNvSpPr txBox="1"/>
-          <p:nvPr/>
-        </p:nvSpPr>
-        <p:spPr>
-          <a:xfrm>
-            <a:off x="1188720" y="3886200"/>
+          <p:cNvPr id="16" name="TextBox 15"/>
+          <p:cNvSpPr txBox="1"/>
+          <p:nvPr/>
+        </p:nvSpPr>
+        <p:spPr>
+          <a:xfrm>
+            <a:off x="1188720" y="5440680"/>
             <a:ext cx="1371600" cy="411480"/>
           </a:xfrm>
           <a:prstGeom prst="rect">
@@ -5881,13 +6271,13 @@
       </p:sp>
       <p:sp>
         <p:nvSpPr>
-          <p:cNvPr id="7" name="TextBox 6"/>
-          <p:cNvSpPr txBox="1"/>
-          <p:nvPr/>
-        </p:nvSpPr>
-        <p:spPr>
-          <a:xfrm>
-            <a:off x="1188720" y="4434840"/>
+          <p:cNvPr id="17" name="TextBox 16"/>
+          <p:cNvSpPr txBox="1"/>
+          <p:nvPr/>
+        </p:nvSpPr>
+        <p:spPr>
+          <a:xfrm>
+            <a:off x="1188720" y="5989320"/>
             <a:ext cx="2468879" cy="274320"/>
           </a:xfrm>
           <a:prstGeom prst="rect">
@@ -5916,13 +6306,13 @@
       </p:sp>
       <p:sp>
         <p:nvSpPr>
-          <p:cNvPr id="8" name="TextBox 7"/>
-          <p:cNvSpPr txBox="1"/>
-          <p:nvPr/>
-        </p:nvSpPr>
-        <p:spPr>
-          <a:xfrm>
-            <a:off x="1188720" y="4709160"/>
+          <p:cNvPr id="18" name="TextBox 17"/>
+          <p:cNvSpPr txBox="1"/>
+          <p:nvPr/>
+        </p:nvSpPr>
+        <p:spPr>
+          <a:xfrm>
+            <a:off x="1188720" y="6263640"/>
             <a:ext cx="2468879" cy="548640"/>
           </a:xfrm>
           <a:prstGeom prst="rect">
@@ -5951,14 +6341,14 @@
       </p:sp>
       <p:sp>
         <p:nvSpPr>
-          <p:cNvPr id="9" name="TextBox 8"/>
-          <p:cNvSpPr txBox="1"/>
-          <p:nvPr/>
-        </p:nvSpPr>
-        <p:spPr>
-          <a:xfrm>
-            <a:off x="1188720" y="5349240"/>
-            <a:ext cx="2468879" cy="1097280"/>
+          <p:cNvPr id="19" name="TextBox 18"/>
+          <p:cNvSpPr txBox="1"/>
+          <p:nvPr/>
+        </p:nvSpPr>
+        <p:spPr>
+          <a:xfrm>
+            <a:off x="1188720" y="6903720"/>
+            <a:ext cx="2468879" cy="822959"/>
           </a:xfrm>
           <a:prstGeom prst="rect">
             <a:avLst/>
@@ -5979,20 +6369,20 @@
                 </a:solidFill>
                 <a:latin typeface="Calibri"/>
               </a:rPr>
-              <a:t>Eventos da agenda, mensagens recebidas, notas das consultas, respostas dos pacientes.</a:t>
-            </a:r>
-          </a:p>
-        </p:txBody>
-      </p:sp>
-      <p:sp>
-        <p:nvSpPr>
-          <p:cNvPr id="10" name="Right Arrow 9"/>
+              <a:t>Code escuta webhooks (WhatsApp, agenda, sessão concluída). Cowork puxa contexto on-demand.</a:t>
+            </a:r>
+          </a:p>
+        </p:txBody>
+      </p:sp>
+      <p:sp>
+        <p:nvSpPr>
+          <p:cNvPr id="20" name="Right Arrow 19"/>
           <p:cNvSpPr/>
           <p:nvPr/>
         </p:nvSpPr>
         <p:spPr>
           <a:xfrm>
-            <a:off x="3986783" y="5010912"/>
+            <a:off x="3986783" y="6428232"/>
             <a:ext cx="246888" cy="228600"/>
           </a:xfrm>
           <a:prstGeom prst="rightArrow">
@@ -6030,14 +6420,14 @@
       </p:sp>
       <p:sp>
         <p:nvSpPr>
-          <p:cNvPr id="11" name="Rounded Rectangle 10"/>
+          <p:cNvPr id="21" name="Rounded Rectangle 20"/>
           <p:cNvSpPr/>
           <p:nvPr/>
         </p:nvSpPr>
         <p:spPr>
           <a:xfrm>
-            <a:off x="4297679" y="3657600"/>
-            <a:ext cx="3017520" cy="2926080"/>
+            <a:off x="4297679" y="5212080"/>
+            <a:ext cx="3017520" cy="2651760"/>
           </a:xfrm>
           <a:prstGeom prst="roundRect">
             <a:avLst>
@@ -6076,13 +6466,13 @@
       </p:sp>
       <p:sp>
         <p:nvSpPr>
-          <p:cNvPr id="12" name="TextBox 11"/>
-          <p:cNvSpPr txBox="1"/>
-          <p:nvPr/>
-        </p:nvSpPr>
-        <p:spPr>
-          <a:xfrm>
-            <a:off x="4571999" y="3886200"/>
+          <p:cNvPr id="22" name="TextBox 21"/>
+          <p:cNvSpPr txBox="1"/>
+          <p:nvPr/>
+        </p:nvSpPr>
+        <p:spPr>
+          <a:xfrm>
+            <a:off x="4571999" y="5440680"/>
             <a:ext cx="1371600" cy="411480"/>
           </a:xfrm>
           <a:prstGeom prst="rect">
@@ -6111,13 +6501,13 @@
       </p:sp>
       <p:sp>
         <p:nvSpPr>
-          <p:cNvPr id="13" name="TextBox 12"/>
-          <p:cNvSpPr txBox="1"/>
-          <p:nvPr/>
-        </p:nvSpPr>
-        <p:spPr>
-          <a:xfrm>
-            <a:off x="4571999" y="4434840"/>
+          <p:cNvPr id="23" name="TextBox 22"/>
+          <p:cNvSpPr txBox="1"/>
+          <p:nvPr/>
+        </p:nvSpPr>
+        <p:spPr>
+          <a:xfrm>
+            <a:off x="4571999" y="5989320"/>
             <a:ext cx="2468879" cy="274320"/>
           </a:xfrm>
           <a:prstGeom prst="rect">
@@ -6146,13 +6536,13 @@
       </p:sp>
       <p:sp>
         <p:nvSpPr>
-          <p:cNvPr id="14" name="TextBox 13"/>
-          <p:cNvSpPr txBox="1"/>
-          <p:nvPr/>
-        </p:nvSpPr>
-        <p:spPr>
-          <a:xfrm>
-            <a:off x="4571999" y="4709160"/>
+          <p:cNvPr id="24" name="TextBox 23"/>
+          <p:cNvSpPr txBox="1"/>
+          <p:nvPr/>
+        </p:nvSpPr>
+        <p:spPr>
+          <a:xfrm>
+            <a:off x="4571999" y="6263640"/>
             <a:ext cx="2468879" cy="548640"/>
           </a:xfrm>
           <a:prstGeom prst="rect">
@@ -6181,14 +6571,14 @@
       </p:sp>
       <p:sp>
         <p:nvSpPr>
-          <p:cNvPr id="15" name="TextBox 14"/>
-          <p:cNvSpPr txBox="1"/>
-          <p:nvPr/>
-        </p:nvSpPr>
-        <p:spPr>
-          <a:xfrm>
-            <a:off x="4571999" y="5349240"/>
-            <a:ext cx="2468879" cy="1097280"/>
+          <p:cNvPr id="25" name="TextBox 24"/>
+          <p:cNvSpPr txBox="1"/>
+          <p:nvPr/>
+        </p:nvSpPr>
+        <p:spPr>
+          <a:xfrm>
+            <a:off x="4571999" y="6903720"/>
+            <a:ext cx="2468879" cy="822959"/>
           </a:xfrm>
           <a:prstGeom prst="rect">
             <a:avLst/>
@@ -6209,20 +6599,20 @@
                 </a:solidFill>
                 <a:latin typeface="Calibri"/>
               </a:rPr>
-              <a:t>Claude lê o contexto e decide: responder, escalar, escalar à Sara, ou registar.</a:t>
-            </a:r>
-          </a:p>
-        </p:txBody>
-      </p:sp>
-      <p:sp>
-        <p:nvSpPr>
-          <p:cNvPr id="16" name="Right Arrow 15"/>
+              <a:t>Code decide em tempo real por evento. Cowork decide o que mostrar à Sara.</a:t>
+            </a:r>
+          </a:p>
+        </p:txBody>
+      </p:sp>
+      <p:sp>
+        <p:nvSpPr>
+          <p:cNvPr id="26" name="Right Arrow 25"/>
           <p:cNvSpPr/>
           <p:nvPr/>
         </p:nvSpPr>
         <p:spPr>
           <a:xfrm>
-            <a:off x="7370063" y="5010912"/>
+            <a:off x="7370063" y="6428232"/>
             <a:ext cx="246888" cy="228600"/>
           </a:xfrm>
           <a:prstGeom prst="rightArrow">
@@ -6260,14 +6650,14 @@
       </p:sp>
       <p:sp>
         <p:nvSpPr>
-          <p:cNvPr id="17" name="Rounded Rectangle 16"/>
+          <p:cNvPr id="27" name="Rounded Rectangle 26"/>
           <p:cNvSpPr/>
           <p:nvPr/>
         </p:nvSpPr>
         <p:spPr>
           <a:xfrm>
-            <a:off x="7680959" y="3657600"/>
-            <a:ext cx="3017520" cy="2926080"/>
+            <a:off x="7680959" y="5212080"/>
+            <a:ext cx="3017520" cy="2651760"/>
           </a:xfrm>
           <a:prstGeom prst="roundRect">
             <a:avLst>
@@ -6306,13 +6696,13 @@
       </p:sp>
       <p:sp>
         <p:nvSpPr>
-          <p:cNvPr id="18" name="TextBox 17"/>
-          <p:cNvSpPr txBox="1"/>
-          <p:nvPr/>
-        </p:nvSpPr>
-        <p:spPr>
-          <a:xfrm>
-            <a:off x="7955279" y="3886200"/>
+          <p:cNvPr id="28" name="TextBox 27"/>
+          <p:cNvSpPr txBox="1"/>
+          <p:nvPr/>
+        </p:nvSpPr>
+        <p:spPr>
+          <a:xfrm>
+            <a:off x="7955279" y="5440680"/>
             <a:ext cx="1371600" cy="411480"/>
           </a:xfrm>
           <a:prstGeom prst="rect">
@@ -6341,13 +6731,13 @@
       </p:sp>
       <p:sp>
         <p:nvSpPr>
-          <p:cNvPr id="19" name="TextBox 18"/>
-          <p:cNvSpPr txBox="1"/>
-          <p:nvPr/>
-        </p:nvSpPr>
-        <p:spPr>
-          <a:xfrm>
-            <a:off x="7955279" y="4434840"/>
+          <p:cNvPr id="29" name="TextBox 28"/>
+          <p:cNvSpPr txBox="1"/>
+          <p:nvPr/>
+        </p:nvSpPr>
+        <p:spPr>
+          <a:xfrm>
+            <a:off x="7955279" y="5989320"/>
             <a:ext cx="2468879" cy="274320"/>
           </a:xfrm>
           <a:prstGeom prst="rect">
@@ -6376,13 +6766,13 @@
       </p:sp>
       <p:sp>
         <p:nvSpPr>
-          <p:cNvPr id="20" name="TextBox 19"/>
-          <p:cNvSpPr txBox="1"/>
-          <p:nvPr/>
-        </p:nvSpPr>
-        <p:spPr>
-          <a:xfrm>
-            <a:off x="7955279" y="4709160"/>
+          <p:cNvPr id="30" name="TextBox 29"/>
+          <p:cNvSpPr txBox="1"/>
+          <p:nvPr/>
+        </p:nvSpPr>
+        <p:spPr>
+          <a:xfrm>
+            <a:off x="7955279" y="6263640"/>
             <a:ext cx="2468879" cy="548640"/>
           </a:xfrm>
           <a:prstGeom prst="rect">
@@ -6411,14 +6801,14 @@
       </p:sp>
       <p:sp>
         <p:nvSpPr>
-          <p:cNvPr id="21" name="TextBox 20"/>
-          <p:cNvSpPr txBox="1"/>
-          <p:nvPr/>
-        </p:nvSpPr>
-        <p:spPr>
-          <a:xfrm>
-            <a:off x="7955279" y="5349240"/>
-            <a:ext cx="2468879" cy="1097280"/>
+          <p:cNvPr id="31" name="TextBox 30"/>
+          <p:cNvSpPr txBox="1"/>
+          <p:nvPr/>
+        </p:nvSpPr>
+        <p:spPr>
+          <a:xfrm>
+            <a:off x="7955279" y="6903720"/>
+            <a:ext cx="2468879" cy="822959"/>
           </a:xfrm>
           <a:prstGeom prst="rect">
             <a:avLst/>
@@ -6439,20 +6829,20 @@
                 </a:solidFill>
                 <a:latin typeface="Calibri"/>
               </a:rPr>
-              <a:t>MCPs executam: agenda, WhatsApp, email, CRM, inferência local para dados clínicos.</a:t>
-            </a:r>
-          </a:p>
-        </p:txBody>
-      </p:sp>
-      <p:sp>
-        <p:nvSpPr>
-          <p:cNvPr id="22" name="Right Arrow 21"/>
+              <a:t>Os mesmos MCPs (agenda, WhatsApp, email, Airtable, Ollama) usados por ambos os runtimes.</a:t>
+            </a:r>
+          </a:p>
+        </p:txBody>
+      </p:sp>
+      <p:sp>
+        <p:nvSpPr>
+          <p:cNvPr id="32" name="Right Arrow 31"/>
           <p:cNvSpPr/>
           <p:nvPr/>
         </p:nvSpPr>
         <p:spPr>
           <a:xfrm>
-            <a:off x="10753344" y="5010912"/>
+            <a:off x="10753344" y="6428232"/>
             <a:ext cx="246888" cy="228600"/>
           </a:xfrm>
           <a:prstGeom prst="rightArrow">
@@ -6490,14 +6880,14 @@
       </p:sp>
       <p:sp>
         <p:nvSpPr>
-          <p:cNvPr id="23" name="Rounded Rectangle 22"/>
+          <p:cNvPr id="33" name="Rounded Rectangle 32"/>
           <p:cNvSpPr/>
           <p:nvPr/>
         </p:nvSpPr>
         <p:spPr>
           <a:xfrm>
-            <a:off x="11064240" y="3657600"/>
-            <a:ext cx="3017520" cy="2926080"/>
+            <a:off x="11064240" y="5212080"/>
+            <a:ext cx="3017520" cy="2651760"/>
           </a:xfrm>
           <a:prstGeom prst="roundRect">
             <a:avLst>
@@ -6536,13 +6926,13 @@
       </p:sp>
       <p:sp>
         <p:nvSpPr>
-          <p:cNvPr id="24" name="TextBox 23"/>
-          <p:cNvSpPr txBox="1"/>
-          <p:nvPr/>
-        </p:nvSpPr>
-        <p:spPr>
-          <a:xfrm>
-            <a:off x="11338560" y="3886200"/>
+          <p:cNvPr id="34" name="TextBox 33"/>
+          <p:cNvSpPr txBox="1"/>
+          <p:nvPr/>
+        </p:nvSpPr>
+        <p:spPr>
+          <a:xfrm>
+            <a:off x="11338560" y="5440680"/>
             <a:ext cx="1371600" cy="411480"/>
           </a:xfrm>
           <a:prstGeom prst="rect">
@@ -6571,13 +6961,13 @@
       </p:sp>
       <p:sp>
         <p:nvSpPr>
-          <p:cNvPr id="25" name="TextBox 24"/>
-          <p:cNvSpPr txBox="1"/>
-          <p:nvPr/>
-        </p:nvSpPr>
-        <p:spPr>
-          <a:xfrm>
-            <a:off x="11338560" y="4434840"/>
+          <p:cNvPr id="35" name="TextBox 34"/>
+          <p:cNvSpPr txBox="1"/>
+          <p:nvPr/>
+        </p:nvSpPr>
+        <p:spPr>
+          <a:xfrm>
+            <a:off x="11338560" y="5989320"/>
             <a:ext cx="2468879" cy="274320"/>
           </a:xfrm>
           <a:prstGeom prst="rect">
@@ -6606,13 +6996,13 @@
       </p:sp>
       <p:sp>
         <p:nvSpPr>
-          <p:cNvPr id="26" name="TextBox 25"/>
-          <p:cNvSpPr txBox="1"/>
-          <p:nvPr/>
-        </p:nvSpPr>
-        <p:spPr>
-          <a:xfrm>
-            <a:off x="11338560" y="4709160"/>
+          <p:cNvPr id="36" name="TextBox 35"/>
+          <p:cNvSpPr txBox="1"/>
+          <p:nvPr/>
+        </p:nvSpPr>
+        <p:spPr>
+          <a:xfrm>
+            <a:off x="11338560" y="6263640"/>
             <a:ext cx="2468879" cy="548640"/>
           </a:xfrm>
           <a:prstGeom prst="rect">
@@ -6641,14 +7031,14 @@
       </p:sp>
       <p:sp>
         <p:nvSpPr>
-          <p:cNvPr id="27" name="TextBox 26"/>
-          <p:cNvSpPr txBox="1"/>
-          <p:nvPr/>
-        </p:nvSpPr>
-        <p:spPr>
-          <a:xfrm>
-            <a:off x="11338560" y="5349240"/>
-            <a:ext cx="2468879" cy="1097280"/>
+          <p:cNvPr id="37" name="TextBox 36"/>
+          <p:cNvSpPr txBox="1"/>
+          <p:nvPr/>
+        </p:nvSpPr>
+        <p:spPr>
+          <a:xfrm>
+            <a:off x="11338560" y="6903720"/>
+            <a:ext cx="2468879" cy="822959"/>
           </a:xfrm>
           <a:prstGeom prst="rect">
             <a:avLst/>
@@ -6669,20 +7059,20 @@
                 </a:solidFill>
                 <a:latin typeface="Calibri"/>
               </a:rPr>
-              <a:t>Mensagens sensíveis aprovadas pela Sara. Verificação de voz da clínica e sanidade.</a:t>
-            </a:r>
-          </a:p>
-        </p:txBody>
-      </p:sp>
-      <p:sp>
-        <p:nvSpPr>
-          <p:cNvPr id="28" name="Right Arrow 27"/>
+              <a:t>Code escreve «em espera»; Cowork mostra à Sara; Sara aprova → Code envia.</a:t>
+            </a:r>
+          </a:p>
+        </p:txBody>
+      </p:sp>
+      <p:sp>
+        <p:nvSpPr>
+          <p:cNvPr id="38" name="Right Arrow 37"/>
           <p:cNvSpPr/>
           <p:nvPr/>
         </p:nvSpPr>
         <p:spPr>
           <a:xfrm>
-            <a:off x="14136624" y="5010912"/>
+            <a:off x="14136624" y="6428232"/>
             <a:ext cx="246888" cy="228600"/>
           </a:xfrm>
           <a:prstGeom prst="rightArrow">
@@ -6720,14 +7110,14 @@
       </p:sp>
       <p:sp>
         <p:nvSpPr>
-          <p:cNvPr id="29" name="Rounded Rectangle 28"/>
+          <p:cNvPr id="39" name="Rounded Rectangle 38"/>
           <p:cNvSpPr/>
           <p:nvPr/>
         </p:nvSpPr>
         <p:spPr>
           <a:xfrm>
-            <a:off x="14447519" y="3657600"/>
-            <a:ext cx="3017520" cy="2926080"/>
+            <a:off x="14447519" y="5212080"/>
+            <a:ext cx="3017520" cy="2651760"/>
           </a:xfrm>
           <a:prstGeom prst="roundRect">
             <a:avLst>
@@ -6766,13 +7156,13 @@
       </p:sp>
       <p:sp>
         <p:nvSpPr>
-          <p:cNvPr id="30" name="TextBox 29"/>
-          <p:cNvSpPr txBox="1"/>
-          <p:nvPr/>
-        </p:nvSpPr>
-        <p:spPr>
-          <a:xfrm>
-            <a:off x="14721839" y="3886200"/>
+          <p:cNvPr id="40" name="TextBox 39"/>
+          <p:cNvSpPr txBox="1"/>
+          <p:nvPr/>
+        </p:nvSpPr>
+        <p:spPr>
+          <a:xfrm>
+            <a:off x="14721839" y="5440680"/>
             <a:ext cx="1371600" cy="411480"/>
           </a:xfrm>
           <a:prstGeom prst="rect">
@@ -6801,13 +7191,13 @@
       </p:sp>
       <p:sp>
         <p:nvSpPr>
-          <p:cNvPr id="31" name="TextBox 30"/>
-          <p:cNvSpPr txBox="1"/>
-          <p:nvPr/>
-        </p:nvSpPr>
-        <p:spPr>
-          <a:xfrm>
-            <a:off x="14721839" y="4434840"/>
+          <p:cNvPr id="41" name="TextBox 40"/>
+          <p:cNvSpPr txBox="1"/>
+          <p:nvPr/>
+        </p:nvSpPr>
+        <p:spPr>
+          <a:xfrm>
+            <a:off x="14721839" y="5989320"/>
             <a:ext cx="2468879" cy="274320"/>
           </a:xfrm>
           <a:prstGeom prst="rect">
@@ -6836,13 +7226,13 @@
       </p:sp>
       <p:sp>
         <p:nvSpPr>
-          <p:cNvPr id="32" name="TextBox 31"/>
-          <p:cNvSpPr txBox="1"/>
-          <p:nvPr/>
-        </p:nvSpPr>
-        <p:spPr>
-          <a:xfrm>
-            <a:off x="14721839" y="4709160"/>
+          <p:cNvPr id="42" name="TextBox 41"/>
+          <p:cNvSpPr txBox="1"/>
+          <p:nvPr/>
+        </p:nvSpPr>
+        <p:spPr>
+          <a:xfrm>
+            <a:off x="14721839" y="6263640"/>
             <a:ext cx="2468879" cy="548640"/>
           </a:xfrm>
           <a:prstGeom prst="rect">
@@ -6871,14 +7261,14 @@
       </p:sp>
       <p:sp>
         <p:nvSpPr>
-          <p:cNvPr id="33" name="TextBox 32"/>
-          <p:cNvSpPr txBox="1"/>
-          <p:nvPr/>
-        </p:nvSpPr>
-        <p:spPr>
-          <a:xfrm>
-            <a:off x="14721839" y="5349240"/>
-            <a:ext cx="2468879" cy="1097280"/>
+          <p:cNvPr id="43" name="TextBox 42"/>
+          <p:cNvSpPr txBox="1"/>
+          <p:nvPr/>
+        </p:nvSpPr>
+        <p:spPr>
+          <a:xfrm>
+            <a:off x="14721839" y="6903720"/>
+            <a:ext cx="2468879" cy="822959"/>
           </a:xfrm>
           <a:prstGeom prst="rect">
             <a:avLst/>
@@ -6899,20 +7289,20 @@
                 </a:solidFill>
                 <a:latin typeface="Calibri"/>
               </a:rPr>
-              <a:t>Revisão semanal automática gera patches para os passos anteriores.</a:t>
-            </a:r>
-          </a:p>
-        </p:txBody>
-      </p:sp>
-      <p:sp>
-        <p:nvSpPr>
-          <p:cNvPr id="34" name="TextBox 33"/>
-          <p:cNvSpPr txBox="1"/>
-          <p:nvPr/>
-        </p:nvSpPr>
-        <p:spPr>
-          <a:xfrm>
-            <a:off x="914400" y="6812280"/>
+              <a:t>Cowork revê a semana, gera patches; ambos os runtimes apanham na próxima invocação.</a:t>
+            </a:r>
+          </a:p>
+        </p:txBody>
+      </p:sp>
+      <p:sp>
+        <p:nvSpPr>
+          <p:cNvPr id="44" name="TextBox 43"/>
+          <p:cNvSpPr txBox="1"/>
+          <p:nvPr/>
+        </p:nvSpPr>
+        <p:spPr>
+          <a:xfrm>
+            <a:off x="914400" y="8046720"/>
             <a:ext cx="16459200" cy="457200"/>
           </a:xfrm>
           <a:prstGeom prst="rect">
@@ -6928,27 +7318,27 @@
           <a:p>
             <a:pPr algn="l"/>
             <a:r>
-              <a:rPr sz="1200" b="0" i="1">
+              <a:rPr sz="1150" b="0" i="1">
                 <a:solidFill>
                   <a:srgbClr val="4B5563"/>
                 </a:solidFill>
                 <a:latin typeface="Georgia"/>
               </a:rPr>
-              <a:t>↻  Cada semana, o passo 5 atualiza o passo 2. O sistema melhora porque é usado, não porque alguém escreve código.</a:t>
-            </a:r>
-          </a:p>
-        </p:txBody>
-      </p:sp>
-      <p:sp>
-        <p:nvSpPr>
-          <p:cNvPr id="35" name="Rounded Rectangle 34"/>
+              <a:t>↻  Cada semana, o passo 5 atualiza o passo 2 — Code e Cowork apanham as melhorias da mesma source. O sistema melhora porque é usado.</a:t>
+            </a:r>
+          </a:p>
+        </p:txBody>
+      </p:sp>
+      <p:sp>
+        <p:nvSpPr>
+          <p:cNvPr id="45" name="Rounded Rectangle 44"/>
           <p:cNvSpPr/>
           <p:nvPr/>
         </p:nvSpPr>
         <p:spPr>
           <a:xfrm>
-            <a:off x="914400" y="7498079"/>
-            <a:ext cx="5242560" cy="1828800"/>
+            <a:off x="914400" y="8641080"/>
+            <a:ext cx="5242560" cy="1005840"/>
           </a:xfrm>
           <a:prstGeom prst="roundRect">
             <a:avLst>
@@ -6987,119 +7377,119 @@
       </p:sp>
       <p:sp>
         <p:nvSpPr>
-          <p:cNvPr id="36" name="TextBox 35"/>
-          <p:cNvSpPr txBox="1"/>
-          <p:nvPr/>
-        </p:nvSpPr>
-        <p:spPr>
-          <a:xfrm>
-            <a:off x="1188720" y="7726679"/>
-            <a:ext cx="4693920" cy="274320"/>
-          </a:xfrm>
-          <a:prstGeom prst="rect">
-            <a:avLst/>
-          </a:prstGeom>
-          <a:noFill/>
-        </p:spPr>
-        <p:txBody>
-          <a:bodyPr wrap="square" lIns="0" rIns="0" tIns="0" bIns="0" anchor="t">
-            <a:spAutoFit/>
-          </a:bodyPr>
-          <a:lstStyle/>
-          <a:p>
-            <a:pPr algn="l"/>
-            <a:r>
-              <a:rPr sz="825" b="0" i="0" spc="80">
+          <p:cNvPr id="46" name="TextBox 45"/>
+          <p:cNvSpPr txBox="1"/>
+          <p:nvPr/>
+        </p:nvSpPr>
+        <p:spPr>
+          <a:xfrm>
+            <a:off x="1143000" y="8778240"/>
+            <a:ext cx="4785360" cy="274320"/>
+          </a:xfrm>
+          <a:prstGeom prst="rect">
+            <a:avLst/>
+          </a:prstGeom>
+          <a:noFill/>
+        </p:spPr>
+        <p:txBody>
+          <a:bodyPr wrap="square" lIns="0" rIns="0" tIns="0" bIns="0" anchor="t">
+            <a:spAutoFit/>
+          </a:bodyPr>
+          <a:lstStyle/>
+          <a:p>
+            <a:pPr algn="l"/>
+            <a:r>
+              <a:rPr sz="750" b="0" i="0" spc="80">
                 <a:solidFill>
                   <a:srgbClr val="FF8449"/>
                 </a:solidFill>
                 <a:latin typeface="Calibri"/>
               </a:rPr>
-              <a:t>BASE DE DADOS</a:t>
-            </a:r>
-          </a:p>
-        </p:txBody>
-      </p:sp>
-      <p:sp>
-        <p:nvSpPr>
-          <p:cNvPr id="37" name="TextBox 36"/>
-          <p:cNvSpPr txBox="1"/>
-          <p:nvPr/>
-        </p:nvSpPr>
-        <p:spPr>
-          <a:xfrm>
-            <a:off x="1188720" y="8001000"/>
-            <a:ext cx="4693920" cy="457200"/>
-          </a:xfrm>
-          <a:prstGeom prst="rect">
-            <a:avLst/>
-          </a:prstGeom>
-          <a:noFill/>
-        </p:spPr>
-        <p:txBody>
-          <a:bodyPr wrap="square" lIns="0" rIns="0" tIns="0" bIns="0" anchor="t">
-            <a:spAutoFit/>
-          </a:bodyPr>
-          <a:lstStyle/>
-          <a:p>
-            <a:pPr algn="l"/>
-            <a:r>
-              <a:rPr sz="1600" b="0" i="0">
+              <a:t>MEMÓRIA DA CLÍNICA</a:t>
+            </a:r>
+          </a:p>
+        </p:txBody>
+      </p:sp>
+      <p:sp>
+        <p:nvSpPr>
+          <p:cNvPr id="47" name="TextBox 46"/>
+          <p:cNvSpPr txBox="1"/>
+          <p:nvPr/>
+        </p:nvSpPr>
+        <p:spPr>
+          <a:xfrm>
+            <a:off x="1143000" y="8961119"/>
+            <a:ext cx="4785360" cy="274320"/>
+          </a:xfrm>
+          <a:prstGeom prst="rect">
+            <a:avLst/>
+          </a:prstGeom>
+          <a:noFill/>
+        </p:spPr>
+        <p:txBody>
+          <a:bodyPr wrap="square" lIns="0" rIns="0" tIns="0" bIns="0" anchor="t">
+            <a:spAutoFit/>
+          </a:bodyPr>
+          <a:lstStyle/>
+          <a:p>
+            <a:pPr algn="l"/>
+            <a:r>
+              <a:rPr sz="1200" b="0" i="0">
                 <a:solidFill>
                   <a:srgbClr val="000000"/>
                 </a:solidFill>
                 <a:latin typeface="Georgia"/>
               </a:rPr>
-              <a:t>Company Brain</a:t>
-            </a:r>
-          </a:p>
-        </p:txBody>
-      </p:sp>
-      <p:sp>
-        <p:nvSpPr>
-          <p:cNvPr id="38" name="TextBox 37"/>
-          <p:cNvSpPr txBox="1"/>
-          <p:nvPr/>
-        </p:nvSpPr>
-        <p:spPr>
-          <a:xfrm>
-            <a:off x="1188720" y="8458200"/>
-            <a:ext cx="4693920" cy="822960"/>
-          </a:xfrm>
-          <a:prstGeom prst="rect">
-            <a:avLst/>
-          </a:prstGeom>
-          <a:noFill/>
-        </p:spPr>
-        <p:txBody>
-          <a:bodyPr wrap="square" lIns="0" rIns="0" tIns="0" bIns="0" anchor="t">
-            <a:spAutoFit/>
-          </a:bodyPr>
-          <a:lstStyle/>
-          <a:p>
-            <a:pPr algn="l"/>
-            <a:r>
-              <a:rPr sz="1000" b="0" i="0">
+              <a:t>Base de dados central</a:t>
+            </a:r>
+          </a:p>
+        </p:txBody>
+      </p:sp>
+      <p:sp>
+        <p:nvSpPr>
+          <p:cNvPr id="48" name="TextBox 47"/>
+          <p:cNvSpPr txBox="1"/>
+          <p:nvPr/>
+        </p:nvSpPr>
+        <p:spPr>
+          <a:xfrm>
+            <a:off x="1143000" y="9262872"/>
+            <a:ext cx="4785360" cy="365760"/>
+          </a:xfrm>
+          <a:prstGeom prst="rect">
+            <a:avLst/>
+          </a:prstGeom>
+          <a:noFill/>
+        </p:spPr>
+        <p:txBody>
+          <a:bodyPr wrap="square" lIns="0" rIns="0" tIns="0" bIns="0" anchor="t">
+            <a:spAutoFit/>
+          </a:bodyPr>
+          <a:lstStyle/>
+          <a:p>
+            <a:pPr algn="l"/>
+            <a:r>
+              <a:rPr sz="900" b="0" i="0">
                 <a:solidFill>
                   <a:srgbClr val="4B5563"/>
                 </a:solidFill>
                 <a:latin typeface="Calibri"/>
               </a:rPr>
-              <a:t>Tudo o que a clínica produz: pacientes, visitas, mensagens, sugestões. Permanente.</a:t>
-            </a:r>
-          </a:p>
-        </p:txBody>
-      </p:sp>
-      <p:sp>
-        <p:nvSpPr>
-          <p:cNvPr id="39" name="Rounded Rectangle 38"/>
+              <a:t>Pacientes, visitas, mensagens, sugestões. Permanente. Code + Cowork escrevem aqui.</a:t>
+            </a:r>
+          </a:p>
+        </p:txBody>
+      </p:sp>
+      <p:sp>
+        <p:nvSpPr>
+          <p:cNvPr id="49" name="Rounded Rectangle 48"/>
           <p:cNvSpPr/>
           <p:nvPr/>
         </p:nvSpPr>
         <p:spPr>
           <a:xfrm>
-            <a:off x="6522720" y="7498079"/>
-            <a:ext cx="5242560" cy="1828800"/>
+            <a:off x="6522720" y="8641080"/>
+            <a:ext cx="5242560" cy="1005840"/>
           </a:xfrm>
           <a:prstGeom prst="roundRect">
             <a:avLst>
@@ -7138,29 +7528,29 @@
       </p:sp>
       <p:sp>
         <p:nvSpPr>
-          <p:cNvPr id="40" name="TextBox 39"/>
-          <p:cNvSpPr txBox="1"/>
-          <p:nvPr/>
-        </p:nvSpPr>
-        <p:spPr>
-          <a:xfrm>
-            <a:off x="6797040" y="7726679"/>
-            <a:ext cx="4693920" cy="274320"/>
-          </a:xfrm>
-          <a:prstGeom prst="rect">
-            <a:avLst/>
-          </a:prstGeom>
-          <a:noFill/>
-        </p:spPr>
-        <p:txBody>
-          <a:bodyPr wrap="square" lIns="0" rIns="0" tIns="0" bIns="0" anchor="t">
-            <a:spAutoFit/>
-          </a:bodyPr>
-          <a:lstStyle/>
-          <a:p>
-            <a:pPr algn="l"/>
-            <a:r>
-              <a:rPr sz="825" b="0" i="0" spc="80">
+          <p:cNvPr id="50" name="TextBox 49"/>
+          <p:cNvSpPr txBox="1"/>
+          <p:nvPr/>
+        </p:nvSpPr>
+        <p:spPr>
+          <a:xfrm>
+            <a:off x="6751320" y="8778240"/>
+            <a:ext cx="4785360" cy="274320"/>
+          </a:xfrm>
+          <a:prstGeom prst="rect">
+            <a:avLst/>
+          </a:prstGeom>
+          <a:noFill/>
+        </p:spPr>
+        <p:txBody>
+          <a:bodyPr wrap="square" lIns="0" rIns="0" tIns="0" bIns="0" anchor="t">
+            <a:spAutoFit/>
+          </a:bodyPr>
+          <a:lstStyle/>
+          <a:p>
+            <a:pPr algn="l"/>
+            <a:r>
+              <a:rPr sz="750" b="0" i="0" spc="80">
                 <a:solidFill>
                   <a:srgbClr val="FF8449"/>
                 </a:solidFill>
@@ -7173,29 +7563,29 @@
       </p:sp>
       <p:sp>
         <p:nvSpPr>
-          <p:cNvPr id="41" name="TextBox 40"/>
-          <p:cNvSpPr txBox="1"/>
-          <p:nvPr/>
-        </p:nvSpPr>
-        <p:spPr>
-          <a:xfrm>
-            <a:off x="6797040" y="8001000"/>
-            <a:ext cx="4693920" cy="457200"/>
-          </a:xfrm>
-          <a:prstGeom prst="rect">
-            <a:avLst/>
-          </a:prstGeom>
-          <a:noFill/>
-        </p:spPr>
-        <p:txBody>
-          <a:bodyPr wrap="square" lIns="0" rIns="0" tIns="0" bIns="0" anchor="t">
-            <a:spAutoFit/>
-          </a:bodyPr>
-          <a:lstStyle/>
-          <a:p>
-            <a:pPr algn="l"/>
-            <a:r>
-              <a:rPr sz="1600" b="0" i="0">
+          <p:cNvPr id="51" name="TextBox 50"/>
+          <p:cNvSpPr txBox="1"/>
+          <p:nvPr/>
+        </p:nvSpPr>
+        <p:spPr>
+          <a:xfrm>
+            <a:off x="6751320" y="8961119"/>
+            <a:ext cx="4785360" cy="274320"/>
+          </a:xfrm>
+          <a:prstGeom prst="rect">
+            <a:avLst/>
+          </a:prstGeom>
+          <a:noFill/>
+        </p:spPr>
+        <p:txBody>
+          <a:bodyPr wrap="square" lIns="0" rIns="0" tIns="0" bIns="0" anchor="t">
+            <a:spAutoFit/>
+          </a:bodyPr>
+          <a:lstStyle/>
+          <a:p>
+            <a:pPr algn="l"/>
+            <a:r>
+              <a:rPr sz="1200" b="0" i="0">
                 <a:solidFill>
                   <a:srgbClr val="000000"/>
                 </a:solidFill>
@@ -7208,49 +7598,49 @@
       </p:sp>
       <p:sp>
         <p:nvSpPr>
-          <p:cNvPr id="42" name="TextBox 41"/>
-          <p:cNvSpPr txBox="1"/>
-          <p:nvPr/>
-        </p:nvSpPr>
-        <p:spPr>
-          <a:xfrm>
-            <a:off x="6797040" y="8458200"/>
-            <a:ext cx="4693920" cy="822960"/>
-          </a:xfrm>
-          <a:prstGeom prst="rect">
-            <a:avLst/>
-          </a:prstGeom>
-          <a:noFill/>
-        </p:spPr>
-        <p:txBody>
-          <a:bodyPr wrap="square" lIns="0" rIns="0" tIns="0" bIns="0" anchor="t">
-            <a:spAutoFit/>
-          </a:bodyPr>
-          <a:lstStyle/>
-          <a:p>
-            <a:pPr algn="l"/>
-            <a:r>
-              <a:rPr sz="1000" b="0" i="0">
+          <p:cNvPr id="52" name="TextBox 51"/>
+          <p:cNvSpPr txBox="1"/>
+          <p:nvPr/>
+        </p:nvSpPr>
+        <p:spPr>
+          <a:xfrm>
+            <a:off x="6751320" y="9262872"/>
+            <a:ext cx="4785360" cy="365760"/>
+          </a:xfrm>
+          <a:prstGeom prst="rect">
+            <a:avLst/>
+          </a:prstGeom>
+          <a:noFill/>
+        </p:spPr>
+        <p:txBody>
+          <a:bodyPr wrap="square" lIns="0" rIns="0" tIns="0" bIns="0" anchor="t">
+            <a:spAutoFit/>
+          </a:bodyPr>
+          <a:lstStyle/>
+          <a:p>
+            <a:pPr algn="l"/>
+            <a:r>
+              <a:rPr sz="900" b="0" i="0">
                 <a:solidFill>
                   <a:srgbClr val="4B5563"/>
                 </a:solidFill>
                 <a:latin typeface="Calibri"/>
               </a:rPr>
-              <a:t>Prompts, regras, automações. Substituível conforme o Claude evolui.</a:t>
-            </a:r>
-          </a:p>
-        </p:txBody>
-      </p:sp>
-      <p:sp>
-        <p:nvSpPr>
-          <p:cNvPr id="43" name="Rounded Rectangle 42"/>
+              <a:t>Prompts, skills, regras. Source única partilhada — patches viram-se de uma vez para ambos.</a:t>
+            </a:r>
+          </a:p>
+        </p:txBody>
+      </p:sp>
+      <p:sp>
+        <p:nvSpPr>
+          <p:cNvPr id="53" name="Rounded Rectangle 52"/>
           <p:cNvSpPr/>
           <p:nvPr/>
         </p:nvSpPr>
         <p:spPr>
           <a:xfrm>
-            <a:off x="12131040" y="7498079"/>
-            <a:ext cx="5242560" cy="1828800"/>
+            <a:off x="12131040" y="8641080"/>
+            <a:ext cx="5242560" cy="1005840"/>
           </a:xfrm>
           <a:prstGeom prst="roundRect">
             <a:avLst>
@@ -7289,29 +7679,29 @@
       </p:sp>
       <p:sp>
         <p:nvSpPr>
-          <p:cNvPr id="44" name="TextBox 43"/>
-          <p:cNvSpPr txBox="1"/>
-          <p:nvPr/>
-        </p:nvSpPr>
-        <p:spPr>
-          <a:xfrm>
-            <a:off x="12405360" y="7726679"/>
-            <a:ext cx="4693920" cy="274320"/>
-          </a:xfrm>
-          <a:prstGeom prst="rect">
-            <a:avLst/>
-          </a:prstGeom>
-          <a:noFill/>
-        </p:spPr>
-        <p:txBody>
-          <a:bodyPr wrap="square" lIns="0" rIns="0" tIns="0" bIns="0" anchor="t">
-            <a:spAutoFit/>
-          </a:bodyPr>
-          <a:lstStyle/>
-          <a:p>
-            <a:pPr algn="l"/>
-            <a:r>
-              <a:rPr sz="825" b="0" i="0" spc="80">
+          <p:cNvPr id="54" name="TextBox 53"/>
+          <p:cNvSpPr txBox="1"/>
+          <p:nvPr/>
+        </p:nvSpPr>
+        <p:spPr>
+          <a:xfrm>
+            <a:off x="12359640" y="8778240"/>
+            <a:ext cx="4785360" cy="274320"/>
+          </a:xfrm>
+          <a:prstGeom prst="rect">
+            <a:avLst/>
+          </a:prstGeom>
+          <a:noFill/>
+        </p:spPr>
+        <p:txBody>
+          <a:bodyPr wrap="square" lIns="0" rIns="0" tIns="0" bIns="0" anchor="t">
+            <a:spAutoFit/>
+          </a:bodyPr>
+          <a:lstStyle/>
+          <a:p>
+            <a:pPr algn="l"/>
+            <a:r>
+              <a:rPr sz="750" b="0" i="0" spc="80">
                 <a:solidFill>
                   <a:srgbClr val="FF8449"/>
                 </a:solidFill>
@@ -7324,29 +7714,29 @@
       </p:sp>
       <p:sp>
         <p:nvSpPr>
-          <p:cNvPr id="45" name="TextBox 44"/>
-          <p:cNvSpPr txBox="1"/>
-          <p:nvPr/>
-        </p:nvSpPr>
-        <p:spPr>
-          <a:xfrm>
-            <a:off x="12405360" y="8001000"/>
-            <a:ext cx="4693920" cy="457200"/>
-          </a:xfrm>
-          <a:prstGeom prst="rect">
-            <a:avLst/>
-          </a:prstGeom>
-          <a:noFill/>
-        </p:spPr>
-        <p:txBody>
-          <a:bodyPr wrap="square" lIns="0" rIns="0" tIns="0" bIns="0" anchor="t">
-            <a:spAutoFit/>
-          </a:bodyPr>
-          <a:lstStyle/>
-          <a:p>
-            <a:pPr algn="l"/>
-            <a:r>
-              <a:rPr sz="1600" b="0" i="0">
+          <p:cNvPr id="55" name="TextBox 54"/>
+          <p:cNvSpPr txBox="1"/>
+          <p:nvPr/>
+        </p:nvSpPr>
+        <p:spPr>
+          <a:xfrm>
+            <a:off x="12359640" y="8961119"/>
+            <a:ext cx="4785360" cy="274320"/>
+          </a:xfrm>
+          <a:prstGeom prst="rect">
+            <a:avLst/>
+          </a:prstGeom>
+          <a:noFill/>
+        </p:spPr>
+        <p:txBody>
+          <a:bodyPr wrap="square" lIns="0" rIns="0" tIns="0" bIns="0" anchor="t">
+            <a:spAutoFit/>
+          </a:bodyPr>
+          <a:lstStyle/>
+          <a:p>
+            <a:pPr algn="l"/>
+            <a:r>
+              <a:rPr sz="1200" b="0" i="0">
                 <a:solidFill>
                   <a:srgbClr val="000000"/>
                 </a:solidFill>
@@ -7359,29 +7749,29 @@
       </p:sp>
       <p:sp>
         <p:nvSpPr>
-          <p:cNvPr id="46" name="TextBox 45"/>
-          <p:cNvSpPr txBox="1"/>
-          <p:nvPr/>
-        </p:nvSpPr>
-        <p:spPr>
-          <a:xfrm>
-            <a:off x="12405360" y="8458200"/>
-            <a:ext cx="4693920" cy="822960"/>
-          </a:xfrm>
-          <a:prstGeom prst="rect">
-            <a:avLst/>
-          </a:prstGeom>
-          <a:noFill/>
-        </p:spPr>
-        <p:txBody>
-          <a:bodyPr wrap="square" lIns="0" rIns="0" tIns="0" bIns="0" anchor="t">
-            <a:spAutoFit/>
-          </a:bodyPr>
-          <a:lstStyle/>
-          <a:p>
-            <a:pPr algn="l"/>
-            <a:r>
-              <a:rPr sz="1000" b="0" i="0">
+          <p:cNvPr id="56" name="TextBox 55"/>
+          <p:cNvSpPr txBox="1"/>
+          <p:nvPr/>
+        </p:nvSpPr>
+        <p:spPr>
+          <a:xfrm>
+            <a:off x="12359640" y="9262872"/>
+            <a:ext cx="4785360" cy="365760"/>
+          </a:xfrm>
+          <a:prstGeom prst="rect">
+            <a:avLst/>
+          </a:prstGeom>
+          <a:noFill/>
+        </p:spPr>
+        <p:txBody>
+          <a:bodyPr wrap="square" lIns="0" rIns="0" tIns="0" bIns="0" anchor="t">
+            <a:spAutoFit/>
+          </a:bodyPr>
+          <a:lstStyle/>
+          <a:p>
+            <a:pPr algn="l"/>
+            <a:r>
+              <a:rPr sz="900" b="0" i="0">
                 <a:solidFill>
                   <a:srgbClr val="4B5563"/>
                 </a:solidFill>
@@ -7394,7 +7784,7 @@
       </p:sp>
       <p:sp>
         <p:nvSpPr>
-          <p:cNvPr id="47" name="TextBox 46"/>
+          <p:cNvPr id="57" name="TextBox 56"/>
           <p:cNvSpPr txBox="1"/>
           <p:nvPr/>
         </p:nvSpPr>
@@ -7429,7 +7819,7 @@
       </p:sp>
       <p:sp>
         <p:nvSpPr>
-          <p:cNvPr id="48" name="TextBox 47"/>
+          <p:cNvPr id="58" name="TextBox 57"/>
           <p:cNvSpPr txBox="1"/>
           <p:nvPr/>
         </p:nvSpPr>
@@ -7464,7 +7854,7 @@
       </p:sp>
       <p:sp>
         <p:nvSpPr>
-          <p:cNvPr id="49" name="TextBox 48"/>
+          <p:cNvPr id="59" name="TextBox 58"/>
           <p:cNvSpPr txBox="1"/>
           <p:nvPr/>
         </p:nvSpPr>

--- a/clients/sara/Sara-Proposal.pptx
+++ b/clients/sara/Sara-Proposal.pptx
@@ -3182,28 +3182,28 @@
         <p:spPr>
           <a:xfrm>
             <a:off x="914400" y="3529584"/>
-            <a:ext cx="10972800" cy="1097280"/>
-          </a:xfrm>
-          <a:prstGeom prst="rect">
-            <a:avLst/>
-          </a:prstGeom>
-          <a:noFill/>
-        </p:spPr>
-        <p:txBody>
-          <a:bodyPr wrap="square" lIns="0" rIns="0" tIns="0" bIns="0" anchor="t">
-            <a:spAutoFit/>
-          </a:bodyPr>
-          <a:lstStyle/>
-          <a:p>
-            <a:pPr algn="l"/>
-            <a:r>
-              <a:rPr sz="1700" b="0" i="0">
+            <a:ext cx="10972800" cy="1371600"/>
+          </a:xfrm>
+          <a:prstGeom prst="rect">
+            <a:avLst/>
+          </a:prstGeom>
+          <a:noFill/>
+        </p:spPr>
+        <p:txBody>
+          <a:bodyPr wrap="square" lIns="0" rIns="0" tIns="0" bIns="0" anchor="t">
+            <a:spAutoFit/>
+          </a:bodyPr>
+          <a:lstStyle/>
+          <a:p>
+            <a:pPr algn="l"/>
+            <a:r>
+              <a:rPr sz="1600" b="0" i="0">
                 <a:solidFill>
                   <a:srgbClr val="4B5563"/>
                 </a:solidFill>
                 <a:latin typeface="Calibri"/>
               </a:rPr>
-              <a:t>Quatro prioridades. Dois runtimes Claude — Code sempre ligado para o tempo real, Cowork como cockpit da proprietária. Uma camada de inteligência sobre a automação que já tem em funcionamento.</a:t>
+              <a:t>Oito prioridades em ~45 dias — do paciente à aquisição. Dois runtimes Claude (Code sempre ligado para tempo real, Cowork como cockpit da proprietária), uma camada de inteligência sobre a automação que já tem, mais um site novo e a operação de marketing.</a:t>
             </a:r>
           </a:p>
         </p:txBody>
@@ -3442,7 +3442,7 @@
           <a:p>
             <a:pPr algn="l"/>
             <a:r>
-              <a:rPr sz="1900" b="0" i="0">
+              <a:rPr sz="1800" b="0" i="0">
                 <a:solidFill>
                   <a:srgbClr val="000000"/>
                 </a:solidFill>
@@ -3547,7 +3547,7 @@
           <a:p>
             <a:pPr algn="l"/>
             <a:r>
-              <a:rPr sz="1900" b="0" i="0">
+              <a:rPr sz="1800" b="0" i="0">
                 <a:solidFill>
                   <a:srgbClr val="000000"/>
                 </a:solidFill>
@@ -3652,7 +3652,7 @@
           <a:p>
             <a:pPr algn="l"/>
             <a:r>
-              <a:rPr sz="1900" b="0" i="0">
+              <a:rPr sz="1800" b="0" i="0">
                 <a:solidFill>
                   <a:srgbClr val="000000"/>
                 </a:solidFill>
@@ -3757,7 +3757,7 @@
           <a:p>
             <a:pPr algn="l"/>
             <a:r>
-              <a:rPr sz="1900" b="0" i="0">
+              <a:rPr sz="1800" b="0" i="0">
                 <a:solidFill>
                   <a:srgbClr val="000000"/>
                 </a:solidFill>
@@ -3862,13 +3862,13 @@
           <a:p>
             <a:pPr algn="l"/>
             <a:r>
-              <a:rPr sz="1900" b="0" i="0">
+              <a:rPr sz="1800" b="0" i="0">
                 <a:solidFill>
                   <a:srgbClr val="000000"/>
                 </a:solidFill>
                 <a:latin typeface="Georgia"/>
               </a:rPr>
-              <a:t>Arquitetura · loop</a:t>
+              <a:t>Redes sociais &amp; local</a:t>
             </a:r>
           </a:p>
         </p:txBody>
@@ -3967,13 +3967,13 @@
           <a:p>
             <a:pPr algn="l"/>
             <a:r>
-              <a:rPr sz="1900" b="0" i="0">
+              <a:rPr sz="1800" b="0" i="0">
                 <a:solidFill>
                   <a:srgbClr val="000000"/>
                 </a:solidFill>
                 <a:latin typeface="Georgia"/>
               </a:rPr>
-              <a:t>Fora da Fase 1</a:t>
+              <a:t>Google Ads</a:t>
             </a:r>
           </a:p>
         </p:txBody>
@@ -4072,13 +4072,13 @@
           <a:p>
             <a:pPr algn="l"/>
             <a:r>
-              <a:rPr sz="1900" b="0" i="0">
+              <a:rPr sz="1800" b="0" i="0">
                 <a:solidFill>
                   <a:srgbClr val="000000"/>
                 </a:solidFill>
                 <a:latin typeface="Georgia"/>
               </a:rPr>
-              <a:t>Como chegamos lá</a:t>
+              <a:t>Meta Ads</a:t>
             </a:r>
           </a:p>
         </p:txBody>
@@ -4177,13 +4177,13 @@
           <a:p>
             <a:pPr algn="l"/>
             <a:r>
-              <a:rPr sz="1900" b="0" i="0">
+              <a:rPr sz="1800" b="0" i="0">
                 <a:solidFill>
                   <a:srgbClr val="000000"/>
                 </a:solidFill>
                 <a:latin typeface="Georgia"/>
               </a:rPr>
-              <a:t>Próximo passo</a:t>
+              <a:t>Website + manutenção</a:t>
             </a:r>
           </a:p>
         </p:txBody>
@@ -4314,7 +4314,7 @@
                 </a:solidFill>
                 <a:latin typeface="Georgia"/>
               </a:rPr>
-              <a:t>4 prioridades.</a:t>
+              <a:t>8 prioridades.</a:t>
             </a:r>
           </a:p>
         </p:txBody>
@@ -4343,13 +4343,13 @@
           <a:p>
             <a:pPr algn="l"/>
             <a:r>
-              <a:rPr sz="1650" b="0" i="0">
+              <a:rPr sz="1550" b="0" i="0">
                 <a:solidFill>
                   <a:srgbClr val="4B5563"/>
                 </a:solidFill>
                 <a:latin typeface="Calibri"/>
               </a:rPr>
-              <a:t>Uma camada de inteligência sobre a automação que já tem em funcionamento. Não substitui — amplia.</a:t>
+              <a:t>Do paciente à aquisição. Mesma base de dados central, mesmas ferramentas, mesma voz. Não substitui o que já tem — amplia e cria o que falta.</a:t>
             </a:r>
           </a:p>
         </p:txBody>
@@ -4362,12 +4362,12 @@
         </p:nvSpPr>
         <p:spPr>
           <a:xfrm>
-            <a:off x="914400" y="3127248"/>
-            <a:ext cx="3941063" cy="5943600"/>
+            <a:off x="914400" y="2971800"/>
+            <a:ext cx="3941063" cy="3154680"/>
           </a:xfrm>
           <a:prstGeom prst="roundRect">
             <a:avLst>
-              <a:gd name="adj" fmla="val 3000"/>
+              <a:gd name="adj" fmla="val 4000"/>
             </a:avLst>
           </a:prstGeom>
           <a:solidFill>
@@ -4408,8 +4408,8 @@
         </p:nvSpPr>
         <p:spPr>
           <a:xfrm>
-            <a:off x="914400" y="3127248"/>
-            <a:ext cx="3941063" cy="64008"/>
+            <a:off x="914400" y="2971800"/>
+            <a:ext cx="3941063" cy="54864"/>
           </a:xfrm>
           <a:prstGeom prst="rect">
             <a:avLst/>
@@ -4452,23 +4452,23 @@
         </p:nvSpPr>
         <p:spPr>
           <a:xfrm>
-            <a:off x="1188720" y="3383280"/>
-            <a:ext cx="914400" cy="320040"/>
-          </a:xfrm>
-          <a:prstGeom prst="rect">
-            <a:avLst/>
-          </a:prstGeom>
-          <a:noFill/>
-        </p:spPr>
-        <p:txBody>
-          <a:bodyPr wrap="square" lIns="0" rIns="0" tIns="0" bIns="0" anchor="t">
-            <a:spAutoFit/>
-          </a:bodyPr>
-          <a:lstStyle/>
-          <a:p>
-            <a:pPr algn="l"/>
-            <a:r>
-              <a:rPr sz="1150" b="0" i="0" spc="40">
+            <a:off x="1188720" y="3172968"/>
+            <a:ext cx="914400" cy="274320"/>
+          </a:xfrm>
+          <a:prstGeom prst="rect">
+            <a:avLst/>
+          </a:prstGeom>
+          <a:noFill/>
+        </p:spPr>
+        <p:txBody>
+          <a:bodyPr wrap="square" lIns="0" rIns="0" tIns="0" bIns="0" anchor="t">
+            <a:spAutoFit/>
+          </a:bodyPr>
+          <a:lstStyle/>
+          <a:p>
+            <a:pPr algn="l"/>
+            <a:r>
+              <a:rPr sz="1100" b="0" i="0" spc="40">
                 <a:solidFill>
                   <a:srgbClr val="6B7280"/>
                 </a:solidFill>
@@ -4487,7 +4487,7 @@
         </p:nvSpPr>
         <p:spPr>
           <a:xfrm>
-            <a:off x="1188720" y="3703320"/>
+            <a:off x="1188720" y="3429000"/>
             <a:ext cx="3392423" cy="182880"/>
           </a:xfrm>
           <a:prstGeom prst="rect">
@@ -4503,7 +4503,7 @@
           <a:p>
             <a:pPr algn="l"/>
             <a:r>
-              <a:rPr sz="825" b="0" i="0" spc="80">
+              <a:rPr sz="800" b="0" i="0" spc="80">
                 <a:solidFill>
                   <a:srgbClr val="FF8449"/>
                 </a:solidFill>
@@ -4522,23 +4522,23 @@
         </p:nvSpPr>
         <p:spPr>
           <a:xfrm>
-            <a:off x="1188720" y="3977639"/>
-            <a:ext cx="3392423" cy="548640"/>
-          </a:xfrm>
-          <a:prstGeom prst="rect">
-            <a:avLst/>
-          </a:prstGeom>
-          <a:noFill/>
-        </p:spPr>
-        <p:txBody>
-          <a:bodyPr wrap="square" lIns="0" rIns="0" tIns="0" bIns="0" anchor="t">
-            <a:spAutoFit/>
-          </a:bodyPr>
-          <a:lstStyle/>
-          <a:p>
-            <a:pPr algn="l"/>
-            <a:r>
-              <a:rPr sz="2200" b="0" i="0">
+            <a:off x="1188720" y="3657600"/>
+            <a:ext cx="3392423" cy="502920"/>
+          </a:xfrm>
+          <a:prstGeom prst="rect">
+            <a:avLst/>
+          </a:prstGeom>
+          <a:noFill/>
+        </p:spPr>
+        <p:txBody>
+          <a:bodyPr wrap="square" lIns="0" rIns="0" tIns="0" bIns="0" anchor="t">
+            <a:spAutoFit/>
+          </a:bodyPr>
+          <a:lstStyle/>
+          <a:p>
+            <a:pPr algn="l"/>
+            <a:r>
+              <a:rPr sz="1800" b="0" i="0">
                 <a:solidFill>
                   <a:srgbClr val="000000"/>
                 </a:solidFill>
@@ -4557,23 +4557,23 @@
         </p:nvSpPr>
         <p:spPr>
           <a:xfrm>
-            <a:off x="1188720" y="4617720"/>
-            <a:ext cx="3392423" cy="914400"/>
-          </a:xfrm>
-          <a:prstGeom prst="rect">
-            <a:avLst/>
-          </a:prstGeom>
-          <a:noFill/>
-        </p:spPr>
-        <p:txBody>
-          <a:bodyPr wrap="square" lIns="0" rIns="0" tIns="0" bIns="0" anchor="t">
-            <a:spAutoFit/>
-          </a:bodyPr>
-          <a:lstStyle/>
-          <a:p>
-            <a:pPr algn="l"/>
-            <a:r>
-              <a:rPr sz="1200" b="0" i="1">
+            <a:off x="1188720" y="4206240"/>
+            <a:ext cx="3392423" cy="822960"/>
+          </a:xfrm>
+          <a:prstGeom prst="rect">
+            <a:avLst/>
+          </a:prstGeom>
+          <a:noFill/>
+        </p:spPr>
+        <p:txBody>
+          <a:bodyPr wrap="square" lIns="0" rIns="0" tIns="0" bIns="0" anchor="t">
+            <a:spAutoFit/>
+          </a:bodyPr>
+          <a:lstStyle/>
+          <a:p>
+            <a:pPr algn="l"/>
+            <a:r>
+              <a:rPr sz="1050" b="0" i="1">
                 <a:solidFill>
                   <a:srgbClr val="4B5563"/>
                 </a:solidFill>
@@ -4592,7 +4592,7 @@
         </p:nvCxnSpPr>
         <p:spPr>
           <a:xfrm>
-            <a:off x="1188720" y="5897880"/>
+            <a:off x="1188720" y="5029200"/>
             <a:ext cx="3392424" cy="0"/>
           </a:xfrm>
           <a:prstGeom prst="line">
@@ -4627,23 +4627,23 @@
         </p:nvSpPr>
         <p:spPr>
           <a:xfrm>
-            <a:off x="1188720" y="6035040"/>
-            <a:ext cx="3392423" cy="2743200"/>
-          </a:xfrm>
-          <a:prstGeom prst="rect">
-            <a:avLst/>
-          </a:prstGeom>
-          <a:noFill/>
-        </p:spPr>
-        <p:txBody>
-          <a:bodyPr wrap="square" lIns="0" rIns="0" tIns="0" bIns="0" anchor="t">
-            <a:spAutoFit/>
-          </a:bodyPr>
-          <a:lstStyle/>
-          <a:p>
-            <a:pPr algn="l"/>
-            <a:r>
-              <a:rPr sz="1050" b="0" i="0">
+            <a:off x="1188720" y="5120640"/>
+            <a:ext cx="3392423" cy="914400"/>
+          </a:xfrm>
+          <a:prstGeom prst="rect">
+            <a:avLst/>
+          </a:prstGeom>
+          <a:noFill/>
+        </p:spPr>
+        <p:txBody>
+          <a:bodyPr wrap="square" lIns="0" rIns="0" tIns="0" bIns="0" anchor="t">
+            <a:spAutoFit/>
+          </a:bodyPr>
+          <a:lstStyle/>
+          <a:p>
+            <a:pPr algn="l"/>
+            <a:r>
+              <a:rPr sz="975" b="0" i="0">
                 <a:solidFill>
                   <a:srgbClr val="4B5563"/>
                 </a:solidFill>
@@ -4664,12 +4664,12 @@
         </p:nvSpPr>
         <p:spPr>
           <a:xfrm>
-            <a:off x="5097779" y="3127248"/>
-            <a:ext cx="3941063" cy="5943600"/>
+            <a:off x="5097779" y="2971800"/>
+            <a:ext cx="3941063" cy="3154680"/>
           </a:xfrm>
           <a:prstGeom prst="roundRect">
             <a:avLst>
-              <a:gd name="adj" fmla="val 3000"/>
+              <a:gd name="adj" fmla="val 4000"/>
             </a:avLst>
           </a:prstGeom>
           <a:solidFill>
@@ -4710,8 +4710,8 @@
         </p:nvSpPr>
         <p:spPr>
           <a:xfrm>
-            <a:off x="5097779" y="3127248"/>
-            <a:ext cx="3941063" cy="64008"/>
+            <a:off x="5097779" y="2971800"/>
+            <a:ext cx="3941063" cy="54864"/>
           </a:xfrm>
           <a:prstGeom prst="rect">
             <a:avLst/>
@@ -4754,23 +4754,23 @@
         </p:nvSpPr>
         <p:spPr>
           <a:xfrm>
-            <a:off x="5372099" y="3383280"/>
-            <a:ext cx="914400" cy="320040"/>
-          </a:xfrm>
-          <a:prstGeom prst="rect">
-            <a:avLst/>
-          </a:prstGeom>
-          <a:noFill/>
-        </p:spPr>
-        <p:txBody>
-          <a:bodyPr wrap="square" lIns="0" rIns="0" tIns="0" bIns="0" anchor="t">
-            <a:spAutoFit/>
-          </a:bodyPr>
-          <a:lstStyle/>
-          <a:p>
-            <a:pPr algn="l"/>
-            <a:r>
-              <a:rPr sz="1150" b="0" i="0" spc="40">
+            <a:off x="5372099" y="3172968"/>
+            <a:ext cx="914400" cy="274320"/>
+          </a:xfrm>
+          <a:prstGeom prst="rect">
+            <a:avLst/>
+          </a:prstGeom>
+          <a:noFill/>
+        </p:spPr>
+        <p:txBody>
+          <a:bodyPr wrap="square" lIns="0" rIns="0" tIns="0" bIns="0" anchor="t">
+            <a:spAutoFit/>
+          </a:bodyPr>
+          <a:lstStyle/>
+          <a:p>
+            <a:pPr algn="l"/>
+            <a:r>
+              <a:rPr sz="1100" b="0" i="0" spc="40">
                 <a:solidFill>
                   <a:srgbClr val="6B7280"/>
                 </a:solidFill>
@@ -4789,7 +4789,7 @@
         </p:nvSpPr>
         <p:spPr>
           <a:xfrm>
-            <a:off x="5372099" y="3703320"/>
+            <a:off x="5372099" y="3429000"/>
             <a:ext cx="3392423" cy="182880"/>
           </a:xfrm>
           <a:prstGeom prst="rect">
@@ -4805,7 +4805,7 @@
           <a:p>
             <a:pPr algn="l"/>
             <a:r>
-              <a:rPr sz="825" b="0" i="0" spc="80">
+              <a:rPr sz="800" b="0" i="0" spc="80">
                 <a:solidFill>
                   <a:srgbClr val="FF8449"/>
                 </a:solidFill>
@@ -4824,23 +4824,23 @@
         </p:nvSpPr>
         <p:spPr>
           <a:xfrm>
-            <a:off x="5372099" y="3977639"/>
-            <a:ext cx="3392423" cy="548640"/>
-          </a:xfrm>
-          <a:prstGeom prst="rect">
-            <a:avLst/>
-          </a:prstGeom>
-          <a:noFill/>
-        </p:spPr>
-        <p:txBody>
-          <a:bodyPr wrap="square" lIns="0" rIns="0" tIns="0" bIns="0" anchor="t">
-            <a:spAutoFit/>
-          </a:bodyPr>
-          <a:lstStyle/>
-          <a:p>
-            <a:pPr algn="l"/>
-            <a:r>
-              <a:rPr sz="2200" b="0" i="0">
+            <a:off x="5372099" y="3657600"/>
+            <a:ext cx="3392423" cy="502920"/>
+          </a:xfrm>
+          <a:prstGeom prst="rect">
+            <a:avLst/>
+          </a:prstGeom>
+          <a:noFill/>
+        </p:spPr>
+        <p:txBody>
+          <a:bodyPr wrap="square" lIns="0" rIns="0" tIns="0" bIns="0" anchor="t">
+            <a:spAutoFit/>
+          </a:bodyPr>
+          <a:lstStyle/>
+          <a:p>
+            <a:pPr algn="l"/>
+            <a:r>
+              <a:rPr sz="1800" b="0" i="0">
                 <a:solidFill>
                   <a:srgbClr val="000000"/>
                 </a:solidFill>
@@ -4859,23 +4859,23 @@
         </p:nvSpPr>
         <p:spPr>
           <a:xfrm>
-            <a:off x="5372099" y="4617720"/>
-            <a:ext cx="3392423" cy="914400"/>
-          </a:xfrm>
-          <a:prstGeom prst="rect">
-            <a:avLst/>
-          </a:prstGeom>
-          <a:noFill/>
-        </p:spPr>
-        <p:txBody>
-          <a:bodyPr wrap="square" lIns="0" rIns="0" tIns="0" bIns="0" anchor="t">
-            <a:spAutoFit/>
-          </a:bodyPr>
-          <a:lstStyle/>
-          <a:p>
-            <a:pPr algn="l"/>
-            <a:r>
-              <a:rPr sz="1200" b="0" i="1">
+            <a:off x="5372099" y="4206240"/>
+            <a:ext cx="3392423" cy="822960"/>
+          </a:xfrm>
+          <a:prstGeom prst="rect">
+            <a:avLst/>
+          </a:prstGeom>
+          <a:noFill/>
+        </p:spPr>
+        <p:txBody>
+          <a:bodyPr wrap="square" lIns="0" rIns="0" tIns="0" bIns="0" anchor="t">
+            <a:spAutoFit/>
+          </a:bodyPr>
+          <a:lstStyle/>
+          <a:p>
+            <a:pPr algn="l"/>
+            <a:r>
+              <a:rPr sz="1050" b="0" i="1">
                 <a:solidFill>
                   <a:srgbClr val="4B5563"/>
                 </a:solidFill>
@@ -4894,7 +4894,7 @@
         </p:nvCxnSpPr>
         <p:spPr>
           <a:xfrm>
-            <a:off x="5372099" y="5897880"/>
+            <a:off x="5372099" y="5029200"/>
             <a:ext cx="3392424" cy="0"/>
           </a:xfrm>
           <a:prstGeom prst="line">
@@ -4929,23 +4929,23 @@
         </p:nvSpPr>
         <p:spPr>
           <a:xfrm>
-            <a:off x="5372099" y="6035040"/>
-            <a:ext cx="3392423" cy="2743200"/>
-          </a:xfrm>
-          <a:prstGeom prst="rect">
-            <a:avLst/>
-          </a:prstGeom>
-          <a:noFill/>
-        </p:spPr>
-        <p:txBody>
-          <a:bodyPr wrap="square" lIns="0" rIns="0" tIns="0" bIns="0" anchor="t">
-            <a:spAutoFit/>
-          </a:bodyPr>
-          <a:lstStyle/>
-          <a:p>
-            <a:pPr algn="l"/>
-            <a:r>
-              <a:rPr sz="1050" b="0" i="0">
+            <a:off x="5372099" y="5120640"/>
+            <a:ext cx="3392423" cy="914400"/>
+          </a:xfrm>
+          <a:prstGeom prst="rect">
+            <a:avLst/>
+          </a:prstGeom>
+          <a:noFill/>
+        </p:spPr>
+        <p:txBody>
+          <a:bodyPr wrap="square" lIns="0" rIns="0" tIns="0" bIns="0" anchor="t">
+            <a:spAutoFit/>
+          </a:bodyPr>
+          <a:lstStyle/>
+          <a:p>
+            <a:pPr algn="l"/>
+            <a:r>
+              <a:rPr sz="975" b="0" i="0">
                 <a:solidFill>
                   <a:srgbClr val="4B5563"/>
                 </a:solidFill>
@@ -4966,12 +4966,12 @@
         </p:nvSpPr>
         <p:spPr>
           <a:xfrm>
-            <a:off x="9281159" y="3127248"/>
-            <a:ext cx="3941063" cy="5943600"/>
+            <a:off x="9281159" y="2971800"/>
+            <a:ext cx="3941063" cy="3154680"/>
           </a:xfrm>
           <a:prstGeom prst="roundRect">
             <a:avLst>
-              <a:gd name="adj" fmla="val 3000"/>
+              <a:gd name="adj" fmla="val 4000"/>
             </a:avLst>
           </a:prstGeom>
           <a:solidFill>
@@ -5012,8 +5012,8 @@
         </p:nvSpPr>
         <p:spPr>
           <a:xfrm>
-            <a:off x="9281159" y="3127248"/>
-            <a:ext cx="3941063" cy="64008"/>
+            <a:off x="9281159" y="2971800"/>
+            <a:ext cx="3941063" cy="54864"/>
           </a:xfrm>
           <a:prstGeom prst="rect">
             <a:avLst/>
@@ -5056,23 +5056,23 @@
         </p:nvSpPr>
         <p:spPr>
           <a:xfrm>
-            <a:off x="9555480" y="3383280"/>
-            <a:ext cx="914400" cy="320040"/>
-          </a:xfrm>
-          <a:prstGeom prst="rect">
-            <a:avLst/>
-          </a:prstGeom>
-          <a:noFill/>
-        </p:spPr>
-        <p:txBody>
-          <a:bodyPr wrap="square" lIns="0" rIns="0" tIns="0" bIns="0" anchor="t">
-            <a:spAutoFit/>
-          </a:bodyPr>
-          <a:lstStyle/>
-          <a:p>
-            <a:pPr algn="l"/>
-            <a:r>
-              <a:rPr sz="1150" b="0" i="0" spc="40">
+            <a:off x="9555480" y="3172968"/>
+            <a:ext cx="914400" cy="274320"/>
+          </a:xfrm>
+          <a:prstGeom prst="rect">
+            <a:avLst/>
+          </a:prstGeom>
+          <a:noFill/>
+        </p:spPr>
+        <p:txBody>
+          <a:bodyPr wrap="square" lIns="0" rIns="0" tIns="0" bIns="0" anchor="t">
+            <a:spAutoFit/>
+          </a:bodyPr>
+          <a:lstStyle/>
+          <a:p>
+            <a:pPr algn="l"/>
+            <a:r>
+              <a:rPr sz="1100" b="0" i="0" spc="40">
                 <a:solidFill>
                   <a:srgbClr val="6B7280"/>
                 </a:solidFill>
@@ -5091,7 +5091,7 @@
         </p:nvSpPr>
         <p:spPr>
           <a:xfrm>
-            <a:off x="9555480" y="3703320"/>
+            <a:off x="9555480" y="3429000"/>
             <a:ext cx="3392423" cy="182880"/>
           </a:xfrm>
           <a:prstGeom prst="rect">
@@ -5107,13 +5107,13 @@
           <a:p>
             <a:pPr algn="l"/>
             <a:r>
-              <a:rPr sz="825" b="0" i="0" spc="80">
+              <a:rPr sz="800" b="0" i="0" spc="80">
                 <a:solidFill>
                   <a:srgbClr val="FF8449"/>
                 </a:solidFill>
                 <a:latin typeface="Calibri"/>
               </a:rPr>
-              <a:t>PACOTES · CRM · CONFIRMAÇÕES</a:t>
+              <a:t>PACOTES · PACIENTE · CONFIRMAÇÕES</a:t>
             </a:r>
           </a:p>
         </p:txBody>
@@ -5126,23 +5126,23 @@
         </p:nvSpPr>
         <p:spPr>
           <a:xfrm>
-            <a:off x="9555480" y="3977639"/>
-            <a:ext cx="3392423" cy="548640"/>
-          </a:xfrm>
-          <a:prstGeom prst="rect">
-            <a:avLst/>
-          </a:prstGeom>
-          <a:noFill/>
-        </p:spPr>
-        <p:txBody>
-          <a:bodyPr wrap="square" lIns="0" rIns="0" tIns="0" bIns="0" anchor="t">
-            <a:spAutoFit/>
-          </a:bodyPr>
-          <a:lstStyle/>
-          <a:p>
-            <a:pPr algn="l"/>
-            <a:r>
-              <a:rPr sz="2200" b="0" i="0">
+            <a:off x="9555480" y="3657600"/>
+            <a:ext cx="3392423" cy="502920"/>
+          </a:xfrm>
+          <a:prstGeom prst="rect">
+            <a:avLst/>
+          </a:prstGeom>
+          <a:noFill/>
+        </p:spPr>
+        <p:txBody>
+          <a:bodyPr wrap="square" lIns="0" rIns="0" tIns="0" bIns="0" anchor="t">
+            <a:spAutoFit/>
+          </a:bodyPr>
+          <a:lstStyle/>
+          <a:p>
+            <a:pPr algn="l"/>
+            <a:r>
+              <a:rPr sz="1800" b="0" i="0">
                 <a:solidFill>
                   <a:srgbClr val="000000"/>
                 </a:solidFill>
@@ -5161,29 +5161,29 @@
         </p:nvSpPr>
         <p:spPr>
           <a:xfrm>
-            <a:off x="9555480" y="4617720"/>
-            <a:ext cx="3392423" cy="914400"/>
-          </a:xfrm>
-          <a:prstGeom prst="rect">
-            <a:avLst/>
-          </a:prstGeom>
-          <a:noFill/>
-        </p:spPr>
-        <p:txBody>
-          <a:bodyPr wrap="square" lIns="0" rIns="0" tIns="0" bIns="0" anchor="t">
-            <a:spAutoFit/>
-          </a:bodyPr>
-          <a:lstStyle/>
-          <a:p>
-            <a:pPr algn="l"/>
-            <a:r>
-              <a:rPr sz="1200" b="0" i="1">
+            <a:off x="9555480" y="4206240"/>
+            <a:ext cx="3392423" cy="822960"/>
+          </a:xfrm>
+          <a:prstGeom prst="rect">
+            <a:avLst/>
+          </a:prstGeom>
+          <a:noFill/>
+        </p:spPr>
+        <p:txBody>
+          <a:bodyPr wrap="square" lIns="0" rIns="0" tIns="0" bIns="0" anchor="t">
+            <a:spAutoFit/>
+          </a:bodyPr>
+          <a:lstStyle/>
+          <a:p>
+            <a:pPr algn="l"/>
+            <a:r>
+              <a:rPr sz="1050" b="0" i="1">
                 <a:solidFill>
                   <a:srgbClr val="4B5563"/>
                 </a:solidFill>
                 <a:latin typeface="Georgia"/>
               </a:rPr>
-              <a:t>Fim do controlo em papel; sessões registadas e confirmadas.</a:t>
+              <a:t>Substitui o cartão de carimbos: paciente confirma, recebe comprovativo, CRM atualiza.</a:t>
             </a:r>
           </a:p>
         </p:txBody>
@@ -5196,7 +5196,7 @@
         </p:nvCxnSpPr>
         <p:spPr>
           <a:xfrm>
-            <a:off x="9555480" y="5897880"/>
+            <a:off x="9555480" y="5029200"/>
             <a:ext cx="3392423" cy="0"/>
           </a:xfrm>
           <a:prstGeom prst="line">
@@ -5231,31 +5231,31 @@
         </p:nvSpPr>
         <p:spPr>
           <a:xfrm>
-            <a:off x="9555480" y="6035040"/>
-            <a:ext cx="3392423" cy="2743200"/>
-          </a:xfrm>
-          <a:prstGeom prst="rect">
-            <a:avLst/>
-          </a:prstGeom>
-          <a:noFill/>
-        </p:spPr>
-        <p:txBody>
-          <a:bodyPr wrap="square" lIns="0" rIns="0" tIns="0" bIns="0" anchor="t">
-            <a:spAutoFit/>
-          </a:bodyPr>
-          <a:lstStyle/>
-          <a:p>
-            <a:pPr algn="l"/>
-            <a:r>
-              <a:rPr sz="1050" b="0" i="0">
+            <a:off x="9555480" y="5120640"/>
+            <a:ext cx="3392423" cy="914400"/>
+          </a:xfrm>
+          <a:prstGeom prst="rect">
+            <a:avLst/>
+          </a:prstGeom>
+          <a:noFill/>
+        </p:spPr>
+        <p:txBody>
+          <a:bodyPr wrap="square" lIns="0" rIns="0" tIns="0" bIns="0" anchor="t">
+            <a:spAutoFit/>
+          </a:bodyPr>
+          <a:lstStyle/>
+          <a:p>
+            <a:pPr algn="l"/>
+            <a:r>
+              <a:rPr sz="975" b="0" i="0">
                 <a:solidFill>
                   <a:srgbClr val="4B5563"/>
                 </a:solidFill>
                 <a:latin typeface="Calibri"/>
               </a:rPr>
-              <a:t>• Sessão concluída registada com 1 clique.
-• Paciente confirma e sabe quantas faltam.
-• Recordatórios proativos antes do fim do pacote.</a:t>
+              <a:t>• Paciente recebe formulário (SMS, email ou WhatsApp).
+• Tica uma caixa, recebe «sessão X de Y» de volta.
+• Fallback à equipa se não confirmar em X horas.</a:t>
             </a:r>
           </a:p>
         </p:txBody>
@@ -5268,12 +5268,12 @@
         </p:nvSpPr>
         <p:spPr>
           <a:xfrm>
-            <a:off x="13464539" y="3127248"/>
-            <a:ext cx="3941063" cy="5943600"/>
+            <a:off x="13464539" y="2971800"/>
+            <a:ext cx="3941063" cy="3154680"/>
           </a:xfrm>
           <a:prstGeom prst="roundRect">
             <a:avLst>
-              <a:gd name="adj" fmla="val 3000"/>
+              <a:gd name="adj" fmla="val 4000"/>
             </a:avLst>
           </a:prstGeom>
           <a:solidFill>
@@ -5314,8 +5314,8 @@
         </p:nvSpPr>
         <p:spPr>
           <a:xfrm>
-            <a:off x="13464539" y="3127248"/>
-            <a:ext cx="3941063" cy="64008"/>
+            <a:off x="13464539" y="2971800"/>
+            <a:ext cx="3941063" cy="54864"/>
           </a:xfrm>
           <a:prstGeom prst="rect">
             <a:avLst/>
@@ -5358,23 +5358,23 @@
         </p:nvSpPr>
         <p:spPr>
           <a:xfrm>
-            <a:off x="13738859" y="3383280"/>
-            <a:ext cx="914400" cy="320040"/>
-          </a:xfrm>
-          <a:prstGeom prst="rect">
-            <a:avLst/>
-          </a:prstGeom>
-          <a:noFill/>
-        </p:spPr>
-        <p:txBody>
-          <a:bodyPr wrap="square" lIns="0" rIns="0" tIns="0" bIns="0" anchor="t">
-            <a:spAutoFit/>
-          </a:bodyPr>
-          <a:lstStyle/>
-          <a:p>
-            <a:pPr algn="l"/>
-            <a:r>
-              <a:rPr sz="1150" b="0" i="0" spc="40">
+            <a:off x="13738859" y="3172968"/>
+            <a:ext cx="914400" cy="274320"/>
+          </a:xfrm>
+          <a:prstGeom prst="rect">
+            <a:avLst/>
+          </a:prstGeom>
+          <a:noFill/>
+        </p:spPr>
+        <p:txBody>
+          <a:bodyPr wrap="square" lIns="0" rIns="0" tIns="0" bIns="0" anchor="t">
+            <a:spAutoFit/>
+          </a:bodyPr>
+          <a:lstStyle/>
+          <a:p>
+            <a:pPr algn="l"/>
+            <a:r>
+              <a:rPr sz="1100" b="0" i="0" spc="40">
                 <a:solidFill>
                   <a:srgbClr val="6B7280"/>
                 </a:solidFill>
@@ -5393,7 +5393,7 @@
         </p:nvSpPr>
         <p:spPr>
           <a:xfrm>
-            <a:off x="13738859" y="3703320"/>
+            <a:off x="13738859" y="3429000"/>
             <a:ext cx="3392423" cy="182880"/>
           </a:xfrm>
           <a:prstGeom prst="rect">
@@ -5409,7 +5409,7 @@
           <a:p>
             <a:pPr algn="l"/>
             <a:r>
-              <a:rPr sz="825" b="0" i="0" spc="80">
+              <a:rPr sz="800" b="0" i="0" spc="80">
                 <a:solidFill>
                   <a:srgbClr val="FF8449"/>
                 </a:solidFill>
@@ -5428,23 +5428,23 @@
         </p:nvSpPr>
         <p:spPr>
           <a:xfrm>
-            <a:off x="13738859" y="3977639"/>
-            <a:ext cx="3392423" cy="548640"/>
-          </a:xfrm>
-          <a:prstGeom prst="rect">
-            <a:avLst/>
-          </a:prstGeom>
-          <a:noFill/>
-        </p:spPr>
-        <p:txBody>
-          <a:bodyPr wrap="square" lIns="0" rIns="0" tIns="0" bIns="0" anchor="t">
-            <a:spAutoFit/>
-          </a:bodyPr>
-          <a:lstStyle/>
-          <a:p>
-            <a:pPr algn="l"/>
-            <a:r>
-              <a:rPr sz="2200" b="0" i="0">
+            <a:off x="13738859" y="3657600"/>
+            <a:ext cx="3392423" cy="502920"/>
+          </a:xfrm>
+          <a:prstGeom prst="rect">
+            <a:avLst/>
+          </a:prstGeom>
+          <a:noFill/>
+        </p:spPr>
+        <p:txBody>
+          <a:bodyPr wrap="square" lIns="0" rIns="0" tIns="0" bIns="0" anchor="t">
+            <a:spAutoFit/>
+          </a:bodyPr>
+          <a:lstStyle/>
+          <a:p>
+            <a:pPr algn="l"/>
+            <a:r>
+              <a:rPr sz="1800" b="0" i="0">
                 <a:solidFill>
                   <a:srgbClr val="000000"/>
                 </a:solidFill>
@@ -5463,23 +5463,23 @@
         </p:nvSpPr>
         <p:spPr>
           <a:xfrm>
-            <a:off x="13738859" y="4617720"/>
-            <a:ext cx="3392423" cy="914400"/>
-          </a:xfrm>
-          <a:prstGeom prst="rect">
-            <a:avLst/>
-          </a:prstGeom>
-          <a:noFill/>
-        </p:spPr>
-        <p:txBody>
-          <a:bodyPr wrap="square" lIns="0" rIns="0" tIns="0" bIns="0" anchor="t">
-            <a:spAutoFit/>
-          </a:bodyPr>
-          <a:lstStyle/>
-          <a:p>
-            <a:pPr algn="l"/>
-            <a:r>
-              <a:rPr sz="1200" b="0" i="1">
+            <a:off x="13738859" y="4206240"/>
+            <a:ext cx="3392423" cy="822960"/>
+          </a:xfrm>
+          <a:prstGeom prst="rect">
+            <a:avLst/>
+          </a:prstGeom>
+          <a:noFill/>
+        </p:spPr>
+        <p:txBody>
+          <a:bodyPr wrap="square" lIns="0" rIns="0" tIns="0" bIns="0" anchor="t">
+            <a:spAutoFit/>
+          </a:bodyPr>
+          <a:lstStyle/>
+          <a:p>
+            <a:pPr algn="l"/>
+            <a:r>
+              <a:rPr sz="1050" b="0" i="1">
                 <a:solidFill>
                   <a:srgbClr val="4B5563"/>
                 </a:solidFill>
@@ -5498,7 +5498,7 @@
         </p:nvCxnSpPr>
         <p:spPr>
           <a:xfrm>
-            <a:off x="13738859" y="5897880"/>
+            <a:off x="13738859" y="5029200"/>
             <a:ext cx="3392424" cy="0"/>
           </a:xfrm>
           <a:prstGeom prst="line">
@@ -5533,23 +5533,23 @@
         </p:nvSpPr>
         <p:spPr>
           <a:xfrm>
-            <a:off x="13738859" y="6035040"/>
-            <a:ext cx="3392423" cy="2743200"/>
-          </a:xfrm>
-          <a:prstGeom prst="rect">
-            <a:avLst/>
-          </a:prstGeom>
-          <a:noFill/>
-        </p:spPr>
-        <p:txBody>
-          <a:bodyPr wrap="square" lIns="0" rIns="0" tIns="0" bIns="0" anchor="t">
-            <a:spAutoFit/>
-          </a:bodyPr>
-          <a:lstStyle/>
-          <a:p>
-            <a:pPr algn="l"/>
-            <a:r>
-              <a:rPr sz="1050" b="0" i="0">
+            <a:off x="13738859" y="5120640"/>
+            <a:ext cx="3392423" cy="914400"/>
+          </a:xfrm>
+          <a:prstGeom prst="rect">
+            <a:avLst/>
+          </a:prstGeom>
+          <a:noFill/>
+        </p:spPr>
+        <p:txBody>
+          <a:bodyPr wrap="square" lIns="0" rIns="0" tIns="0" bIns="0" anchor="t">
+            <a:spAutoFit/>
+          </a:bodyPr>
+          <a:lstStyle/>
+          <a:p>
+            <a:pPr algn="l"/>
+            <a:r>
+              <a:rPr sz="975" b="0" i="0">
                 <a:solidFill>
                   <a:srgbClr val="4B5563"/>
                 </a:solidFill>
@@ -5564,7 +5564,1215 @@
       </p:sp>
       <p:sp>
         <p:nvSpPr>
-          <p:cNvPr id="37" name="TextBox 36"/>
+          <p:cNvPr id="37" name="Rounded Rectangle 36"/>
+          <p:cNvSpPr/>
+          <p:nvPr/>
+        </p:nvSpPr>
+        <p:spPr>
+          <a:xfrm>
+            <a:off x="914400" y="6492240"/>
+            <a:ext cx="3941063" cy="3154680"/>
+          </a:xfrm>
+          <a:prstGeom prst="roundRect">
+            <a:avLst>
+              <a:gd name="adj" fmla="val 4000"/>
+            </a:avLst>
+          </a:prstGeom>
+          <a:solidFill>
+            <a:srgbClr val="FFFFFF"/>
+          </a:solidFill>
+          <a:ln>
+            <a:noFill/>
+          </a:ln>
+          <a:effectLst/>
+        </p:spPr>
+        <p:style>
+          <a:lnRef idx="1">
+            <a:schemeClr val="accent1"/>
+          </a:lnRef>
+          <a:fillRef idx="3">
+            <a:schemeClr val="accent1"/>
+          </a:fillRef>
+          <a:effectRef idx="2">
+            <a:schemeClr val="accent1"/>
+          </a:effectRef>
+          <a:fontRef idx="minor">
+            <a:schemeClr val="lt1"/>
+          </a:fontRef>
+        </p:style>
+        <p:txBody>
+          <a:bodyPr rtlCol="0" anchor="ctr"/>
+          <a:lstStyle/>
+          <a:p>
+            <a:pPr algn="ctr"/>
+          </a:p>
+        </p:txBody>
+      </p:sp>
+      <p:sp>
+        <p:nvSpPr>
+          <p:cNvPr id="38" name="Rectangle 37"/>
+          <p:cNvSpPr/>
+          <p:nvPr/>
+        </p:nvSpPr>
+        <p:spPr>
+          <a:xfrm>
+            <a:off x="914400" y="6492240"/>
+            <a:ext cx="3941063" cy="54864"/>
+          </a:xfrm>
+          <a:prstGeom prst="rect">
+            <a:avLst/>
+          </a:prstGeom>
+          <a:solidFill>
+            <a:srgbClr val="FF8449"/>
+          </a:solidFill>
+          <a:ln>
+            <a:noFill/>
+          </a:ln>
+          <a:effectLst/>
+        </p:spPr>
+        <p:style>
+          <a:lnRef idx="1">
+            <a:schemeClr val="accent1"/>
+          </a:lnRef>
+          <a:fillRef idx="3">
+            <a:schemeClr val="accent1"/>
+          </a:fillRef>
+          <a:effectRef idx="2">
+            <a:schemeClr val="accent1"/>
+          </a:effectRef>
+          <a:fontRef idx="minor">
+            <a:schemeClr val="lt1"/>
+          </a:fontRef>
+        </p:style>
+        <p:txBody>
+          <a:bodyPr rtlCol="0" anchor="ctr"/>
+          <a:lstStyle/>
+          <a:p>
+            <a:pPr algn="ctr"/>
+          </a:p>
+        </p:txBody>
+      </p:sp>
+      <p:sp>
+        <p:nvSpPr>
+          <p:cNvPr id="39" name="TextBox 38"/>
+          <p:cNvSpPr txBox="1"/>
+          <p:nvPr/>
+        </p:nvSpPr>
+        <p:spPr>
+          <a:xfrm>
+            <a:off x="1188720" y="6693407"/>
+            <a:ext cx="914400" cy="274320"/>
+          </a:xfrm>
+          <a:prstGeom prst="rect">
+            <a:avLst/>
+          </a:prstGeom>
+          <a:noFill/>
+        </p:spPr>
+        <p:txBody>
+          <a:bodyPr wrap="square" lIns="0" rIns="0" tIns="0" bIns="0" anchor="t">
+            <a:spAutoFit/>
+          </a:bodyPr>
+          <a:lstStyle/>
+          <a:p>
+            <a:pPr algn="l"/>
+            <a:r>
+              <a:rPr sz="1100" b="0" i="0" spc="40">
+                <a:solidFill>
+                  <a:srgbClr val="6B7280"/>
+                </a:solidFill>
+                <a:latin typeface="Calibri"/>
+              </a:rPr>
+              <a:t>05</a:t>
+            </a:r>
+          </a:p>
+        </p:txBody>
+      </p:sp>
+      <p:sp>
+        <p:nvSpPr>
+          <p:cNvPr id="40" name="TextBox 39"/>
+          <p:cNvSpPr txBox="1"/>
+          <p:nvPr/>
+        </p:nvSpPr>
+        <p:spPr>
+          <a:xfrm>
+            <a:off x="1188720" y="6949440"/>
+            <a:ext cx="3392423" cy="182880"/>
+          </a:xfrm>
+          <a:prstGeom prst="rect">
+            <a:avLst/>
+          </a:prstGeom>
+          <a:noFill/>
+        </p:spPr>
+        <p:txBody>
+          <a:bodyPr wrap="square" lIns="0" rIns="0" tIns="0" bIns="0" anchor="t">
+            <a:spAutoFit/>
+          </a:bodyPr>
+          <a:lstStyle/>
+          <a:p>
+            <a:pPr algn="l"/>
+            <a:r>
+              <a:rPr sz="800" b="0" i="0" spc="80">
+                <a:solidFill>
+                  <a:srgbClr val="FF8449"/>
+                </a:solidFill>
+                <a:latin typeface="Calibri"/>
+              </a:rPr>
+              <a:t>CONTEÚDO · REDES SOCIAIS · GMB</a:t>
+            </a:r>
+          </a:p>
+        </p:txBody>
+      </p:sp>
+      <p:sp>
+        <p:nvSpPr>
+          <p:cNvPr id="41" name="TextBox 40"/>
+          <p:cNvSpPr txBox="1"/>
+          <p:nvPr/>
+        </p:nvSpPr>
+        <p:spPr>
+          <a:xfrm>
+            <a:off x="1188720" y="7178040"/>
+            <a:ext cx="3392423" cy="502920"/>
+          </a:xfrm>
+          <a:prstGeom prst="rect">
+            <a:avLst/>
+          </a:prstGeom>
+          <a:noFill/>
+        </p:spPr>
+        <p:txBody>
+          <a:bodyPr wrap="square" lIns="0" rIns="0" tIns="0" bIns="0" anchor="t">
+            <a:spAutoFit/>
+          </a:bodyPr>
+          <a:lstStyle/>
+          <a:p>
+            <a:pPr algn="l"/>
+            <a:r>
+              <a:rPr sz="1800" b="0" i="0">
+                <a:solidFill>
+                  <a:srgbClr val="000000"/>
+                </a:solidFill>
+                <a:latin typeface="Georgia"/>
+              </a:rPr>
+              <a:t>Redes sociais &amp; presença local</a:t>
+            </a:r>
+          </a:p>
+        </p:txBody>
+      </p:sp>
+      <p:sp>
+        <p:nvSpPr>
+          <p:cNvPr id="42" name="TextBox 41"/>
+          <p:cNvSpPr txBox="1"/>
+          <p:nvPr/>
+        </p:nvSpPr>
+        <p:spPr>
+          <a:xfrm>
+            <a:off x="1188720" y="7726679"/>
+            <a:ext cx="3392423" cy="822960"/>
+          </a:xfrm>
+          <a:prstGeom prst="rect">
+            <a:avLst/>
+          </a:prstGeom>
+          <a:noFill/>
+        </p:spPr>
+        <p:txBody>
+          <a:bodyPr wrap="square" lIns="0" rIns="0" tIns="0" bIns="0" anchor="t">
+            <a:spAutoFit/>
+          </a:bodyPr>
+          <a:lstStyle/>
+          <a:p>
+            <a:pPr algn="l"/>
+            <a:r>
+              <a:rPr sz="1050" b="0" i="1">
+                <a:solidFill>
+                  <a:srgbClr val="4B5563"/>
+                </a:solidFill>
+                <a:latin typeface="Georgia"/>
+              </a:rPr>
+              <a:t>Conteúdo para Instagram, Facebook e Google Business — escrito, agendado e publicado.</a:t>
+            </a:r>
+          </a:p>
+        </p:txBody>
+      </p:sp>
+      <p:cxnSp>
+        <p:nvCxnSpPr>
+          <p:cNvPr id="43" name="Connector 42"/>
+          <p:cNvCxnSpPr/>
+          <p:nvPr/>
+        </p:nvCxnSpPr>
+        <p:spPr>
+          <a:xfrm>
+            <a:off x="1188720" y="8549640"/>
+            <a:ext cx="3392424" cy="0"/>
+          </a:xfrm>
+          <a:prstGeom prst="line">
+            <a:avLst/>
+          </a:prstGeom>
+          <a:ln w="9525">
+            <a:solidFill>
+              <a:srgbClr val="E5E7EB"/>
+            </a:solidFill>
+          </a:ln>
+        </p:spPr>
+        <p:style>
+          <a:lnRef idx="2">
+            <a:schemeClr val="accent1"/>
+          </a:lnRef>
+          <a:fillRef idx="0">
+            <a:schemeClr val="accent1"/>
+          </a:fillRef>
+          <a:effectRef idx="1">
+            <a:schemeClr val="accent1"/>
+          </a:effectRef>
+          <a:fontRef idx="minor">
+            <a:schemeClr val="tx1"/>
+          </a:fontRef>
+        </p:style>
+      </p:cxnSp>
+      <p:sp>
+        <p:nvSpPr>
+          <p:cNvPr id="44" name="TextBox 43"/>
+          <p:cNvSpPr txBox="1"/>
+          <p:nvPr/>
+        </p:nvSpPr>
+        <p:spPr>
+          <a:xfrm>
+            <a:off x="1188720" y="8641080"/>
+            <a:ext cx="3392423" cy="914400"/>
+          </a:xfrm>
+          <a:prstGeom prst="rect">
+            <a:avLst/>
+          </a:prstGeom>
+          <a:noFill/>
+        </p:spPr>
+        <p:txBody>
+          <a:bodyPr wrap="square" lIns="0" rIns="0" tIns="0" bIns="0" anchor="t">
+            <a:spAutoFit/>
+          </a:bodyPr>
+          <a:lstStyle/>
+          <a:p>
+            <a:pPr algn="l"/>
+            <a:r>
+              <a:rPr sz="975" b="0" i="0">
+                <a:solidFill>
+                  <a:srgbClr val="4B5563"/>
+                </a:solidFill>
+                <a:latin typeface="Calibri"/>
+              </a:rPr>
+              <a:t>• Calendário mensal proposto · aprovas e ajustas.
+• Posts redigidos no tom da clínica.
+• Publicação automática e resposta a reviews.</a:t>
+            </a:r>
+          </a:p>
+        </p:txBody>
+      </p:sp>
+      <p:sp>
+        <p:nvSpPr>
+          <p:cNvPr id="45" name="Rounded Rectangle 44"/>
+          <p:cNvSpPr/>
+          <p:nvPr/>
+        </p:nvSpPr>
+        <p:spPr>
+          <a:xfrm>
+            <a:off x="5097779" y="6492240"/>
+            <a:ext cx="3941063" cy="3154680"/>
+          </a:xfrm>
+          <a:prstGeom prst="roundRect">
+            <a:avLst>
+              <a:gd name="adj" fmla="val 4000"/>
+            </a:avLst>
+          </a:prstGeom>
+          <a:solidFill>
+            <a:srgbClr val="FFFFFF"/>
+          </a:solidFill>
+          <a:ln>
+            <a:noFill/>
+          </a:ln>
+          <a:effectLst/>
+        </p:spPr>
+        <p:style>
+          <a:lnRef idx="1">
+            <a:schemeClr val="accent1"/>
+          </a:lnRef>
+          <a:fillRef idx="3">
+            <a:schemeClr val="accent1"/>
+          </a:fillRef>
+          <a:effectRef idx="2">
+            <a:schemeClr val="accent1"/>
+          </a:effectRef>
+          <a:fontRef idx="minor">
+            <a:schemeClr val="lt1"/>
+          </a:fontRef>
+        </p:style>
+        <p:txBody>
+          <a:bodyPr rtlCol="0" anchor="ctr"/>
+          <a:lstStyle/>
+          <a:p>
+            <a:pPr algn="ctr"/>
+          </a:p>
+        </p:txBody>
+      </p:sp>
+      <p:sp>
+        <p:nvSpPr>
+          <p:cNvPr id="46" name="Rectangle 45"/>
+          <p:cNvSpPr/>
+          <p:nvPr/>
+        </p:nvSpPr>
+        <p:spPr>
+          <a:xfrm>
+            <a:off x="5097779" y="6492240"/>
+            <a:ext cx="3941063" cy="54864"/>
+          </a:xfrm>
+          <a:prstGeom prst="rect">
+            <a:avLst/>
+          </a:prstGeom>
+          <a:solidFill>
+            <a:srgbClr val="FF8449"/>
+          </a:solidFill>
+          <a:ln>
+            <a:noFill/>
+          </a:ln>
+          <a:effectLst/>
+        </p:spPr>
+        <p:style>
+          <a:lnRef idx="1">
+            <a:schemeClr val="accent1"/>
+          </a:lnRef>
+          <a:fillRef idx="3">
+            <a:schemeClr val="accent1"/>
+          </a:fillRef>
+          <a:effectRef idx="2">
+            <a:schemeClr val="accent1"/>
+          </a:effectRef>
+          <a:fontRef idx="minor">
+            <a:schemeClr val="lt1"/>
+          </a:fontRef>
+        </p:style>
+        <p:txBody>
+          <a:bodyPr rtlCol="0" anchor="ctr"/>
+          <a:lstStyle/>
+          <a:p>
+            <a:pPr algn="ctr"/>
+          </a:p>
+        </p:txBody>
+      </p:sp>
+      <p:sp>
+        <p:nvSpPr>
+          <p:cNvPr id="47" name="TextBox 46"/>
+          <p:cNvSpPr txBox="1"/>
+          <p:nvPr/>
+        </p:nvSpPr>
+        <p:spPr>
+          <a:xfrm>
+            <a:off x="5372099" y="6693407"/>
+            <a:ext cx="914400" cy="274320"/>
+          </a:xfrm>
+          <a:prstGeom prst="rect">
+            <a:avLst/>
+          </a:prstGeom>
+          <a:noFill/>
+        </p:spPr>
+        <p:txBody>
+          <a:bodyPr wrap="square" lIns="0" rIns="0" tIns="0" bIns="0" anchor="t">
+            <a:spAutoFit/>
+          </a:bodyPr>
+          <a:lstStyle/>
+          <a:p>
+            <a:pPr algn="l"/>
+            <a:r>
+              <a:rPr sz="1100" b="0" i="0" spc="40">
+                <a:solidFill>
+                  <a:srgbClr val="6B7280"/>
+                </a:solidFill>
+                <a:latin typeface="Calibri"/>
+              </a:rPr>
+              <a:t>06</a:t>
+            </a:r>
+          </a:p>
+        </p:txBody>
+      </p:sp>
+      <p:sp>
+        <p:nvSpPr>
+          <p:cNvPr id="48" name="TextBox 47"/>
+          <p:cNvSpPr txBox="1"/>
+          <p:nvPr/>
+        </p:nvSpPr>
+        <p:spPr>
+          <a:xfrm>
+            <a:off x="5372099" y="6949440"/>
+            <a:ext cx="3392423" cy="182880"/>
+          </a:xfrm>
+          <a:prstGeom prst="rect">
+            <a:avLst/>
+          </a:prstGeom>
+          <a:noFill/>
+        </p:spPr>
+        <p:txBody>
+          <a:bodyPr wrap="square" lIns="0" rIns="0" tIns="0" bIns="0" anchor="t">
+            <a:spAutoFit/>
+          </a:bodyPr>
+          <a:lstStyle/>
+          <a:p>
+            <a:pPr algn="l"/>
+            <a:r>
+              <a:rPr sz="800" b="0" i="0" spc="80">
+                <a:solidFill>
+                  <a:srgbClr val="FF8449"/>
+                </a:solidFill>
+                <a:latin typeface="Calibri"/>
+              </a:rPr>
+              <a:t>GOOGLE ADS · PERFORMANCE · TUNING</a:t>
+            </a:r>
+          </a:p>
+        </p:txBody>
+      </p:sp>
+      <p:sp>
+        <p:nvSpPr>
+          <p:cNvPr id="49" name="TextBox 48"/>
+          <p:cNvSpPr txBox="1"/>
+          <p:nvPr/>
+        </p:nvSpPr>
+        <p:spPr>
+          <a:xfrm>
+            <a:off x="5372099" y="7178040"/>
+            <a:ext cx="3392423" cy="502920"/>
+          </a:xfrm>
+          <a:prstGeom prst="rect">
+            <a:avLst/>
+          </a:prstGeom>
+          <a:noFill/>
+        </p:spPr>
+        <p:txBody>
+          <a:bodyPr wrap="square" lIns="0" rIns="0" tIns="0" bIns="0" anchor="t">
+            <a:spAutoFit/>
+          </a:bodyPr>
+          <a:lstStyle/>
+          <a:p>
+            <a:pPr algn="l"/>
+            <a:r>
+              <a:rPr sz="1800" b="0" i="0">
+                <a:solidFill>
+                  <a:srgbClr val="000000"/>
+                </a:solidFill>
+                <a:latin typeface="Georgia"/>
+              </a:rPr>
+              <a:t>Google Ads automatizado</a:t>
+            </a:r>
+          </a:p>
+        </p:txBody>
+      </p:sp>
+      <p:sp>
+        <p:nvSpPr>
+          <p:cNvPr id="50" name="TextBox 49"/>
+          <p:cNvSpPr txBox="1"/>
+          <p:nvPr/>
+        </p:nvSpPr>
+        <p:spPr>
+          <a:xfrm>
+            <a:off x="5372099" y="7726679"/>
+            <a:ext cx="3392423" cy="822960"/>
+          </a:xfrm>
+          <a:prstGeom prst="rect">
+            <a:avLst/>
+          </a:prstGeom>
+          <a:noFill/>
+        </p:spPr>
+        <p:txBody>
+          <a:bodyPr wrap="square" lIns="0" rIns="0" tIns="0" bIns="0" anchor="t">
+            <a:spAutoFit/>
+          </a:bodyPr>
+          <a:lstStyle/>
+          <a:p>
+            <a:pPr algn="l"/>
+            <a:r>
+              <a:rPr sz="1050" b="0" i="1">
+                <a:solidFill>
+                  <a:srgbClr val="4B5563"/>
+                </a:solidFill>
+                <a:latin typeface="Georgia"/>
+              </a:rPr>
+              <a:t>Campanhas Google Ads desenhadas, lançadas e afinadas sem dashboard.</a:t>
+            </a:r>
+          </a:p>
+        </p:txBody>
+      </p:sp>
+      <p:cxnSp>
+        <p:nvCxnSpPr>
+          <p:cNvPr id="51" name="Connector 50"/>
+          <p:cNvCxnSpPr/>
+          <p:nvPr/>
+        </p:nvCxnSpPr>
+        <p:spPr>
+          <a:xfrm>
+            <a:off x="5372099" y="8549640"/>
+            <a:ext cx="3392424" cy="0"/>
+          </a:xfrm>
+          <a:prstGeom prst="line">
+            <a:avLst/>
+          </a:prstGeom>
+          <a:ln w="9525">
+            <a:solidFill>
+              <a:srgbClr val="E5E7EB"/>
+            </a:solidFill>
+          </a:ln>
+        </p:spPr>
+        <p:style>
+          <a:lnRef idx="2">
+            <a:schemeClr val="accent1"/>
+          </a:lnRef>
+          <a:fillRef idx="0">
+            <a:schemeClr val="accent1"/>
+          </a:fillRef>
+          <a:effectRef idx="1">
+            <a:schemeClr val="accent1"/>
+          </a:effectRef>
+          <a:fontRef idx="minor">
+            <a:schemeClr val="tx1"/>
+          </a:fontRef>
+        </p:style>
+      </p:cxnSp>
+      <p:sp>
+        <p:nvSpPr>
+          <p:cNvPr id="52" name="TextBox 51"/>
+          <p:cNvSpPr txBox="1"/>
+          <p:nvPr/>
+        </p:nvSpPr>
+        <p:spPr>
+          <a:xfrm>
+            <a:off x="5372099" y="8641080"/>
+            <a:ext cx="3392423" cy="914400"/>
+          </a:xfrm>
+          <a:prstGeom prst="rect">
+            <a:avLst/>
+          </a:prstGeom>
+          <a:noFill/>
+        </p:spPr>
+        <p:txBody>
+          <a:bodyPr wrap="square" lIns="0" rIns="0" tIns="0" bIns="0" anchor="t">
+            <a:spAutoFit/>
+          </a:bodyPr>
+          <a:lstStyle/>
+          <a:p>
+            <a:pPr algn="l"/>
+            <a:r>
+              <a:rPr sz="975" b="0" i="0">
+                <a:solidFill>
+                  <a:srgbClr val="4B5563"/>
+                </a:solidFill>
+                <a:latin typeface="Calibri"/>
+              </a:rPr>
+              <a:t>• Propostas com público, copy e orçamento.
+• Aprovas em conversa, sem abrir o painel do Google.
+• Tuning diário automático; resumo semanal de performance.</a:t>
+            </a:r>
+          </a:p>
+        </p:txBody>
+      </p:sp>
+      <p:sp>
+        <p:nvSpPr>
+          <p:cNvPr id="53" name="Rounded Rectangle 52"/>
+          <p:cNvSpPr/>
+          <p:nvPr/>
+        </p:nvSpPr>
+        <p:spPr>
+          <a:xfrm>
+            <a:off x="9281159" y="6492240"/>
+            <a:ext cx="3941063" cy="3154680"/>
+          </a:xfrm>
+          <a:prstGeom prst="roundRect">
+            <a:avLst>
+              <a:gd name="adj" fmla="val 4000"/>
+            </a:avLst>
+          </a:prstGeom>
+          <a:solidFill>
+            <a:srgbClr val="FFFFFF"/>
+          </a:solidFill>
+          <a:ln>
+            <a:noFill/>
+          </a:ln>
+          <a:effectLst/>
+        </p:spPr>
+        <p:style>
+          <a:lnRef idx="1">
+            <a:schemeClr val="accent1"/>
+          </a:lnRef>
+          <a:fillRef idx="3">
+            <a:schemeClr val="accent1"/>
+          </a:fillRef>
+          <a:effectRef idx="2">
+            <a:schemeClr val="accent1"/>
+          </a:effectRef>
+          <a:fontRef idx="minor">
+            <a:schemeClr val="lt1"/>
+          </a:fontRef>
+        </p:style>
+        <p:txBody>
+          <a:bodyPr rtlCol="0" anchor="ctr"/>
+          <a:lstStyle/>
+          <a:p>
+            <a:pPr algn="ctr"/>
+          </a:p>
+        </p:txBody>
+      </p:sp>
+      <p:sp>
+        <p:nvSpPr>
+          <p:cNvPr id="54" name="Rectangle 53"/>
+          <p:cNvSpPr/>
+          <p:nvPr/>
+        </p:nvSpPr>
+        <p:spPr>
+          <a:xfrm>
+            <a:off x="9281159" y="6492240"/>
+            <a:ext cx="3941063" cy="54864"/>
+          </a:xfrm>
+          <a:prstGeom prst="rect">
+            <a:avLst/>
+          </a:prstGeom>
+          <a:solidFill>
+            <a:srgbClr val="FF8449"/>
+          </a:solidFill>
+          <a:ln>
+            <a:noFill/>
+          </a:ln>
+          <a:effectLst/>
+        </p:spPr>
+        <p:style>
+          <a:lnRef idx="1">
+            <a:schemeClr val="accent1"/>
+          </a:lnRef>
+          <a:fillRef idx="3">
+            <a:schemeClr val="accent1"/>
+          </a:fillRef>
+          <a:effectRef idx="2">
+            <a:schemeClr val="accent1"/>
+          </a:effectRef>
+          <a:fontRef idx="minor">
+            <a:schemeClr val="lt1"/>
+          </a:fontRef>
+        </p:style>
+        <p:txBody>
+          <a:bodyPr rtlCol="0" anchor="ctr"/>
+          <a:lstStyle/>
+          <a:p>
+            <a:pPr algn="ctr"/>
+          </a:p>
+        </p:txBody>
+      </p:sp>
+      <p:sp>
+        <p:nvSpPr>
+          <p:cNvPr id="55" name="TextBox 54"/>
+          <p:cNvSpPr txBox="1"/>
+          <p:nvPr/>
+        </p:nvSpPr>
+        <p:spPr>
+          <a:xfrm>
+            <a:off x="9555480" y="6693407"/>
+            <a:ext cx="914400" cy="274320"/>
+          </a:xfrm>
+          <a:prstGeom prst="rect">
+            <a:avLst/>
+          </a:prstGeom>
+          <a:noFill/>
+        </p:spPr>
+        <p:txBody>
+          <a:bodyPr wrap="square" lIns="0" rIns="0" tIns="0" bIns="0" anchor="t">
+            <a:spAutoFit/>
+          </a:bodyPr>
+          <a:lstStyle/>
+          <a:p>
+            <a:pPr algn="l"/>
+            <a:r>
+              <a:rPr sz="1100" b="0" i="0" spc="40">
+                <a:solidFill>
+                  <a:srgbClr val="6B7280"/>
+                </a:solidFill>
+                <a:latin typeface="Calibri"/>
+              </a:rPr>
+              <a:t>07</a:t>
+            </a:r>
+          </a:p>
+        </p:txBody>
+      </p:sp>
+      <p:sp>
+        <p:nvSpPr>
+          <p:cNvPr id="56" name="TextBox 55"/>
+          <p:cNvSpPr txBox="1"/>
+          <p:nvPr/>
+        </p:nvSpPr>
+        <p:spPr>
+          <a:xfrm>
+            <a:off x="9555480" y="6949440"/>
+            <a:ext cx="3392423" cy="182880"/>
+          </a:xfrm>
+          <a:prstGeom prst="rect">
+            <a:avLst/>
+          </a:prstGeom>
+          <a:noFill/>
+        </p:spPr>
+        <p:txBody>
+          <a:bodyPr wrap="square" lIns="0" rIns="0" tIns="0" bIns="0" anchor="t">
+            <a:spAutoFit/>
+          </a:bodyPr>
+          <a:lstStyle/>
+          <a:p>
+            <a:pPr algn="l"/>
+            <a:r>
+              <a:rPr sz="800" b="0" i="0" spc="80">
+                <a:solidFill>
+                  <a:srgbClr val="FF8449"/>
+                </a:solidFill>
+                <a:latin typeface="Calibri"/>
+              </a:rPr>
+              <a:t>META ADS · FACEBOOK · INSTAGRAM</a:t>
+            </a:r>
+          </a:p>
+        </p:txBody>
+      </p:sp>
+      <p:sp>
+        <p:nvSpPr>
+          <p:cNvPr id="57" name="TextBox 56"/>
+          <p:cNvSpPr txBox="1"/>
+          <p:nvPr/>
+        </p:nvSpPr>
+        <p:spPr>
+          <a:xfrm>
+            <a:off x="9555480" y="7178040"/>
+            <a:ext cx="3392423" cy="502920"/>
+          </a:xfrm>
+          <a:prstGeom prst="rect">
+            <a:avLst/>
+          </a:prstGeom>
+          <a:noFill/>
+        </p:spPr>
+        <p:txBody>
+          <a:bodyPr wrap="square" lIns="0" rIns="0" tIns="0" bIns="0" anchor="t">
+            <a:spAutoFit/>
+          </a:bodyPr>
+          <a:lstStyle/>
+          <a:p>
+            <a:pPr algn="l"/>
+            <a:r>
+              <a:rPr sz="1800" b="0" i="0">
+                <a:solidFill>
+                  <a:srgbClr val="000000"/>
+                </a:solidFill>
+                <a:latin typeface="Georgia"/>
+              </a:rPr>
+              <a:t>Meta Ads automatizado</a:t>
+            </a:r>
+          </a:p>
+        </p:txBody>
+      </p:sp>
+      <p:sp>
+        <p:nvSpPr>
+          <p:cNvPr id="58" name="TextBox 57"/>
+          <p:cNvSpPr txBox="1"/>
+          <p:nvPr/>
+        </p:nvSpPr>
+        <p:spPr>
+          <a:xfrm>
+            <a:off x="9555480" y="7726679"/>
+            <a:ext cx="3392423" cy="822960"/>
+          </a:xfrm>
+          <a:prstGeom prst="rect">
+            <a:avLst/>
+          </a:prstGeom>
+          <a:noFill/>
+        </p:spPr>
+        <p:txBody>
+          <a:bodyPr wrap="square" lIns="0" rIns="0" tIns="0" bIns="0" anchor="t">
+            <a:spAutoFit/>
+          </a:bodyPr>
+          <a:lstStyle/>
+          <a:p>
+            <a:pPr algn="l"/>
+            <a:r>
+              <a:rPr sz="1050" b="0" i="1">
+                <a:solidFill>
+                  <a:srgbClr val="4B5563"/>
+                </a:solidFill>
+                <a:latin typeface="Georgia"/>
+              </a:rPr>
+              <a:t>Anúncios Facebook + Instagram com a mesma lógica do Google Ads.</a:t>
+            </a:r>
+          </a:p>
+        </p:txBody>
+      </p:sp>
+      <p:cxnSp>
+        <p:nvCxnSpPr>
+          <p:cNvPr id="59" name="Connector 58"/>
+          <p:cNvCxnSpPr/>
+          <p:nvPr/>
+        </p:nvCxnSpPr>
+        <p:spPr>
+          <a:xfrm>
+            <a:off x="9555480" y="8549640"/>
+            <a:ext cx="3392423" cy="0"/>
+          </a:xfrm>
+          <a:prstGeom prst="line">
+            <a:avLst/>
+          </a:prstGeom>
+          <a:ln w="9525">
+            <a:solidFill>
+              <a:srgbClr val="E5E7EB"/>
+            </a:solidFill>
+          </a:ln>
+        </p:spPr>
+        <p:style>
+          <a:lnRef idx="2">
+            <a:schemeClr val="accent1"/>
+          </a:lnRef>
+          <a:fillRef idx="0">
+            <a:schemeClr val="accent1"/>
+          </a:fillRef>
+          <a:effectRef idx="1">
+            <a:schemeClr val="accent1"/>
+          </a:effectRef>
+          <a:fontRef idx="minor">
+            <a:schemeClr val="tx1"/>
+          </a:fontRef>
+        </p:style>
+      </p:cxnSp>
+      <p:sp>
+        <p:nvSpPr>
+          <p:cNvPr id="60" name="TextBox 59"/>
+          <p:cNvSpPr txBox="1"/>
+          <p:nvPr/>
+        </p:nvSpPr>
+        <p:spPr>
+          <a:xfrm>
+            <a:off x="9555480" y="8641080"/>
+            <a:ext cx="3392423" cy="914400"/>
+          </a:xfrm>
+          <a:prstGeom prst="rect">
+            <a:avLst/>
+          </a:prstGeom>
+          <a:noFill/>
+        </p:spPr>
+        <p:txBody>
+          <a:bodyPr wrap="square" lIns="0" rIns="0" tIns="0" bIns="0" anchor="t">
+            <a:spAutoFit/>
+          </a:bodyPr>
+          <a:lstStyle/>
+          <a:p>
+            <a:pPr algn="l"/>
+            <a:r>
+              <a:rPr sz="975" b="0" i="0">
+                <a:solidFill>
+                  <a:srgbClr val="4B5563"/>
+                </a:solidFill>
+                <a:latin typeface="Calibri"/>
+              </a:rPr>
+              <a:t>• Criativos e copy redigidos no tom da clínica.
+• Tuning diário, pausas automáticas em underperformers.
+• Performance combinada com Google no relatório semanal.</a:t>
+            </a:r>
+          </a:p>
+        </p:txBody>
+      </p:sp>
+      <p:sp>
+        <p:nvSpPr>
+          <p:cNvPr id="61" name="Rounded Rectangle 60"/>
+          <p:cNvSpPr/>
+          <p:nvPr/>
+        </p:nvSpPr>
+        <p:spPr>
+          <a:xfrm>
+            <a:off x="13464539" y="6492240"/>
+            <a:ext cx="3941063" cy="3154680"/>
+          </a:xfrm>
+          <a:prstGeom prst="roundRect">
+            <a:avLst>
+              <a:gd name="adj" fmla="val 4000"/>
+            </a:avLst>
+          </a:prstGeom>
+          <a:solidFill>
+            <a:srgbClr val="FFFFFF"/>
+          </a:solidFill>
+          <a:ln>
+            <a:noFill/>
+          </a:ln>
+          <a:effectLst/>
+        </p:spPr>
+        <p:style>
+          <a:lnRef idx="1">
+            <a:schemeClr val="accent1"/>
+          </a:lnRef>
+          <a:fillRef idx="3">
+            <a:schemeClr val="accent1"/>
+          </a:fillRef>
+          <a:effectRef idx="2">
+            <a:schemeClr val="accent1"/>
+          </a:effectRef>
+          <a:fontRef idx="minor">
+            <a:schemeClr val="lt1"/>
+          </a:fontRef>
+        </p:style>
+        <p:txBody>
+          <a:bodyPr rtlCol="0" anchor="ctr"/>
+          <a:lstStyle/>
+          <a:p>
+            <a:pPr algn="ctr"/>
+          </a:p>
+        </p:txBody>
+      </p:sp>
+      <p:sp>
+        <p:nvSpPr>
+          <p:cNvPr id="62" name="Rectangle 61"/>
+          <p:cNvSpPr/>
+          <p:nvPr/>
+        </p:nvSpPr>
+        <p:spPr>
+          <a:xfrm>
+            <a:off x="13464539" y="6492240"/>
+            <a:ext cx="3941063" cy="54864"/>
+          </a:xfrm>
+          <a:prstGeom prst="rect">
+            <a:avLst/>
+          </a:prstGeom>
+          <a:solidFill>
+            <a:srgbClr val="FF8449"/>
+          </a:solidFill>
+          <a:ln>
+            <a:noFill/>
+          </a:ln>
+          <a:effectLst/>
+        </p:spPr>
+        <p:style>
+          <a:lnRef idx="1">
+            <a:schemeClr val="accent1"/>
+          </a:lnRef>
+          <a:fillRef idx="3">
+            <a:schemeClr val="accent1"/>
+          </a:fillRef>
+          <a:effectRef idx="2">
+            <a:schemeClr val="accent1"/>
+          </a:effectRef>
+          <a:fontRef idx="minor">
+            <a:schemeClr val="lt1"/>
+          </a:fontRef>
+        </p:style>
+        <p:txBody>
+          <a:bodyPr rtlCol="0" anchor="ctr"/>
+          <a:lstStyle/>
+          <a:p>
+            <a:pPr algn="ctr"/>
+          </a:p>
+        </p:txBody>
+      </p:sp>
+      <p:sp>
+        <p:nvSpPr>
+          <p:cNvPr id="63" name="TextBox 62"/>
+          <p:cNvSpPr txBox="1"/>
+          <p:nvPr/>
+        </p:nvSpPr>
+        <p:spPr>
+          <a:xfrm>
+            <a:off x="13738859" y="6693407"/>
+            <a:ext cx="914400" cy="274320"/>
+          </a:xfrm>
+          <a:prstGeom prst="rect">
+            <a:avLst/>
+          </a:prstGeom>
+          <a:noFill/>
+        </p:spPr>
+        <p:txBody>
+          <a:bodyPr wrap="square" lIns="0" rIns="0" tIns="0" bIns="0" anchor="t">
+            <a:spAutoFit/>
+          </a:bodyPr>
+          <a:lstStyle/>
+          <a:p>
+            <a:pPr algn="l"/>
+            <a:r>
+              <a:rPr sz="1100" b="0" i="0" spc="40">
+                <a:solidFill>
+                  <a:srgbClr val="6B7280"/>
+                </a:solidFill>
+                <a:latin typeface="Calibri"/>
+              </a:rPr>
+              <a:t>08</a:t>
+            </a:r>
+          </a:p>
+        </p:txBody>
+      </p:sp>
+      <p:sp>
+        <p:nvSpPr>
+          <p:cNvPr id="64" name="TextBox 63"/>
+          <p:cNvSpPr txBox="1"/>
+          <p:nvPr/>
+        </p:nvSpPr>
+        <p:spPr>
+          <a:xfrm>
+            <a:off x="13738859" y="6949440"/>
+            <a:ext cx="3392423" cy="182880"/>
+          </a:xfrm>
+          <a:prstGeom prst="rect">
+            <a:avLst/>
+          </a:prstGeom>
+          <a:noFill/>
+        </p:spPr>
+        <p:txBody>
+          <a:bodyPr wrap="square" lIns="0" rIns="0" tIns="0" bIns="0" anchor="t">
+            <a:spAutoFit/>
+          </a:bodyPr>
+          <a:lstStyle/>
+          <a:p>
+            <a:pPr algn="l"/>
+            <a:r>
+              <a:rPr sz="800" b="0" i="0" spc="80">
+                <a:solidFill>
+                  <a:srgbClr val="FF8449"/>
+                </a:solidFill>
+                <a:latin typeface="Calibri"/>
+              </a:rPr>
+              <a:t>WEBSITE · CMS · COWORK</a:t>
+            </a:r>
+          </a:p>
+        </p:txBody>
+      </p:sp>
+      <p:sp>
+        <p:nvSpPr>
+          <p:cNvPr id="65" name="TextBox 64"/>
+          <p:cNvSpPr txBox="1"/>
+          <p:nvPr/>
+        </p:nvSpPr>
+        <p:spPr>
+          <a:xfrm>
+            <a:off x="13738859" y="7178040"/>
+            <a:ext cx="3392423" cy="502920"/>
+          </a:xfrm>
+          <a:prstGeom prst="rect">
+            <a:avLst/>
+          </a:prstGeom>
+          <a:noFill/>
+        </p:spPr>
+        <p:txBody>
+          <a:bodyPr wrap="square" lIns="0" rIns="0" tIns="0" bIns="0" anchor="t">
+            <a:spAutoFit/>
+          </a:bodyPr>
+          <a:lstStyle/>
+          <a:p>
+            <a:pPr algn="l"/>
+            <a:r>
+              <a:rPr sz="1800" b="0" i="0">
+                <a:solidFill>
+                  <a:srgbClr val="000000"/>
+                </a:solidFill>
+                <a:latin typeface="Georgia"/>
+              </a:rPr>
+              <a:t>Website novo + manutenção</a:t>
+            </a:r>
+          </a:p>
+        </p:txBody>
+      </p:sp>
+      <p:sp>
+        <p:nvSpPr>
+          <p:cNvPr id="66" name="TextBox 65"/>
+          <p:cNvSpPr txBox="1"/>
+          <p:nvPr/>
+        </p:nvSpPr>
+        <p:spPr>
+          <a:xfrm>
+            <a:off x="13738859" y="7726679"/>
+            <a:ext cx="3392423" cy="822960"/>
+          </a:xfrm>
+          <a:prstGeom prst="rect">
+            <a:avLst/>
+          </a:prstGeom>
+          <a:noFill/>
+        </p:spPr>
+        <p:txBody>
+          <a:bodyPr wrap="square" lIns="0" rIns="0" tIns="0" bIns="0" anchor="t">
+            <a:spAutoFit/>
+          </a:bodyPr>
+          <a:lstStyle/>
+          <a:p>
+            <a:pPr algn="l"/>
+            <a:r>
+              <a:rPr sz="1050" b="0" i="1">
+                <a:solidFill>
+                  <a:srgbClr val="4B5563"/>
+                </a:solidFill>
+                <a:latin typeface="Georgia"/>
+              </a:rPr>
+              <a:t>Site da clínica construído de raiz e gerido pelo Cowork — sem programador no loop.</a:t>
+            </a:r>
+          </a:p>
+        </p:txBody>
+      </p:sp>
+      <p:cxnSp>
+        <p:nvCxnSpPr>
+          <p:cNvPr id="67" name="Connector 66"/>
+          <p:cNvCxnSpPr/>
+          <p:nvPr/>
+        </p:nvCxnSpPr>
+        <p:spPr>
+          <a:xfrm>
+            <a:off x="13738859" y="8549640"/>
+            <a:ext cx="3392424" cy="0"/>
+          </a:xfrm>
+          <a:prstGeom prst="line">
+            <a:avLst/>
+          </a:prstGeom>
+          <a:ln w="9525">
+            <a:solidFill>
+              <a:srgbClr val="E5E7EB"/>
+            </a:solidFill>
+          </a:ln>
+        </p:spPr>
+        <p:style>
+          <a:lnRef idx="2">
+            <a:schemeClr val="accent1"/>
+          </a:lnRef>
+          <a:fillRef idx="0">
+            <a:schemeClr val="accent1"/>
+          </a:fillRef>
+          <a:effectRef idx="1">
+            <a:schemeClr val="accent1"/>
+          </a:effectRef>
+          <a:fontRef idx="minor">
+            <a:schemeClr val="tx1"/>
+          </a:fontRef>
+        </p:style>
+      </p:cxnSp>
+      <p:sp>
+        <p:nvSpPr>
+          <p:cNvPr id="68" name="TextBox 67"/>
+          <p:cNvSpPr txBox="1"/>
+          <p:nvPr/>
+        </p:nvSpPr>
+        <p:spPr>
+          <a:xfrm>
+            <a:off x="13738859" y="8641080"/>
+            <a:ext cx="3392423" cy="914400"/>
+          </a:xfrm>
+          <a:prstGeom prst="rect">
+            <a:avLst/>
+          </a:prstGeom>
+          <a:noFill/>
+        </p:spPr>
+        <p:txBody>
+          <a:bodyPr wrap="square" lIns="0" rIns="0" tIns="0" bIns="0" anchor="t">
+            <a:spAutoFit/>
+          </a:bodyPr>
+          <a:lstStyle/>
+          <a:p>
+            <a:pPr algn="l"/>
+            <a:r>
+              <a:rPr sz="975" b="0" i="0">
+                <a:solidFill>
+                  <a:srgbClr val="4B5563"/>
+                </a:solidFill>
+                <a:latin typeface="Calibri"/>
+              </a:rPr>
+              <a:t>• Build inicial focado em conversão (B2C clínica).
+• Atualizações em conversa: «mete uma secção sobre laser».
+• Preview de staging antes de qualquer alteração ir para o ar.</a:t>
+            </a:r>
+          </a:p>
+        </p:txBody>
+      </p:sp>
+      <p:sp>
+        <p:nvSpPr>
+          <p:cNvPr id="69" name="TextBox 68"/>
           <p:cNvSpPr txBox="1"/>
           <p:nvPr/>
         </p:nvSpPr>
@@ -5599,7 +6807,7 @@
       </p:sp>
       <p:sp>
         <p:nvSpPr>
-          <p:cNvPr id="38" name="TextBox 37"/>
+          <p:cNvPr id="70" name="TextBox 69"/>
           <p:cNvSpPr txBox="1"/>
           <p:nvPr/>
         </p:nvSpPr>
@@ -5634,7 +6842,7 @@
       </p:sp>
       <p:sp>
         <p:nvSpPr>
-          <p:cNvPr id="39" name="TextBox 38"/>
+          <p:cNvPr id="71" name="TextBox 70"/>
           <p:cNvSpPr txBox="1"/>
           <p:nvPr/>
         </p:nvSpPr>
@@ -8026,8 +9234,8 @@
         </p:nvSpPr>
         <p:spPr>
           <a:xfrm>
-            <a:off x="914400" y="3291840"/>
-            <a:ext cx="3941063" cy="5303520"/>
+            <a:off x="2011680" y="3657600"/>
+            <a:ext cx="6858000" cy="5029200"/>
           </a:xfrm>
           <a:prstGeom prst="roundRect">
             <a:avLst>
@@ -8072,8 +9280,8 @@
         </p:nvSpPr>
         <p:spPr>
           <a:xfrm>
-            <a:off x="1188720" y="3566160"/>
-            <a:ext cx="3392423" cy="274320"/>
+            <a:off x="2377440" y="3931920"/>
+            <a:ext cx="6126480" cy="274320"/>
           </a:xfrm>
           <a:prstGeom prst="rect">
             <a:avLst/>
@@ -8107,29 +9315,29 @@
         </p:nvSpPr>
         <p:spPr>
           <a:xfrm>
-            <a:off x="1188720" y="3840480"/>
-            <a:ext cx="3392423" cy="822960"/>
-          </a:xfrm>
-          <a:prstGeom prst="rect">
-            <a:avLst/>
-          </a:prstGeom>
-          <a:noFill/>
-        </p:spPr>
-        <p:txBody>
-          <a:bodyPr wrap="square" lIns="0" rIns="0" tIns="0" bIns="0" anchor="t">
-            <a:spAutoFit/>
-          </a:bodyPr>
-          <a:lstStyle/>
-          <a:p>
-            <a:pPr algn="l"/>
-            <a:r>
-              <a:rPr sz="1800" b="0" i="0">
+            <a:off x="2377440" y="4206240"/>
+            <a:ext cx="6126480" cy="822960"/>
+          </a:xfrm>
+          <a:prstGeom prst="rect">
+            <a:avLst/>
+          </a:prstGeom>
+          <a:noFill/>
+        </p:spPr>
+        <p:txBody>
+          <a:bodyPr wrap="square" lIns="0" rIns="0" tIns="0" bIns="0" anchor="t">
+            <a:spAutoFit/>
+          </a:bodyPr>
+          <a:lstStyle/>
+          <a:p>
+            <a:pPr algn="l"/>
+            <a:r>
+              <a:rPr sz="2200" b="0" i="0">
                 <a:solidFill>
                   <a:srgbClr val="000000"/>
                 </a:solidFill>
                 <a:latin typeface="Georgia"/>
               </a:rPr>
-              <a:t>Digitalização das notas</a:t>
+              <a:t>Digitalização das notas em papel</a:t>
             </a:r>
           </a:p>
         </p:txBody>
@@ -8142,8 +9350,8 @@
         </p:nvCxnSpPr>
         <p:spPr>
           <a:xfrm>
-            <a:off x="1188720" y="4754880"/>
-            <a:ext cx="3392424" cy="0"/>
+            <a:off x="2377440" y="5303520"/>
+            <a:ext cx="6126479" cy="0"/>
           </a:xfrm>
           <a:prstGeom prst="line">
             <a:avLst/>
@@ -8177,29 +9385,29 @@
         </p:nvSpPr>
         <p:spPr>
           <a:xfrm>
-            <a:off x="1188720" y="4892040"/>
-            <a:ext cx="3392423" cy="3474720"/>
-          </a:xfrm>
-          <a:prstGeom prst="rect">
-            <a:avLst/>
-          </a:prstGeom>
-          <a:noFill/>
-        </p:spPr>
-        <p:txBody>
-          <a:bodyPr wrap="square" lIns="0" rIns="0" tIns="0" bIns="0" anchor="t">
-            <a:spAutoFit/>
-          </a:bodyPr>
-          <a:lstStyle/>
-          <a:p>
-            <a:pPr algn="l"/>
-            <a:r>
-              <a:rPr sz="1050" b="0" i="0">
+            <a:off x="2377440" y="5440680"/>
+            <a:ext cx="6126480" cy="3017520"/>
+          </a:xfrm>
+          <a:prstGeom prst="rect">
+            <a:avLst/>
+          </a:prstGeom>
+          <a:noFill/>
+        </p:spPr>
+        <p:txBody>
+          <a:bodyPr wrap="square" lIns="0" rIns="0" tIns="0" bIns="0" anchor="t">
+            <a:spAutoFit/>
+          </a:bodyPr>
+          <a:lstStyle/>
+          <a:p>
+            <a:pPr algn="l"/>
+            <a:r>
+              <a:rPr sz="1200" b="0" i="0">
                 <a:solidFill>
                   <a:srgbClr val="4B5563"/>
                 </a:solidFill>
                 <a:latin typeface="Calibri"/>
               </a:rPr>
-              <a:t>Três abordagens em cima da mesa (assistente em consulta · scan pós-consulta · captura no momento dos documentos). Escolha durante a descoberta, build numa fase seguinte.</a:t>
+              <a:t>Três abordagens em cima da mesa (assistente em consulta · scan pós-consulta · captura no momento dos documentos). Escolha durante a descoberta da Fase 1; build numa fase seguinte conforme a abordagem escolhida.</a:t>
             </a:r>
           </a:p>
         </p:txBody>
@@ -8212,8 +9420,8 @@
         </p:nvSpPr>
         <p:spPr>
           <a:xfrm>
-            <a:off x="5097779" y="3291840"/>
-            <a:ext cx="3941063" cy="5303520"/>
+            <a:off x="9418320" y="3657600"/>
+            <a:ext cx="6858000" cy="5029200"/>
           </a:xfrm>
           <a:prstGeom prst="roundRect">
             <a:avLst>
@@ -8258,8 +9466,8 @@
         </p:nvSpPr>
         <p:spPr>
           <a:xfrm>
-            <a:off x="5372099" y="3566160"/>
-            <a:ext cx="3392423" cy="274320"/>
+            <a:off x="9784080" y="3931920"/>
+            <a:ext cx="6126480" cy="274320"/>
           </a:xfrm>
           <a:prstGeom prst="rect">
             <a:avLst/>
@@ -8293,23 +9501,23 @@
         </p:nvSpPr>
         <p:spPr>
           <a:xfrm>
-            <a:off x="5372099" y="3840480"/>
-            <a:ext cx="3392423" cy="822960"/>
-          </a:xfrm>
-          <a:prstGeom prst="rect">
-            <a:avLst/>
-          </a:prstGeom>
-          <a:noFill/>
-        </p:spPr>
-        <p:txBody>
-          <a:bodyPr wrap="square" lIns="0" rIns="0" tIns="0" bIns="0" anchor="t">
-            <a:spAutoFit/>
-          </a:bodyPr>
-          <a:lstStyle/>
-          <a:p>
-            <a:pPr algn="l"/>
-            <a:r>
-              <a:rPr sz="1800" b="0" i="0">
+            <a:off x="9784080" y="4206240"/>
+            <a:ext cx="6126480" cy="822960"/>
+          </a:xfrm>
+          <a:prstGeom prst="rect">
+            <a:avLst/>
+          </a:prstGeom>
+          <a:noFill/>
+        </p:spPr>
+        <p:txBody>
+          <a:bodyPr wrap="square" lIns="0" rIns="0" tIns="0" bIns="0" anchor="t">
+            <a:spAutoFit/>
+          </a:bodyPr>
+          <a:lstStyle/>
+          <a:p>
+            <a:pPr algn="l"/>
+            <a:r>
+              <a:rPr sz="2200" b="0" i="0">
                 <a:solidFill>
                   <a:srgbClr val="000000"/>
                 </a:solidFill>
@@ -8328,8 +9536,8 @@
         </p:nvCxnSpPr>
         <p:spPr>
           <a:xfrm>
-            <a:off x="5372099" y="4754880"/>
-            <a:ext cx="3392424" cy="0"/>
+            <a:off x="9784080" y="5303520"/>
+            <a:ext cx="6126480" cy="0"/>
           </a:xfrm>
           <a:prstGeom prst="line">
             <a:avLst/>
@@ -8363,408 +9571,71 @@
         </p:nvSpPr>
         <p:spPr>
           <a:xfrm>
-            <a:off x="5372099" y="4892040"/>
-            <a:ext cx="3392423" cy="3474720"/>
-          </a:xfrm>
-          <a:prstGeom prst="rect">
-            <a:avLst/>
-          </a:prstGeom>
-          <a:noFill/>
-        </p:spPr>
-        <p:txBody>
-          <a:bodyPr wrap="square" lIns="0" rIns="0" tIns="0" bIns="0" anchor="t">
-            <a:spAutoFit/>
-          </a:bodyPr>
-          <a:lstStyle/>
-          <a:p>
-            <a:pPr algn="l"/>
-            <a:r>
-              <a:rPr sz="1050" b="0" i="0">
+            <a:off x="9784080" y="5440680"/>
+            <a:ext cx="6126480" cy="3017520"/>
+          </a:xfrm>
+          <a:prstGeom prst="rect">
+            <a:avLst/>
+          </a:prstGeom>
+          <a:noFill/>
+        </p:spPr>
+        <p:txBody>
+          <a:bodyPr wrap="square" lIns="0" rIns="0" tIns="0" bIns="0" anchor="t">
+            <a:spAutoFit/>
+          </a:bodyPr>
+          <a:lstStyle/>
+          <a:p>
+            <a:pPr algn="l"/>
+            <a:r>
+              <a:rPr sz="1200" b="0" i="0">
                 <a:solidFill>
                   <a:srgbClr val="4B5563"/>
                 </a:solidFill>
                 <a:latin typeface="Calibri"/>
               </a:rPr>
-              <a:t>Monitorização da agenda + outreach automático a pacientes em lista de espera ou com seguimento pendente. Adiciona receita; depende de a Fase 1 estar estável.</a:t>
-            </a:r>
-          </a:p>
-        </p:txBody>
-      </p:sp>
-      <p:sp>
-        <p:nvSpPr>
-          <p:cNvPr id="15" name="Rounded Rectangle 14"/>
-          <p:cNvSpPr/>
-          <p:nvPr/>
-        </p:nvSpPr>
-        <p:spPr>
-          <a:xfrm>
-            <a:off x="9281159" y="3291840"/>
-            <a:ext cx="3941063" cy="5303520"/>
-          </a:xfrm>
-          <a:prstGeom prst="roundRect">
-            <a:avLst>
-              <a:gd name="adj" fmla="val 3000"/>
-            </a:avLst>
-          </a:prstGeom>
-          <a:solidFill>
-            <a:srgbClr val="F7F1E8"/>
-          </a:solidFill>
-          <a:ln>
-            <a:noFill/>
-          </a:ln>
-          <a:effectLst/>
-        </p:spPr>
-        <p:style>
-          <a:lnRef idx="1">
-            <a:schemeClr val="accent1"/>
-          </a:lnRef>
-          <a:fillRef idx="3">
-            <a:schemeClr val="accent1"/>
-          </a:fillRef>
-          <a:effectRef idx="2">
-            <a:schemeClr val="accent1"/>
-          </a:effectRef>
-          <a:fontRef idx="minor">
-            <a:schemeClr val="lt1"/>
-          </a:fontRef>
-        </p:style>
-        <p:txBody>
-          <a:bodyPr rtlCol="0" anchor="ctr"/>
-          <a:lstStyle/>
-          <a:p>
-            <a:pPr algn="ctr"/>
+              <a:t>Monitorização da agenda + outreach automático a pacientes em lista de espera ou com seguimento pendente. Adiciona receita; entra naturalmente depois da Fase 1 estar estável e com dados reais para afinar os critérios de match.</a:t>
+            </a:r>
+          </a:p>
+        </p:txBody>
+      </p:sp>
+      <p:sp>
+        <p:nvSpPr>
+          <p:cNvPr id="15" name="TextBox 14"/>
+          <p:cNvSpPr txBox="1"/>
+          <p:nvPr/>
+        </p:nvSpPr>
+        <p:spPr>
+          <a:xfrm>
+            <a:off x="914400" y="9144000"/>
+            <a:ext cx="16459200" cy="365760"/>
+          </a:xfrm>
+          <a:prstGeom prst="rect">
+            <a:avLst/>
+          </a:prstGeom>
+          <a:noFill/>
+        </p:spPr>
+        <p:txBody>
+          <a:bodyPr wrap="square" lIns="0" rIns="0" tIns="0" bIns="0" anchor="t">
+            <a:spAutoFit/>
+          </a:bodyPr>
+          <a:lstStyle/>
+          <a:p>
+            <a:pPr algn="l"/>
+            <a:r>
+              <a:rPr sz="1100" b="0" i="1">
+                <a:solidFill>
+                  <a:srgbClr val="4B5563"/>
+                </a:solidFill>
+                <a:latin typeface="Georgia"/>
+              </a:rPr>
+              <a:t>Nota: Redes sociais, ads e website passaram a estar dentro da Fase 1 (Prioridades 05–08), por pedido explícito. Apenas estes dois temas ficam por agendar.</a:t>
+            </a:r>
           </a:p>
         </p:txBody>
       </p:sp>
       <p:sp>
         <p:nvSpPr>
           <p:cNvPr id="16" name="TextBox 15"/>
-          <p:cNvSpPr txBox="1"/>
-          <p:nvPr/>
-        </p:nvSpPr>
-        <p:spPr>
-          <a:xfrm>
-            <a:off x="9555480" y="3566160"/>
-            <a:ext cx="3392423" cy="274320"/>
-          </a:xfrm>
-          <a:prstGeom prst="rect">
-            <a:avLst/>
-          </a:prstGeom>
-          <a:noFill/>
-        </p:spPr>
-        <p:txBody>
-          <a:bodyPr wrap="square" lIns="0" rIns="0" tIns="0" bIns="0" anchor="t">
-            <a:spAutoFit/>
-          </a:bodyPr>
-          <a:lstStyle/>
-          <a:p>
-            <a:pPr algn="l"/>
-            <a:r>
-              <a:rPr sz="825" b="0" i="0" spc="80">
-                <a:solidFill>
-                  <a:srgbClr val="FF8449"/>
-                </a:solidFill>
-                <a:latin typeface="Calibri"/>
-              </a:rPr>
-              <a:t>AQUISIÇÃO</a:t>
-            </a:r>
-          </a:p>
-        </p:txBody>
-      </p:sp>
-      <p:sp>
-        <p:nvSpPr>
-          <p:cNvPr id="17" name="TextBox 16"/>
-          <p:cNvSpPr txBox="1"/>
-          <p:nvPr/>
-        </p:nvSpPr>
-        <p:spPr>
-          <a:xfrm>
-            <a:off x="9555480" y="3840480"/>
-            <a:ext cx="3392423" cy="822960"/>
-          </a:xfrm>
-          <a:prstGeom prst="rect">
-            <a:avLst/>
-          </a:prstGeom>
-          <a:noFill/>
-        </p:spPr>
-        <p:txBody>
-          <a:bodyPr wrap="square" lIns="0" rIns="0" tIns="0" bIns="0" anchor="t">
-            <a:spAutoFit/>
-          </a:bodyPr>
-          <a:lstStyle/>
-          <a:p>
-            <a:pPr algn="l"/>
-            <a:r>
-              <a:rPr sz="1800" b="0" i="0">
-                <a:solidFill>
-                  <a:srgbClr val="000000"/>
-                </a:solidFill>
-                <a:latin typeface="Georgia"/>
-              </a:rPr>
-              <a:t>Marketing e crescimento</a:t>
-            </a:r>
-          </a:p>
-        </p:txBody>
-      </p:sp>
-      <p:cxnSp>
-        <p:nvCxnSpPr>
-          <p:cNvPr id="18" name="Connector 17"/>
-          <p:cNvCxnSpPr/>
-          <p:nvPr/>
-        </p:nvCxnSpPr>
-        <p:spPr>
-          <a:xfrm>
-            <a:off x="9555480" y="4754880"/>
-            <a:ext cx="3392423" cy="0"/>
-          </a:xfrm>
-          <a:prstGeom prst="line">
-            <a:avLst/>
-          </a:prstGeom>
-          <a:ln w="9525">
-            <a:solidFill>
-              <a:srgbClr val="D4D4D8"/>
-            </a:solidFill>
-          </a:ln>
-        </p:spPr>
-        <p:style>
-          <a:lnRef idx="2">
-            <a:schemeClr val="accent1"/>
-          </a:lnRef>
-          <a:fillRef idx="0">
-            <a:schemeClr val="accent1"/>
-          </a:fillRef>
-          <a:effectRef idx="1">
-            <a:schemeClr val="accent1"/>
-          </a:effectRef>
-          <a:fontRef idx="minor">
-            <a:schemeClr val="tx1"/>
-          </a:fontRef>
-        </p:style>
-      </p:cxnSp>
-      <p:sp>
-        <p:nvSpPr>
-          <p:cNvPr id="19" name="TextBox 18"/>
-          <p:cNvSpPr txBox="1"/>
-          <p:nvPr/>
-        </p:nvSpPr>
-        <p:spPr>
-          <a:xfrm>
-            <a:off x="9555480" y="4892040"/>
-            <a:ext cx="3392423" cy="3474720"/>
-          </a:xfrm>
-          <a:prstGeom prst="rect">
-            <a:avLst/>
-          </a:prstGeom>
-          <a:noFill/>
-        </p:spPr>
-        <p:txBody>
-          <a:bodyPr wrap="square" lIns="0" rIns="0" tIns="0" bIns="0" anchor="t">
-            <a:spAutoFit/>
-          </a:bodyPr>
-          <a:lstStyle/>
-          <a:p>
-            <a:pPr algn="l"/>
-            <a:r>
-              <a:rPr sz="1050" b="0" i="0">
-                <a:solidFill>
-                  <a:srgbClr val="4B5563"/>
-                </a:solidFill>
-                <a:latin typeface="Calibri"/>
-              </a:rPr>
-              <a:t>Redes sociais, website, Google Ads. Conversa natural depois de o loop operacional estar provado. Tem o seu próprio shape (Hugo) se evoluirmos para esse caminho.</a:t>
-            </a:r>
-          </a:p>
-        </p:txBody>
-      </p:sp>
-      <p:sp>
-        <p:nvSpPr>
-          <p:cNvPr id="20" name="Rounded Rectangle 19"/>
-          <p:cNvSpPr/>
-          <p:nvPr/>
-        </p:nvSpPr>
-        <p:spPr>
-          <a:xfrm>
-            <a:off x="13464539" y="3291840"/>
-            <a:ext cx="3941063" cy="5303520"/>
-          </a:xfrm>
-          <a:prstGeom prst="roundRect">
-            <a:avLst>
-              <a:gd name="adj" fmla="val 3000"/>
-            </a:avLst>
-          </a:prstGeom>
-          <a:solidFill>
-            <a:srgbClr val="F7F1E8"/>
-          </a:solidFill>
-          <a:ln>
-            <a:noFill/>
-          </a:ln>
-          <a:effectLst/>
-        </p:spPr>
-        <p:style>
-          <a:lnRef idx="1">
-            <a:schemeClr val="accent1"/>
-          </a:lnRef>
-          <a:fillRef idx="3">
-            <a:schemeClr val="accent1"/>
-          </a:fillRef>
-          <a:effectRef idx="2">
-            <a:schemeClr val="accent1"/>
-          </a:effectRef>
-          <a:fontRef idx="minor">
-            <a:schemeClr val="lt1"/>
-          </a:fontRef>
-        </p:style>
-        <p:txBody>
-          <a:bodyPr rtlCol="0" anchor="ctr"/>
-          <a:lstStyle/>
-          <a:p>
-            <a:pPr algn="ctr"/>
-          </a:p>
-        </p:txBody>
-      </p:sp>
-      <p:sp>
-        <p:nvSpPr>
-          <p:cNvPr id="21" name="TextBox 20"/>
-          <p:cNvSpPr txBox="1"/>
-          <p:nvPr/>
-        </p:nvSpPr>
-        <p:spPr>
-          <a:xfrm>
-            <a:off x="13738859" y="3566160"/>
-            <a:ext cx="3392423" cy="274320"/>
-          </a:xfrm>
-          <a:prstGeom prst="rect">
-            <a:avLst/>
-          </a:prstGeom>
-          <a:noFill/>
-        </p:spPr>
-        <p:txBody>
-          <a:bodyPr wrap="square" lIns="0" rIns="0" tIns="0" bIns="0" anchor="t">
-            <a:spAutoFit/>
-          </a:bodyPr>
-          <a:lstStyle/>
-          <a:p>
-            <a:pPr algn="l"/>
-            <a:r>
-              <a:rPr sz="825" b="0" i="0" spc="80">
-                <a:solidFill>
-                  <a:srgbClr val="FF8449"/>
-                </a:solidFill>
-                <a:latin typeface="Calibri"/>
-              </a:rPr>
-              <a:t>PRESENÇA LOCAL</a:t>
-            </a:r>
-          </a:p>
-        </p:txBody>
-      </p:sp>
-      <p:sp>
-        <p:nvSpPr>
-          <p:cNvPr id="22" name="TextBox 21"/>
-          <p:cNvSpPr txBox="1"/>
-          <p:nvPr/>
-        </p:nvSpPr>
-        <p:spPr>
-          <a:xfrm>
-            <a:off x="13738859" y="3840480"/>
-            <a:ext cx="3392423" cy="822960"/>
-          </a:xfrm>
-          <a:prstGeom prst="rect">
-            <a:avLst/>
-          </a:prstGeom>
-          <a:noFill/>
-        </p:spPr>
-        <p:txBody>
-          <a:bodyPr wrap="square" lIns="0" rIns="0" tIns="0" bIns="0" anchor="t">
-            <a:spAutoFit/>
-          </a:bodyPr>
-          <a:lstStyle/>
-          <a:p>
-            <a:pPr algn="l"/>
-            <a:r>
-              <a:rPr sz="1800" b="0" i="0">
-                <a:solidFill>
-                  <a:srgbClr val="000000"/>
-                </a:solidFill>
-                <a:latin typeface="Georgia"/>
-              </a:rPr>
-              <a:t>Google Business + reviews</a:t>
-            </a:r>
-          </a:p>
-        </p:txBody>
-      </p:sp>
-      <p:cxnSp>
-        <p:nvCxnSpPr>
-          <p:cNvPr id="23" name="Connector 22"/>
-          <p:cNvCxnSpPr/>
-          <p:nvPr/>
-        </p:nvCxnSpPr>
-        <p:spPr>
-          <a:xfrm>
-            <a:off x="13738859" y="4754880"/>
-            <a:ext cx="3392424" cy="0"/>
-          </a:xfrm>
-          <a:prstGeom prst="line">
-            <a:avLst/>
-          </a:prstGeom>
-          <a:ln w="9525">
-            <a:solidFill>
-              <a:srgbClr val="D4D4D8"/>
-            </a:solidFill>
-          </a:ln>
-        </p:spPr>
-        <p:style>
-          <a:lnRef idx="2">
-            <a:schemeClr val="accent1"/>
-          </a:lnRef>
-          <a:fillRef idx="0">
-            <a:schemeClr val="accent1"/>
-          </a:fillRef>
-          <a:effectRef idx="1">
-            <a:schemeClr val="accent1"/>
-          </a:effectRef>
-          <a:fontRef idx="minor">
-            <a:schemeClr val="tx1"/>
-          </a:fontRef>
-        </p:style>
-      </p:cxnSp>
-      <p:sp>
-        <p:nvSpPr>
-          <p:cNvPr id="24" name="TextBox 23"/>
-          <p:cNvSpPr txBox="1"/>
-          <p:nvPr/>
-        </p:nvSpPr>
-        <p:spPr>
-          <a:xfrm>
-            <a:off x="13738859" y="4892040"/>
-            <a:ext cx="3392423" cy="3474720"/>
-          </a:xfrm>
-          <a:prstGeom prst="rect">
-            <a:avLst/>
-          </a:prstGeom>
-          <a:noFill/>
-        </p:spPr>
-        <p:txBody>
-          <a:bodyPr wrap="square" lIns="0" rIns="0" tIns="0" bIns="0" anchor="t">
-            <a:spAutoFit/>
-          </a:bodyPr>
-          <a:lstStyle/>
-          <a:p>
-            <a:pPr algn="l"/>
-            <a:r>
-              <a:rPr sz="1050" b="0" i="0">
-                <a:solidFill>
-                  <a:srgbClr val="4B5563"/>
-                </a:solidFill>
-                <a:latin typeface="Calibri"/>
-              </a:rPr>
-              <a:t>Capacidade standard do Practice Command. Fica para a Fase 1.5, exceto se for prioridade explícita.</a:t>
-            </a:r>
-          </a:p>
-        </p:txBody>
-      </p:sp>
-      <p:sp>
-        <p:nvSpPr>
-          <p:cNvPr id="25" name="TextBox 24"/>
           <p:cNvSpPr txBox="1"/>
           <p:nvPr/>
         </p:nvSpPr>
@@ -8799,7 +9670,7 @@
       </p:sp>
       <p:sp>
         <p:nvSpPr>
-          <p:cNvPr id="26" name="TextBox 25"/>
+          <p:cNvPr id="17" name="TextBox 16"/>
           <p:cNvSpPr txBox="1"/>
           <p:nvPr/>
         </p:nvSpPr>
@@ -8834,7 +9705,7 @@
       </p:sp>
       <p:sp>
         <p:nvSpPr>
-          <p:cNvPr id="27" name="TextBox 26"/>
+          <p:cNvPr id="18" name="TextBox 17"/>
           <p:cNvSpPr txBox="1"/>
           <p:nvPr/>
         </p:nvSpPr>
@@ -9006,8 +9877,8 @@
         </p:nvSpPr>
         <p:spPr>
           <a:xfrm>
-            <a:off x="914400" y="3657600"/>
-            <a:ext cx="5394960" cy="2834640"/>
+            <a:off x="914400" y="3337560"/>
+            <a:ext cx="5394960" cy="1965960"/>
           </a:xfrm>
           <a:prstGeom prst="roundRect">
             <a:avLst>
@@ -9052,23 +9923,23 @@
         </p:nvSpPr>
         <p:spPr>
           <a:xfrm>
-            <a:off x="1188720" y="3886200"/>
-            <a:ext cx="914400" cy="411480"/>
-          </a:xfrm>
-          <a:prstGeom prst="rect">
-            <a:avLst/>
-          </a:prstGeom>
-          <a:noFill/>
-        </p:spPr>
-        <p:txBody>
-          <a:bodyPr wrap="square" lIns="0" rIns="0" tIns="0" bIns="0" anchor="t">
-            <a:spAutoFit/>
-          </a:bodyPr>
-          <a:lstStyle/>
-          <a:p>
-            <a:pPr algn="l"/>
-            <a:r>
-              <a:rPr sz="2200" b="0" i="0">
+            <a:off x="1188720" y="3520440"/>
+            <a:ext cx="777240" cy="365760"/>
+          </a:xfrm>
+          <a:prstGeom prst="rect">
+            <a:avLst/>
+          </a:prstGeom>
+          <a:noFill/>
+        </p:spPr>
+        <p:txBody>
+          <a:bodyPr wrap="square" lIns="0" rIns="0" tIns="0" bIns="0" anchor="t">
+            <a:spAutoFit/>
+          </a:bodyPr>
+          <a:lstStyle/>
+          <a:p>
+            <a:pPr algn="l"/>
+            <a:r>
+              <a:rPr sz="1800" b="0" i="0">
                 <a:solidFill>
                   <a:srgbClr val="FF8449"/>
                 </a:solidFill>
@@ -9087,23 +9958,23 @@
         </p:nvSpPr>
         <p:spPr>
           <a:xfrm>
-            <a:off x="2103120" y="3950208"/>
-            <a:ext cx="4023360" cy="274320"/>
-          </a:xfrm>
-          <a:prstGeom prst="rect">
-            <a:avLst/>
-          </a:prstGeom>
-          <a:noFill/>
-        </p:spPr>
-        <p:txBody>
-          <a:bodyPr wrap="square" lIns="0" rIns="0" tIns="0" bIns="0" anchor="t">
-            <a:spAutoFit/>
-          </a:bodyPr>
-          <a:lstStyle/>
-          <a:p>
-            <a:pPr algn="l"/>
-            <a:r>
-              <a:rPr sz="825" b="0" i="0" spc="80">
+            <a:off x="1920240" y="3584448"/>
+            <a:ext cx="4206240" cy="274320"/>
+          </a:xfrm>
+          <a:prstGeom prst="rect">
+            <a:avLst/>
+          </a:prstGeom>
+          <a:noFill/>
+        </p:spPr>
+        <p:txBody>
+          <a:bodyPr wrap="square" lIns="0" rIns="0" tIns="0" bIns="0" anchor="t">
+            <a:spAutoFit/>
+          </a:bodyPr>
+          <a:lstStyle/>
+          <a:p>
+            <a:pPr algn="l"/>
+            <a:r>
+              <a:rPr sz="800" b="0" i="0" spc="80">
                 <a:solidFill>
                   <a:srgbClr val="FF8449"/>
                 </a:solidFill>
@@ -9122,23 +9993,23 @@
         </p:nvSpPr>
         <p:spPr>
           <a:xfrm>
-            <a:off x="1188720" y="4526280"/>
-            <a:ext cx="4846320" cy="502920"/>
-          </a:xfrm>
-          <a:prstGeom prst="rect">
-            <a:avLst/>
-          </a:prstGeom>
-          <a:noFill/>
-        </p:spPr>
-        <p:txBody>
-          <a:bodyPr wrap="square" lIns="0" rIns="0" tIns="0" bIns="0" anchor="t">
-            <a:spAutoFit/>
-          </a:bodyPr>
-          <a:lstStyle/>
-          <a:p>
-            <a:pPr algn="l"/>
-            <a:r>
-              <a:rPr sz="1600" b="0" i="0">
+            <a:off x="1188720" y="3977639"/>
+            <a:ext cx="4846320" cy="365760"/>
+          </a:xfrm>
+          <a:prstGeom prst="rect">
+            <a:avLst/>
+          </a:prstGeom>
+          <a:noFill/>
+        </p:spPr>
+        <p:txBody>
+          <a:bodyPr wrap="square" lIns="0" rIns="0" tIns="0" bIns="0" anchor="t">
+            <a:spAutoFit/>
+          </a:bodyPr>
+          <a:lstStyle/>
+          <a:p>
+            <a:pPr algn="l"/>
+            <a:r>
+              <a:rPr sz="1400" b="0" i="0">
                 <a:solidFill>
                   <a:srgbClr val="000000"/>
                 </a:solidFill>
@@ -9157,29 +10028,29 @@
         </p:nvSpPr>
         <p:spPr>
           <a:xfrm>
-            <a:off x="1188720" y="5120640"/>
-            <a:ext cx="4846320" cy="1188720"/>
-          </a:xfrm>
-          <a:prstGeom prst="rect">
-            <a:avLst/>
-          </a:prstGeom>
-          <a:noFill/>
-        </p:spPr>
-        <p:txBody>
-          <a:bodyPr wrap="square" lIns="0" rIns="0" tIns="0" bIns="0" anchor="t">
-            <a:spAutoFit/>
-          </a:bodyPr>
-          <a:lstStyle/>
-          <a:p>
-            <a:pPr algn="l"/>
-            <a:r>
-              <a:rPr sz="1050" b="0" i="0">
+            <a:off x="1188720" y="4389120"/>
+            <a:ext cx="4846320" cy="777239"/>
+          </a:xfrm>
+          <a:prstGeom prst="rect">
+            <a:avLst/>
+          </a:prstGeom>
+          <a:noFill/>
+        </p:spPr>
+        <p:txBody>
+          <a:bodyPr wrap="square" lIns="0" rIns="0" tIns="0" bIns="0" anchor="t">
+            <a:spAutoFit/>
+          </a:bodyPr>
+          <a:lstStyle/>
+          <a:p>
+            <a:pPr algn="l"/>
+            <a:r>
+              <a:rPr sz="1000" b="0" i="0">
                 <a:solidFill>
                   <a:srgbClr val="4B5563"/>
                 </a:solidFill>
                 <a:latin typeface="Calibri"/>
               </a:rPr>
-              <a:t>BUK ou book.pt? Determina o MCP que entregamos e a forma como integramos.</a:t>
+              <a:t>BUK ou book.pt? Determina o MCP que entregamos e a integração.</a:t>
             </a:r>
           </a:p>
         </p:txBody>
@@ -9192,8 +10063,8 @@
         </p:nvSpPr>
         <p:spPr>
           <a:xfrm>
-            <a:off x="6675120" y="3657600"/>
-            <a:ext cx="5394960" cy="2834640"/>
+            <a:off x="6675120" y="3337560"/>
+            <a:ext cx="5394960" cy="1965960"/>
           </a:xfrm>
           <a:prstGeom prst="roundRect">
             <a:avLst>
@@ -9238,23 +10109,23 @@
         </p:nvSpPr>
         <p:spPr>
           <a:xfrm>
-            <a:off x="6949440" y="3886200"/>
-            <a:ext cx="914400" cy="411480"/>
-          </a:xfrm>
-          <a:prstGeom prst="rect">
-            <a:avLst/>
-          </a:prstGeom>
-          <a:noFill/>
-        </p:spPr>
-        <p:txBody>
-          <a:bodyPr wrap="square" lIns="0" rIns="0" tIns="0" bIns="0" anchor="t">
-            <a:spAutoFit/>
-          </a:bodyPr>
-          <a:lstStyle/>
-          <a:p>
-            <a:pPr algn="l"/>
-            <a:r>
-              <a:rPr sz="2200" b="0" i="0">
+            <a:off x="6949440" y="3520440"/>
+            <a:ext cx="777240" cy="365760"/>
+          </a:xfrm>
+          <a:prstGeom prst="rect">
+            <a:avLst/>
+          </a:prstGeom>
+          <a:noFill/>
+        </p:spPr>
+        <p:txBody>
+          <a:bodyPr wrap="square" lIns="0" rIns="0" tIns="0" bIns="0" anchor="t">
+            <a:spAutoFit/>
+          </a:bodyPr>
+          <a:lstStyle/>
+          <a:p>
+            <a:pPr algn="l"/>
+            <a:r>
+              <a:rPr sz="1800" b="0" i="0">
                 <a:solidFill>
                   <a:srgbClr val="FF8449"/>
                 </a:solidFill>
@@ -9273,23 +10144,23 @@
         </p:nvSpPr>
         <p:spPr>
           <a:xfrm>
-            <a:off x="7863840" y="3950208"/>
-            <a:ext cx="4023360" cy="274320"/>
-          </a:xfrm>
-          <a:prstGeom prst="rect">
-            <a:avLst/>
-          </a:prstGeom>
-          <a:noFill/>
-        </p:spPr>
-        <p:txBody>
-          <a:bodyPr wrap="square" lIns="0" rIns="0" tIns="0" bIns="0" anchor="t">
-            <a:spAutoFit/>
-          </a:bodyPr>
-          <a:lstStyle/>
-          <a:p>
-            <a:pPr algn="l"/>
-            <a:r>
-              <a:rPr sz="825" b="0" i="0" spc="80">
+            <a:off x="7680960" y="3584448"/>
+            <a:ext cx="4206240" cy="274320"/>
+          </a:xfrm>
+          <a:prstGeom prst="rect">
+            <a:avLst/>
+          </a:prstGeom>
+          <a:noFill/>
+        </p:spPr>
+        <p:txBody>
+          <a:bodyPr wrap="square" lIns="0" rIns="0" tIns="0" bIns="0" anchor="t">
+            <a:spAutoFit/>
+          </a:bodyPr>
+          <a:lstStyle/>
+          <a:p>
+            <a:pPr algn="l"/>
+            <a:r>
+              <a:rPr sz="800" b="0" i="0" spc="80">
                 <a:solidFill>
                   <a:srgbClr val="FF8449"/>
                 </a:solidFill>
@@ -9308,29 +10179,29 @@
         </p:nvSpPr>
         <p:spPr>
           <a:xfrm>
-            <a:off x="6949440" y="4526280"/>
-            <a:ext cx="4846320" cy="502920"/>
-          </a:xfrm>
-          <a:prstGeom prst="rect">
-            <a:avLst/>
-          </a:prstGeom>
-          <a:noFill/>
-        </p:spPr>
-        <p:txBody>
-          <a:bodyPr wrap="square" lIns="0" rIns="0" tIns="0" bIns="0" anchor="t">
-            <a:spAutoFit/>
-          </a:bodyPr>
-          <a:lstStyle/>
-          <a:p>
-            <a:pPr algn="l"/>
-            <a:r>
-              <a:rPr sz="1600" b="0" i="0">
+            <a:off x="6949440" y="3977639"/>
+            <a:ext cx="4846320" cy="365760"/>
+          </a:xfrm>
+          <a:prstGeom prst="rect">
+            <a:avLst/>
+          </a:prstGeom>
+          <a:noFill/>
+        </p:spPr>
+        <p:txBody>
+          <a:bodyPr wrap="square" lIns="0" rIns="0" tIns="0" bIns="0" anchor="t">
+            <a:spAutoFit/>
+          </a:bodyPr>
+          <a:lstStyle/>
+          <a:p>
+            <a:pPr algn="l"/>
+            <a:r>
+              <a:rPr sz="1400" b="0" i="0">
                 <a:solidFill>
                   <a:srgbClr val="000000"/>
                 </a:solidFill>
                 <a:latin typeface="Georgia"/>
               </a:rPr>
-              <a:t>Perímetro exato do que já existe</a:t>
+              <a:t>Perímetro do que já existe</a:t>
             </a:r>
           </a:p>
         </p:txBody>
@@ -9343,29 +10214,29 @@
         </p:nvSpPr>
         <p:spPr>
           <a:xfrm>
-            <a:off x="6949440" y="5120640"/>
-            <a:ext cx="4846320" cy="1188720"/>
-          </a:xfrm>
-          <a:prstGeom prst="rect">
-            <a:avLst/>
-          </a:prstGeom>
-          <a:noFill/>
-        </p:spPr>
-        <p:txBody>
-          <a:bodyPr wrap="square" lIns="0" rIns="0" tIns="0" bIns="0" anchor="t">
-            <a:spAutoFit/>
-          </a:bodyPr>
-          <a:lstStyle/>
-          <a:p>
-            <a:pPr algn="l"/>
-            <a:r>
-              <a:rPr sz="1050" b="0" i="0">
+            <a:off x="6949440" y="4389120"/>
+            <a:ext cx="4846320" cy="777239"/>
+          </a:xfrm>
+          <a:prstGeom prst="rect">
+            <a:avLst/>
+          </a:prstGeom>
+          <a:noFill/>
+        </p:spPr>
+        <p:txBody>
+          <a:bodyPr wrap="square" lIns="0" rIns="0" tIns="0" bIns="0" anchor="t">
+            <a:spAutoFit/>
+          </a:bodyPr>
+          <a:lstStyle/>
+          <a:p>
+            <a:pPr algn="l"/>
+            <a:r>
+              <a:rPr sz="1000" b="0" i="0">
                 <a:solidFill>
                   <a:srgbClr val="4B5563"/>
                 </a:solidFill>
                 <a:latin typeface="Calibri"/>
               </a:rPr>
-              <a:t>Que mensagens vão hoje automaticamente, em que canal, com que disparador. Para não pisar o que funciona.</a:t>
+              <a:t>Que mensagens vão hoje automaticamente. Para não pisar o que funciona.</a:t>
             </a:r>
           </a:p>
         </p:txBody>
@@ -9378,8 +10249,8 @@
         </p:nvSpPr>
         <p:spPr>
           <a:xfrm>
-            <a:off x="12435840" y="3657600"/>
-            <a:ext cx="5394960" cy="2834640"/>
+            <a:off x="12435840" y="3337560"/>
+            <a:ext cx="5394960" cy="1965960"/>
           </a:xfrm>
           <a:prstGeom prst="roundRect">
             <a:avLst>
@@ -9424,23 +10295,23 @@
         </p:nvSpPr>
         <p:spPr>
           <a:xfrm>
-            <a:off x="12710160" y="3886200"/>
-            <a:ext cx="914400" cy="411480"/>
-          </a:xfrm>
-          <a:prstGeom prst="rect">
-            <a:avLst/>
-          </a:prstGeom>
-          <a:noFill/>
-        </p:spPr>
-        <p:txBody>
-          <a:bodyPr wrap="square" lIns="0" rIns="0" tIns="0" bIns="0" anchor="t">
-            <a:spAutoFit/>
-          </a:bodyPr>
-          <a:lstStyle/>
-          <a:p>
-            <a:pPr algn="l"/>
-            <a:r>
-              <a:rPr sz="2200" b="0" i="0">
+            <a:off x="12710160" y="3520440"/>
+            <a:ext cx="777240" cy="365760"/>
+          </a:xfrm>
+          <a:prstGeom prst="rect">
+            <a:avLst/>
+          </a:prstGeom>
+          <a:noFill/>
+        </p:spPr>
+        <p:txBody>
+          <a:bodyPr wrap="square" lIns="0" rIns="0" tIns="0" bIns="0" anchor="t">
+            <a:spAutoFit/>
+          </a:bodyPr>
+          <a:lstStyle/>
+          <a:p>
+            <a:pPr algn="l"/>
+            <a:r>
+              <a:rPr sz="1800" b="0" i="0">
                 <a:solidFill>
                   <a:srgbClr val="FF8449"/>
                 </a:solidFill>
@@ -9459,23 +10330,23 @@
         </p:nvSpPr>
         <p:spPr>
           <a:xfrm>
-            <a:off x="13624560" y="3950208"/>
-            <a:ext cx="4023360" cy="274320"/>
-          </a:xfrm>
-          <a:prstGeom prst="rect">
-            <a:avLst/>
-          </a:prstGeom>
-          <a:noFill/>
-        </p:spPr>
-        <p:txBody>
-          <a:bodyPr wrap="square" lIns="0" rIns="0" tIns="0" bIns="0" anchor="t">
-            <a:spAutoFit/>
-          </a:bodyPr>
-          <a:lstStyle/>
-          <a:p>
-            <a:pPr algn="l"/>
-            <a:r>
-              <a:rPr sz="825" b="0" i="0" spc="80">
+            <a:off x="13441680" y="3584448"/>
+            <a:ext cx="4206240" cy="274320"/>
+          </a:xfrm>
+          <a:prstGeom prst="rect">
+            <a:avLst/>
+          </a:prstGeom>
+          <a:noFill/>
+        </p:spPr>
+        <p:txBody>
+          <a:bodyPr wrap="square" lIns="0" rIns="0" tIns="0" bIns="0" anchor="t">
+            <a:spAutoFit/>
+          </a:bodyPr>
+          <a:lstStyle/>
+          <a:p>
+            <a:pPr algn="l"/>
+            <a:r>
+              <a:rPr sz="800" b="0" i="0" spc="80">
                 <a:solidFill>
                   <a:srgbClr val="FF8449"/>
                 </a:solidFill>
@@ -9494,23 +10365,23 @@
         </p:nvSpPr>
         <p:spPr>
           <a:xfrm>
-            <a:off x="12710160" y="4526280"/>
-            <a:ext cx="4846320" cy="502920"/>
-          </a:xfrm>
-          <a:prstGeom prst="rect">
-            <a:avLst/>
-          </a:prstGeom>
-          <a:noFill/>
-        </p:spPr>
-        <p:txBody>
-          <a:bodyPr wrap="square" lIns="0" rIns="0" tIns="0" bIns="0" anchor="t">
-            <a:spAutoFit/>
-          </a:bodyPr>
-          <a:lstStyle/>
-          <a:p>
-            <a:pPr algn="l"/>
-            <a:r>
-              <a:rPr sz="1600" b="0" i="0">
+            <a:off x="12710160" y="3977639"/>
+            <a:ext cx="4846320" cy="365760"/>
+          </a:xfrm>
+          <a:prstGeom prst="rect">
+            <a:avLst/>
+          </a:prstGeom>
+          <a:noFill/>
+        </p:spPr>
+        <p:txBody>
+          <a:bodyPr wrap="square" lIns="0" rIns="0" tIns="0" bIns="0" anchor="t">
+            <a:spAutoFit/>
+          </a:bodyPr>
+          <a:lstStyle/>
+          <a:p>
+            <a:pPr algn="l"/>
+            <a:r>
+              <a:rPr sz="1400" b="0" i="0">
                 <a:solidFill>
                   <a:srgbClr val="000000"/>
                 </a:solidFill>
@@ -9529,29 +10400,29 @@
         </p:nvSpPr>
         <p:spPr>
           <a:xfrm>
-            <a:off x="12710160" y="5120640"/>
-            <a:ext cx="4846320" cy="1188720"/>
-          </a:xfrm>
-          <a:prstGeom prst="rect">
-            <a:avLst/>
-          </a:prstGeom>
-          <a:noFill/>
-        </p:spPr>
-        <p:txBody>
-          <a:bodyPr wrap="square" lIns="0" rIns="0" tIns="0" bIns="0" anchor="t">
-            <a:spAutoFit/>
-          </a:bodyPr>
-          <a:lstStyle/>
-          <a:p>
-            <a:pPr algn="l"/>
-            <a:r>
-              <a:rPr sz="1050" b="0" i="0">
+            <a:off x="12710160" y="4389120"/>
+            <a:ext cx="4846320" cy="777239"/>
+          </a:xfrm>
+          <a:prstGeom prst="rect">
+            <a:avLst/>
+          </a:prstGeom>
+          <a:noFill/>
+        </p:spPr>
+        <p:txBody>
+          <a:bodyPr wrap="square" lIns="0" rIns="0" tIns="0" bIns="0" anchor="t">
+            <a:spAutoFit/>
+          </a:bodyPr>
+          <a:lstStyle/>
+          <a:p>
+            <a:pPr algn="l"/>
+            <a:r>
+              <a:rPr sz="1000" b="0" i="0">
                 <a:solidFill>
                   <a:srgbClr val="4B5563"/>
                 </a:solidFill>
                 <a:latin typeface="Calibri"/>
               </a:rPr>
-              <a:t>Nomes, número de sessões, intervalos recomendados. Base da Prioridade 3.</a:t>
+              <a:t>Nomes, número de sessões, intervalos. Base da Prioridade 3.</a:t>
             </a:r>
           </a:p>
         </p:txBody>
@@ -9564,8 +10435,8 @@
         </p:nvSpPr>
         <p:spPr>
           <a:xfrm>
-            <a:off x="914400" y="6858000"/>
-            <a:ext cx="5394960" cy="2834640"/>
+            <a:off x="914400" y="5532120"/>
+            <a:ext cx="5394960" cy="1965960"/>
           </a:xfrm>
           <a:prstGeom prst="roundRect">
             <a:avLst>
@@ -9610,23 +10481,23 @@
         </p:nvSpPr>
         <p:spPr>
           <a:xfrm>
-            <a:off x="1188720" y="7086600"/>
-            <a:ext cx="914400" cy="411480"/>
-          </a:xfrm>
-          <a:prstGeom prst="rect">
-            <a:avLst/>
-          </a:prstGeom>
-          <a:noFill/>
-        </p:spPr>
-        <p:txBody>
-          <a:bodyPr wrap="square" lIns="0" rIns="0" tIns="0" bIns="0" anchor="t">
-            <a:spAutoFit/>
-          </a:bodyPr>
-          <a:lstStyle/>
-          <a:p>
-            <a:pPr algn="l"/>
-            <a:r>
-              <a:rPr sz="2200" b="0" i="0">
+            <a:off x="1188720" y="5715000"/>
+            <a:ext cx="777240" cy="365760"/>
+          </a:xfrm>
+          <a:prstGeom prst="rect">
+            <a:avLst/>
+          </a:prstGeom>
+          <a:noFill/>
+        </p:spPr>
+        <p:txBody>
+          <a:bodyPr wrap="square" lIns="0" rIns="0" tIns="0" bIns="0" anchor="t">
+            <a:spAutoFit/>
+          </a:bodyPr>
+          <a:lstStyle/>
+          <a:p>
+            <a:pPr algn="l"/>
+            <a:r>
+              <a:rPr sz="1800" b="0" i="0">
                 <a:solidFill>
                   <a:srgbClr val="FF8449"/>
                 </a:solidFill>
@@ -9645,23 +10516,23 @@
         </p:nvSpPr>
         <p:spPr>
           <a:xfrm>
-            <a:off x="2103120" y="7150608"/>
-            <a:ext cx="4023360" cy="274320"/>
-          </a:xfrm>
-          <a:prstGeom prst="rect">
-            <a:avLst/>
-          </a:prstGeom>
-          <a:noFill/>
-        </p:spPr>
-        <p:txBody>
-          <a:bodyPr wrap="square" lIns="0" rIns="0" tIns="0" bIns="0" anchor="t">
-            <a:spAutoFit/>
-          </a:bodyPr>
-          <a:lstStyle/>
-          <a:p>
-            <a:pPr algn="l"/>
-            <a:r>
-              <a:rPr sz="825" b="0" i="0" spc="80">
+            <a:off x="1920240" y="5779008"/>
+            <a:ext cx="4206240" cy="274320"/>
+          </a:xfrm>
+          <a:prstGeom prst="rect">
+            <a:avLst/>
+          </a:prstGeom>
+          <a:noFill/>
+        </p:spPr>
+        <p:txBody>
+          <a:bodyPr wrap="square" lIns="0" rIns="0" tIns="0" bIns="0" anchor="t">
+            <a:spAutoFit/>
+          </a:bodyPr>
+          <a:lstStyle/>
+          <a:p>
+            <a:pPr algn="l"/>
+            <a:r>
+              <a:rPr sz="800" b="0" i="0" spc="80">
                 <a:solidFill>
                   <a:srgbClr val="FF8449"/>
                 </a:solidFill>
@@ -9680,23 +10551,23 @@
         </p:nvSpPr>
         <p:spPr>
           <a:xfrm>
-            <a:off x="1188720" y="7726679"/>
-            <a:ext cx="4846320" cy="502920"/>
-          </a:xfrm>
-          <a:prstGeom prst="rect">
-            <a:avLst/>
-          </a:prstGeom>
-          <a:noFill/>
-        </p:spPr>
-        <p:txBody>
-          <a:bodyPr wrap="square" lIns="0" rIns="0" tIns="0" bIns="0" anchor="t">
-            <a:spAutoFit/>
-          </a:bodyPr>
-          <a:lstStyle/>
-          <a:p>
-            <a:pPr algn="l"/>
-            <a:r>
-              <a:rPr sz="1600" b="0" i="0">
+            <a:off x="1188720" y="6172200"/>
+            <a:ext cx="4846320" cy="365760"/>
+          </a:xfrm>
+          <a:prstGeom prst="rect">
+            <a:avLst/>
+          </a:prstGeom>
+          <a:noFill/>
+        </p:spPr>
+        <p:txBody>
+          <a:bodyPr wrap="square" lIns="0" rIns="0" tIns="0" bIns="0" anchor="t">
+            <a:spAutoFit/>
+          </a:bodyPr>
+          <a:lstStyle/>
+          <a:p>
+            <a:pPr algn="l"/>
+            <a:r>
+              <a:rPr sz="1400" b="0" i="0">
                 <a:solidFill>
                   <a:srgbClr val="000000"/>
                 </a:solidFill>
@@ -9715,29 +10586,29 @@
         </p:nvSpPr>
         <p:spPr>
           <a:xfrm>
-            <a:off x="1188720" y="8321040"/>
-            <a:ext cx="4846320" cy="1188720"/>
-          </a:xfrm>
-          <a:prstGeom prst="rect">
-            <a:avLst/>
-          </a:prstGeom>
-          <a:noFill/>
-        </p:spPr>
-        <p:txBody>
-          <a:bodyPr wrap="square" lIns="0" rIns="0" tIns="0" bIns="0" anchor="t">
-            <a:spAutoFit/>
-          </a:bodyPr>
-          <a:lstStyle/>
-          <a:p>
-            <a:pPr algn="l"/>
-            <a:r>
-              <a:rPr sz="1050" b="0" i="0">
+            <a:off x="1188720" y="6583679"/>
+            <a:ext cx="4846320" cy="777239"/>
+          </a:xfrm>
+          <a:prstGeom prst="rect">
+            <a:avLst/>
+          </a:prstGeom>
+          <a:noFill/>
+        </p:spPr>
+        <p:txBody>
+          <a:bodyPr wrap="square" lIns="0" rIns="0" tIns="0" bIns="0" anchor="t">
+            <a:spAutoFit/>
+          </a:bodyPr>
+          <a:lstStyle/>
+          <a:p>
+            <a:pPr algn="l"/>
+            <a:r>
+              <a:rPr sz="1000" b="0" i="0">
                 <a:solidFill>
                   <a:srgbClr val="4B5563"/>
                 </a:solidFill>
                 <a:latin typeface="Calibri"/>
               </a:rPr>
-              <a:t>O que a clínica captura hoje para comunicação automática; ajustes para mensagens com IA.</a:t>
+              <a:t>O que a clínica captura hoje para comunicação automática; ajustes para IA.</a:t>
             </a:r>
           </a:p>
         </p:txBody>
@@ -9750,8 +10621,8 @@
         </p:nvSpPr>
         <p:spPr>
           <a:xfrm>
-            <a:off x="6675120" y="6858000"/>
-            <a:ext cx="5394960" cy="2834640"/>
+            <a:off x="6675120" y="5532120"/>
+            <a:ext cx="5394960" cy="1965960"/>
           </a:xfrm>
           <a:prstGeom prst="roundRect">
             <a:avLst>
@@ -9796,23 +10667,23 @@
         </p:nvSpPr>
         <p:spPr>
           <a:xfrm>
-            <a:off x="6949440" y="7086600"/>
-            <a:ext cx="914400" cy="411480"/>
-          </a:xfrm>
-          <a:prstGeom prst="rect">
-            <a:avLst/>
-          </a:prstGeom>
-          <a:noFill/>
-        </p:spPr>
-        <p:txBody>
-          <a:bodyPr wrap="square" lIns="0" rIns="0" tIns="0" bIns="0" anchor="t">
-            <a:spAutoFit/>
-          </a:bodyPr>
-          <a:lstStyle/>
-          <a:p>
-            <a:pPr algn="l"/>
-            <a:r>
-              <a:rPr sz="2200" b="0" i="0">
+            <a:off x="6949440" y="5715000"/>
+            <a:ext cx="777240" cy="365760"/>
+          </a:xfrm>
+          <a:prstGeom prst="rect">
+            <a:avLst/>
+          </a:prstGeom>
+          <a:noFill/>
+        </p:spPr>
+        <p:txBody>
+          <a:bodyPr wrap="square" lIns="0" rIns="0" tIns="0" bIns="0" anchor="t">
+            <a:spAutoFit/>
+          </a:bodyPr>
+          <a:lstStyle/>
+          <a:p>
+            <a:pPr algn="l"/>
+            <a:r>
+              <a:rPr sz="1800" b="0" i="0">
                 <a:solidFill>
                   <a:srgbClr val="FF8449"/>
                 </a:solidFill>
@@ -9831,29 +10702,29 @@
         </p:nvSpPr>
         <p:spPr>
           <a:xfrm>
-            <a:off x="7863840" y="7150608"/>
-            <a:ext cx="4023360" cy="274320"/>
-          </a:xfrm>
-          <a:prstGeom prst="rect">
-            <a:avLst/>
-          </a:prstGeom>
-          <a:noFill/>
-        </p:spPr>
-        <p:txBody>
-          <a:bodyPr wrap="square" lIns="0" rIns="0" tIns="0" bIns="0" anchor="t">
-            <a:spAutoFit/>
-          </a:bodyPr>
-          <a:lstStyle/>
-          <a:p>
-            <a:pPr algn="l"/>
-            <a:r>
-              <a:rPr sz="825" b="0" i="0" spc="80">
+            <a:off x="7680960" y="5779008"/>
+            <a:ext cx="4206240" cy="274320"/>
+          </a:xfrm>
+          <a:prstGeom prst="rect">
+            <a:avLst/>
+          </a:prstGeom>
+          <a:noFill/>
+        </p:spPr>
+        <p:txBody>
+          <a:bodyPr wrap="square" lIns="0" rIns="0" tIns="0" bIns="0" anchor="t">
+            <a:spAutoFit/>
+          </a:bodyPr>
+          <a:lstStyle/>
+          <a:p>
+            <a:pPr algn="l"/>
+            <a:r>
+              <a:rPr sz="800" b="0" i="0" spc="80">
                 <a:solidFill>
                   <a:srgbClr val="FF8449"/>
                 </a:solidFill>
                 <a:latin typeface="Calibri"/>
               </a:rPr>
-              <a:t>VOZ</a:t>
+              <a:t>MARCA</a:t>
             </a:r>
           </a:p>
         </p:txBody>
@@ -9866,29 +10737,29 @@
         </p:nvSpPr>
         <p:spPr>
           <a:xfrm>
-            <a:off x="6949440" y="7726679"/>
-            <a:ext cx="4846320" cy="502920"/>
-          </a:xfrm>
-          <a:prstGeom prst="rect">
-            <a:avLst/>
-          </a:prstGeom>
-          <a:noFill/>
-        </p:spPr>
-        <p:txBody>
-          <a:bodyPr wrap="square" lIns="0" rIns="0" tIns="0" bIns="0" anchor="t">
-            <a:spAutoFit/>
-          </a:bodyPr>
-          <a:lstStyle/>
-          <a:p>
-            <a:pPr algn="l"/>
-            <a:r>
-              <a:rPr sz="1600" b="0" i="0">
+            <a:off x="6949440" y="6172200"/>
+            <a:ext cx="4846320" cy="365760"/>
+          </a:xfrm>
+          <a:prstGeom prst="rect">
+            <a:avLst/>
+          </a:prstGeom>
+          <a:noFill/>
+        </p:spPr>
+        <p:txBody>
+          <a:bodyPr wrap="square" lIns="0" rIns="0" tIns="0" bIns="0" anchor="t">
+            <a:spAutoFit/>
+          </a:bodyPr>
+          <a:lstStyle/>
+          <a:p>
+            <a:pPr algn="l"/>
+            <a:r>
+              <a:rPr sz="1400" b="0" i="0">
                 <a:solidFill>
                   <a:srgbClr val="000000"/>
                 </a:solidFill>
                 <a:latin typeface="Georgia"/>
               </a:rPr>
-              <a:t>Voz da clínica</a:t>
+              <a:t>Voz + identidade visual</a:t>
             </a:r>
           </a:p>
         </p:txBody>
@@ -9901,29 +10772,29 @@
         </p:nvSpPr>
         <p:spPr>
           <a:xfrm>
-            <a:off x="6949440" y="8321040"/>
-            <a:ext cx="4846320" cy="1188720"/>
-          </a:xfrm>
-          <a:prstGeom prst="rect">
-            <a:avLst/>
-          </a:prstGeom>
-          <a:noFill/>
-        </p:spPr>
-        <p:txBody>
-          <a:bodyPr wrap="square" lIns="0" rIns="0" tIns="0" bIns="0" anchor="t">
-            <a:spAutoFit/>
-          </a:bodyPr>
-          <a:lstStyle/>
-          <a:p>
-            <a:pPr algn="l"/>
-            <a:r>
-              <a:rPr sz="1050" b="0" i="0">
+            <a:off x="6949440" y="6583679"/>
+            <a:ext cx="4846320" cy="777239"/>
+          </a:xfrm>
+          <a:prstGeom prst="rect">
+            <a:avLst/>
+          </a:prstGeom>
+          <a:noFill/>
+        </p:spPr>
+        <p:txBody>
+          <a:bodyPr wrap="square" lIns="0" rIns="0" tIns="0" bIns="0" anchor="t">
+            <a:spAutoFit/>
+          </a:bodyPr>
+          <a:lstStyle/>
+          <a:p>
+            <a:pPr algn="l"/>
+            <a:r>
+              <a:rPr sz="1000" b="0" i="0">
                 <a:solidFill>
                   <a:srgbClr val="4B5563"/>
                 </a:solidFill>
                 <a:latin typeface="Calibri"/>
               </a:rPr>
-              <a:t>Existe documento? Se não, derivamos das mensagens já enviadas durante a Fase 2 (Build).</a:t>
+              <a:t>Existe brand kit (logo, cores, fotos, tom)? Necessário para P5, P6, P7 e P8.</a:t>
             </a:r>
           </a:p>
         </p:txBody>
@@ -9936,8 +10807,8 @@
         </p:nvSpPr>
         <p:spPr>
           <a:xfrm>
-            <a:off x="12435840" y="6858000"/>
-            <a:ext cx="5394960" cy="2834640"/>
+            <a:off x="12435840" y="5532120"/>
+            <a:ext cx="5394960" cy="1965960"/>
           </a:xfrm>
           <a:prstGeom prst="roundRect">
             <a:avLst>
@@ -9982,23 +10853,23 @@
         </p:nvSpPr>
         <p:spPr>
           <a:xfrm>
-            <a:off x="12710160" y="7086600"/>
-            <a:ext cx="914400" cy="411480"/>
-          </a:xfrm>
-          <a:prstGeom prst="rect">
-            <a:avLst/>
-          </a:prstGeom>
-          <a:noFill/>
-        </p:spPr>
-        <p:txBody>
-          <a:bodyPr wrap="square" lIns="0" rIns="0" tIns="0" bIns="0" anchor="t">
-            <a:spAutoFit/>
-          </a:bodyPr>
-          <a:lstStyle/>
-          <a:p>
-            <a:pPr algn="l"/>
-            <a:r>
-              <a:rPr sz="2200" b="0" i="0">
+            <a:off x="12710160" y="5715000"/>
+            <a:ext cx="777240" cy="365760"/>
+          </a:xfrm>
+          <a:prstGeom prst="rect">
+            <a:avLst/>
+          </a:prstGeom>
+          <a:noFill/>
+        </p:spPr>
+        <p:txBody>
+          <a:bodyPr wrap="square" lIns="0" rIns="0" tIns="0" bIns="0" anchor="t">
+            <a:spAutoFit/>
+          </a:bodyPr>
+          <a:lstStyle/>
+          <a:p>
+            <a:pPr algn="l"/>
+            <a:r>
+              <a:rPr sz="1800" b="0" i="0">
                 <a:solidFill>
                   <a:srgbClr val="FF8449"/>
                 </a:solidFill>
@@ -10017,28 +10888,400 @@
         </p:nvSpPr>
         <p:spPr>
           <a:xfrm>
-            <a:off x="13624560" y="7150608"/>
-            <a:ext cx="4023360" cy="274320"/>
-          </a:xfrm>
-          <a:prstGeom prst="rect">
-            <a:avLst/>
-          </a:prstGeom>
-          <a:noFill/>
-        </p:spPr>
-        <p:txBody>
-          <a:bodyPr wrap="square" lIns="0" rIns="0" tIns="0" bIns="0" anchor="t">
-            <a:spAutoFit/>
-          </a:bodyPr>
-          <a:lstStyle/>
-          <a:p>
-            <a:pPr algn="l"/>
-            <a:r>
-              <a:rPr sz="825" b="0" i="0" spc="80">
+            <a:off x="13441680" y="5779008"/>
+            <a:ext cx="4206240" cy="274320"/>
+          </a:xfrm>
+          <a:prstGeom prst="rect">
+            <a:avLst/>
+          </a:prstGeom>
+          <a:noFill/>
+        </p:spPr>
+        <p:txBody>
+          <a:bodyPr wrap="square" lIns="0" rIns="0" tIns="0" bIns="0" anchor="t">
+            <a:spAutoFit/>
+          </a:bodyPr>
+          <a:lstStyle/>
+          <a:p>
+            <a:pPr algn="l"/>
+            <a:r>
+              <a:rPr sz="800" b="0" i="0" spc="80">
                 <a:solidFill>
                   <a:srgbClr val="FF8449"/>
                 </a:solidFill>
                 <a:latin typeface="Calibri"/>
               </a:rPr>
+              <a:t>WEBSITE</a:t>
+            </a:r>
+          </a:p>
+        </p:txBody>
+      </p:sp>
+      <p:sp>
+        <p:nvSpPr>
+          <p:cNvPr id="33" name="TextBox 32"/>
+          <p:cNvSpPr txBox="1"/>
+          <p:nvPr/>
+        </p:nvSpPr>
+        <p:spPr>
+          <a:xfrm>
+            <a:off x="12710160" y="6172200"/>
+            <a:ext cx="4846320" cy="365760"/>
+          </a:xfrm>
+          <a:prstGeom prst="rect">
+            <a:avLst/>
+          </a:prstGeom>
+          <a:noFill/>
+        </p:spPr>
+        <p:txBody>
+          <a:bodyPr wrap="square" lIns="0" rIns="0" tIns="0" bIns="0" anchor="t">
+            <a:spAutoFit/>
+          </a:bodyPr>
+          <a:lstStyle/>
+          <a:p>
+            <a:pPr algn="l"/>
+            <a:r>
+              <a:rPr sz="1400" b="0" i="0">
+                <a:solidFill>
+                  <a:srgbClr val="000000"/>
+                </a:solidFill>
+                <a:latin typeface="Georgia"/>
+              </a:rPr>
+              <a:t>Domínio e hosting</a:t>
+            </a:r>
+          </a:p>
+        </p:txBody>
+      </p:sp>
+      <p:sp>
+        <p:nvSpPr>
+          <p:cNvPr id="34" name="TextBox 33"/>
+          <p:cNvSpPr txBox="1"/>
+          <p:nvPr/>
+        </p:nvSpPr>
+        <p:spPr>
+          <a:xfrm>
+            <a:off x="12710160" y="6583679"/>
+            <a:ext cx="4846320" cy="777239"/>
+          </a:xfrm>
+          <a:prstGeom prst="rect">
+            <a:avLst/>
+          </a:prstGeom>
+          <a:noFill/>
+        </p:spPr>
+        <p:txBody>
+          <a:bodyPr wrap="square" lIns="0" rIns="0" tIns="0" bIns="0" anchor="t">
+            <a:spAutoFit/>
+          </a:bodyPr>
+          <a:lstStyle/>
+          <a:p>
+            <a:pPr algn="l"/>
+            <a:r>
+              <a:rPr sz="1000" b="0" i="0">
+                <a:solidFill>
+                  <a:srgbClr val="4B5563"/>
+                </a:solidFill>
+                <a:latin typeface="Calibri"/>
+              </a:rPr>
+              <a:t>Domínio atual, hosting, CMS preferido. Decisão de stack para o site novo da Prioridade 8.</a:t>
+            </a:r>
+          </a:p>
+        </p:txBody>
+      </p:sp>
+      <p:sp>
+        <p:nvSpPr>
+          <p:cNvPr id="35" name="Rounded Rectangle 34"/>
+          <p:cNvSpPr/>
+          <p:nvPr/>
+        </p:nvSpPr>
+        <p:spPr>
+          <a:xfrm>
+            <a:off x="914400" y="7726679"/>
+            <a:ext cx="5394960" cy="1965960"/>
+          </a:xfrm>
+          <a:prstGeom prst="roundRect">
+            <a:avLst>
+              <a:gd name="adj" fmla="val 4000"/>
+            </a:avLst>
+          </a:prstGeom>
+          <a:solidFill>
+            <a:srgbClr val="FFFFFF"/>
+          </a:solidFill>
+          <a:ln>
+            <a:noFill/>
+          </a:ln>
+          <a:effectLst/>
+        </p:spPr>
+        <p:style>
+          <a:lnRef idx="1">
+            <a:schemeClr val="accent1"/>
+          </a:lnRef>
+          <a:fillRef idx="3">
+            <a:schemeClr val="accent1"/>
+          </a:fillRef>
+          <a:effectRef idx="2">
+            <a:schemeClr val="accent1"/>
+          </a:effectRef>
+          <a:fontRef idx="minor">
+            <a:schemeClr val="lt1"/>
+          </a:fontRef>
+        </p:style>
+        <p:txBody>
+          <a:bodyPr rtlCol="0" anchor="ctr"/>
+          <a:lstStyle/>
+          <a:p>
+            <a:pPr algn="ctr"/>
+          </a:p>
+        </p:txBody>
+      </p:sp>
+      <p:sp>
+        <p:nvSpPr>
+          <p:cNvPr id="36" name="TextBox 35"/>
+          <p:cNvSpPr txBox="1"/>
+          <p:nvPr/>
+        </p:nvSpPr>
+        <p:spPr>
+          <a:xfrm>
+            <a:off x="1188720" y="7909559"/>
+            <a:ext cx="777240" cy="365760"/>
+          </a:xfrm>
+          <a:prstGeom prst="rect">
+            <a:avLst/>
+          </a:prstGeom>
+          <a:noFill/>
+        </p:spPr>
+        <p:txBody>
+          <a:bodyPr wrap="square" lIns="0" rIns="0" tIns="0" bIns="0" anchor="t">
+            <a:spAutoFit/>
+          </a:bodyPr>
+          <a:lstStyle/>
+          <a:p>
+            <a:pPr algn="l"/>
+            <a:r>
+              <a:rPr sz="1800" b="0" i="0">
+                <a:solidFill>
+                  <a:srgbClr val="FF8449"/>
+                </a:solidFill>
+                <a:latin typeface="Georgia"/>
+              </a:rPr>
+              <a:t>07</a:t>
+            </a:r>
+          </a:p>
+        </p:txBody>
+      </p:sp>
+      <p:sp>
+        <p:nvSpPr>
+          <p:cNvPr id="37" name="TextBox 36"/>
+          <p:cNvSpPr txBox="1"/>
+          <p:nvPr/>
+        </p:nvSpPr>
+        <p:spPr>
+          <a:xfrm>
+            <a:off x="1920240" y="7973567"/>
+            <a:ext cx="4206240" cy="274320"/>
+          </a:xfrm>
+          <a:prstGeom prst="rect">
+            <a:avLst/>
+          </a:prstGeom>
+          <a:noFill/>
+        </p:spPr>
+        <p:txBody>
+          <a:bodyPr wrap="square" lIns="0" rIns="0" tIns="0" bIns="0" anchor="t">
+            <a:spAutoFit/>
+          </a:bodyPr>
+          <a:lstStyle/>
+          <a:p>
+            <a:pPr algn="l"/>
+            <a:r>
+              <a:rPr sz="800" b="0" i="0" spc="80">
+                <a:solidFill>
+                  <a:srgbClr val="FF8449"/>
+                </a:solidFill>
+                <a:latin typeface="Calibri"/>
+              </a:rPr>
+              <a:t>ORÇAMENTO ADS</a:t>
+            </a:r>
+          </a:p>
+        </p:txBody>
+      </p:sp>
+      <p:sp>
+        <p:nvSpPr>
+          <p:cNvPr id="38" name="TextBox 37"/>
+          <p:cNvSpPr txBox="1"/>
+          <p:nvPr/>
+        </p:nvSpPr>
+        <p:spPr>
+          <a:xfrm>
+            <a:off x="1188720" y="8366759"/>
+            <a:ext cx="4846320" cy="365760"/>
+          </a:xfrm>
+          <a:prstGeom prst="rect">
+            <a:avLst/>
+          </a:prstGeom>
+          <a:noFill/>
+        </p:spPr>
+        <p:txBody>
+          <a:bodyPr wrap="square" lIns="0" rIns="0" tIns="0" bIns="0" anchor="t">
+            <a:spAutoFit/>
+          </a:bodyPr>
+          <a:lstStyle/>
+          <a:p>
+            <a:pPr algn="l"/>
+            <a:r>
+              <a:rPr sz="1400" b="0" i="0">
+                <a:solidFill>
+                  <a:srgbClr val="000000"/>
+                </a:solidFill>
+                <a:latin typeface="Georgia"/>
+              </a:rPr>
+              <a:t>Verba mensal Google + Meta</a:t>
+            </a:r>
+          </a:p>
+        </p:txBody>
+      </p:sp>
+      <p:sp>
+        <p:nvSpPr>
+          <p:cNvPr id="39" name="TextBox 38"/>
+          <p:cNvSpPr txBox="1"/>
+          <p:nvPr/>
+        </p:nvSpPr>
+        <p:spPr>
+          <a:xfrm>
+            <a:off x="1188720" y="8778240"/>
+            <a:ext cx="4846320" cy="777239"/>
+          </a:xfrm>
+          <a:prstGeom prst="rect">
+            <a:avLst/>
+          </a:prstGeom>
+          <a:noFill/>
+        </p:spPr>
+        <p:txBody>
+          <a:bodyPr wrap="square" lIns="0" rIns="0" tIns="0" bIns="0" anchor="t">
+            <a:spAutoFit/>
+          </a:bodyPr>
+          <a:lstStyle/>
+          <a:p>
+            <a:pPr algn="l"/>
+            <a:r>
+              <a:rPr sz="1000" b="0" i="0">
+                <a:solidFill>
+                  <a:srgbClr val="4B5563"/>
+                </a:solidFill>
+                <a:latin typeface="Calibri"/>
+              </a:rPr>
+              <a:t>Verba inicial por canal. Define escala dos testes em P6 e P7 e baseline de tuning automático.</a:t>
+            </a:r>
+          </a:p>
+        </p:txBody>
+      </p:sp>
+      <p:sp>
+        <p:nvSpPr>
+          <p:cNvPr id="40" name="Rounded Rectangle 39"/>
+          <p:cNvSpPr/>
+          <p:nvPr/>
+        </p:nvSpPr>
+        <p:spPr>
+          <a:xfrm>
+            <a:off x="6675120" y="7726679"/>
+            <a:ext cx="5394960" cy="1965960"/>
+          </a:xfrm>
+          <a:prstGeom prst="roundRect">
+            <a:avLst>
+              <a:gd name="adj" fmla="val 4000"/>
+            </a:avLst>
+          </a:prstGeom>
+          <a:solidFill>
+            <a:srgbClr val="FFFFFF"/>
+          </a:solidFill>
+          <a:ln>
+            <a:noFill/>
+          </a:ln>
+          <a:effectLst/>
+        </p:spPr>
+        <p:style>
+          <a:lnRef idx="1">
+            <a:schemeClr val="accent1"/>
+          </a:lnRef>
+          <a:fillRef idx="3">
+            <a:schemeClr val="accent1"/>
+          </a:fillRef>
+          <a:effectRef idx="2">
+            <a:schemeClr val="accent1"/>
+          </a:effectRef>
+          <a:fontRef idx="minor">
+            <a:schemeClr val="lt1"/>
+          </a:fontRef>
+        </p:style>
+        <p:txBody>
+          <a:bodyPr rtlCol="0" anchor="ctr"/>
+          <a:lstStyle/>
+          <a:p>
+            <a:pPr algn="ctr"/>
+          </a:p>
+        </p:txBody>
+      </p:sp>
+      <p:sp>
+        <p:nvSpPr>
+          <p:cNvPr id="41" name="TextBox 40"/>
+          <p:cNvSpPr txBox="1"/>
+          <p:nvPr/>
+        </p:nvSpPr>
+        <p:spPr>
+          <a:xfrm>
+            <a:off x="6949440" y="7909559"/>
+            <a:ext cx="777240" cy="365760"/>
+          </a:xfrm>
+          <a:prstGeom prst="rect">
+            <a:avLst/>
+          </a:prstGeom>
+          <a:noFill/>
+        </p:spPr>
+        <p:txBody>
+          <a:bodyPr wrap="square" lIns="0" rIns="0" tIns="0" bIns="0" anchor="t">
+            <a:spAutoFit/>
+          </a:bodyPr>
+          <a:lstStyle/>
+          <a:p>
+            <a:pPr algn="l"/>
+            <a:r>
+              <a:rPr sz="1800" b="0" i="0">
+                <a:solidFill>
+                  <a:srgbClr val="FF8449"/>
+                </a:solidFill>
+                <a:latin typeface="Georgia"/>
+              </a:rPr>
+              <a:t>08</a:t>
+            </a:r>
+          </a:p>
+        </p:txBody>
+      </p:sp>
+      <p:sp>
+        <p:nvSpPr>
+          <p:cNvPr id="42" name="TextBox 41"/>
+          <p:cNvSpPr txBox="1"/>
+          <p:nvPr/>
+        </p:nvSpPr>
+        <p:spPr>
+          <a:xfrm>
+            <a:off x="7680960" y="7973567"/>
+            <a:ext cx="4206240" cy="274320"/>
+          </a:xfrm>
+          <a:prstGeom prst="rect">
+            <a:avLst/>
+          </a:prstGeom>
+          <a:noFill/>
+        </p:spPr>
+        <p:txBody>
+          <a:bodyPr wrap="square" lIns="0" rIns="0" tIns="0" bIns="0" anchor="t">
+            <a:spAutoFit/>
+          </a:bodyPr>
+          <a:lstStyle/>
+          <a:p>
+            <a:pPr algn="l"/>
+            <a:r>
+              <a:rPr sz="800" b="0" i="0" spc="80">
+                <a:solidFill>
+                  <a:srgbClr val="FF8449"/>
+                </a:solidFill>
+                <a:latin typeface="Calibri"/>
+              </a:rPr>
               <a:t>EQUIPA</a:t>
             </a:r>
           </a:p>
@@ -10046,29 +11289,29 @@
       </p:sp>
       <p:sp>
         <p:nvSpPr>
-          <p:cNvPr id="33" name="TextBox 32"/>
-          <p:cNvSpPr txBox="1"/>
-          <p:nvPr/>
-        </p:nvSpPr>
-        <p:spPr>
-          <a:xfrm>
-            <a:off x="12710160" y="7726679"/>
-            <a:ext cx="4846320" cy="502920"/>
-          </a:xfrm>
-          <a:prstGeom prst="rect">
-            <a:avLst/>
-          </a:prstGeom>
-          <a:noFill/>
-        </p:spPr>
-        <p:txBody>
-          <a:bodyPr wrap="square" lIns="0" rIns="0" tIns="0" bIns="0" anchor="t">
-            <a:spAutoFit/>
-          </a:bodyPr>
-          <a:lstStyle/>
-          <a:p>
-            <a:pPr algn="l"/>
-            <a:r>
-              <a:rPr sz="1600" b="0" i="0">
+          <p:cNvPr id="43" name="TextBox 42"/>
+          <p:cNvSpPr txBox="1"/>
+          <p:nvPr/>
+        </p:nvSpPr>
+        <p:spPr>
+          <a:xfrm>
+            <a:off x="6949440" y="8366759"/>
+            <a:ext cx="4846320" cy="365760"/>
+          </a:xfrm>
+          <a:prstGeom prst="rect">
+            <a:avLst/>
+          </a:prstGeom>
+          <a:noFill/>
+        </p:spPr>
+        <p:txBody>
+          <a:bodyPr wrap="square" lIns="0" rIns="0" tIns="0" bIns="0" anchor="t">
+            <a:spAutoFit/>
+          </a:bodyPr>
+          <a:lstStyle/>
+          <a:p>
+            <a:pPr algn="l"/>
+            <a:r>
+              <a:rPr sz="1400" b="0" i="0">
                 <a:solidFill>
                   <a:srgbClr val="000000"/>
                 </a:solidFill>
@@ -10081,42 +11324,228 @@
       </p:sp>
       <p:sp>
         <p:nvSpPr>
-          <p:cNvPr id="34" name="TextBox 33"/>
-          <p:cNvSpPr txBox="1"/>
-          <p:nvPr/>
-        </p:nvSpPr>
-        <p:spPr>
-          <a:xfrm>
-            <a:off x="12710160" y="8321040"/>
-            <a:ext cx="4846320" cy="1188720"/>
-          </a:xfrm>
-          <a:prstGeom prst="rect">
-            <a:avLst/>
-          </a:prstGeom>
-          <a:noFill/>
-        </p:spPr>
-        <p:txBody>
-          <a:bodyPr wrap="square" lIns="0" rIns="0" tIns="0" bIns="0" anchor="t">
-            <a:spAutoFit/>
-          </a:bodyPr>
-          <a:lstStyle/>
-          <a:p>
-            <a:pPr algn="l"/>
-            <a:r>
-              <a:rPr sz="1050" b="0" i="0">
+          <p:cNvPr id="44" name="TextBox 43"/>
+          <p:cNvSpPr txBox="1"/>
+          <p:nvPr/>
+        </p:nvSpPr>
+        <p:spPr>
+          <a:xfrm>
+            <a:off x="6949440" y="8778240"/>
+            <a:ext cx="4846320" cy="777239"/>
+          </a:xfrm>
+          <a:prstGeom prst="rect">
+            <a:avLst/>
+          </a:prstGeom>
+          <a:noFill/>
+        </p:spPr>
+        <p:txBody>
+          <a:bodyPr wrap="square" lIns="0" rIns="0" tIns="0" bIns="0" anchor="t">
+            <a:spAutoFit/>
+          </a:bodyPr>
+          <a:lstStyle/>
+          <a:p>
+            <a:pPr algn="l"/>
+            <a:r>
+              <a:rPr sz="1000" b="0" i="0">
                 <a:solidFill>
                   <a:srgbClr val="4B5563"/>
                 </a:solidFill>
                 <a:latin typeface="Calibri"/>
               </a:rPr>
-              <a:t>Quem na equipa fica responsável pelas ações no momento (registo de sessões, notas).</a:t>
-            </a:r>
-          </a:p>
-        </p:txBody>
-      </p:sp>
-      <p:sp>
-        <p:nvSpPr>
-          <p:cNvPr id="35" name="TextBox 34"/>
+              <a:t>Quem na equipa fica responsável pelas ações no momento (sessões, aprovações).</a:t>
+            </a:r>
+          </a:p>
+        </p:txBody>
+      </p:sp>
+      <p:sp>
+        <p:nvSpPr>
+          <p:cNvPr id="45" name="Rounded Rectangle 44"/>
+          <p:cNvSpPr/>
+          <p:nvPr/>
+        </p:nvSpPr>
+        <p:spPr>
+          <a:xfrm>
+            <a:off x="12435840" y="7726679"/>
+            <a:ext cx="5394960" cy="1965960"/>
+          </a:xfrm>
+          <a:prstGeom prst="roundRect">
+            <a:avLst>
+              <a:gd name="adj" fmla="val 4000"/>
+            </a:avLst>
+          </a:prstGeom>
+          <a:solidFill>
+            <a:srgbClr val="FFFFFF"/>
+          </a:solidFill>
+          <a:ln>
+            <a:noFill/>
+          </a:ln>
+          <a:effectLst/>
+        </p:spPr>
+        <p:style>
+          <a:lnRef idx="1">
+            <a:schemeClr val="accent1"/>
+          </a:lnRef>
+          <a:fillRef idx="3">
+            <a:schemeClr val="accent1"/>
+          </a:fillRef>
+          <a:effectRef idx="2">
+            <a:schemeClr val="accent1"/>
+          </a:effectRef>
+          <a:fontRef idx="minor">
+            <a:schemeClr val="lt1"/>
+          </a:fontRef>
+        </p:style>
+        <p:txBody>
+          <a:bodyPr rtlCol="0" anchor="ctr"/>
+          <a:lstStyle/>
+          <a:p>
+            <a:pPr algn="ctr"/>
+          </a:p>
+        </p:txBody>
+      </p:sp>
+      <p:sp>
+        <p:nvSpPr>
+          <p:cNvPr id="46" name="TextBox 45"/>
+          <p:cNvSpPr txBox="1"/>
+          <p:nvPr/>
+        </p:nvSpPr>
+        <p:spPr>
+          <a:xfrm>
+            <a:off x="12710160" y="7909559"/>
+            <a:ext cx="777240" cy="365760"/>
+          </a:xfrm>
+          <a:prstGeom prst="rect">
+            <a:avLst/>
+          </a:prstGeom>
+          <a:noFill/>
+        </p:spPr>
+        <p:txBody>
+          <a:bodyPr wrap="square" lIns="0" rIns="0" tIns="0" bIns="0" anchor="t">
+            <a:spAutoFit/>
+          </a:bodyPr>
+          <a:lstStyle/>
+          <a:p>
+            <a:pPr algn="l"/>
+            <a:r>
+              <a:rPr sz="1800" b="0" i="0">
+                <a:solidFill>
+                  <a:srgbClr val="FF8449"/>
+                </a:solidFill>
+                <a:latin typeface="Georgia"/>
+              </a:rPr>
+              <a:t>09</a:t>
+            </a:r>
+          </a:p>
+        </p:txBody>
+      </p:sp>
+      <p:sp>
+        <p:nvSpPr>
+          <p:cNvPr id="47" name="TextBox 46"/>
+          <p:cNvSpPr txBox="1"/>
+          <p:nvPr/>
+        </p:nvSpPr>
+        <p:spPr>
+          <a:xfrm>
+            <a:off x="13441680" y="7973567"/>
+            <a:ext cx="4206240" cy="274320"/>
+          </a:xfrm>
+          <a:prstGeom prst="rect">
+            <a:avLst/>
+          </a:prstGeom>
+          <a:noFill/>
+        </p:spPr>
+        <p:txBody>
+          <a:bodyPr wrap="square" lIns="0" rIns="0" tIns="0" bIns="0" anchor="t">
+            <a:spAutoFit/>
+          </a:bodyPr>
+          <a:lstStyle/>
+          <a:p>
+            <a:pPr algn="l"/>
+            <a:r>
+              <a:rPr sz="800" b="0" i="0" spc="80">
+                <a:solidFill>
+                  <a:srgbClr val="FF8449"/>
+                </a:solidFill>
+                <a:latin typeface="Calibri"/>
+              </a:rPr>
+              <a:t>REDES SOCIAIS</a:t>
+            </a:r>
+          </a:p>
+        </p:txBody>
+      </p:sp>
+      <p:sp>
+        <p:nvSpPr>
+          <p:cNvPr id="48" name="TextBox 47"/>
+          <p:cNvSpPr txBox="1"/>
+          <p:nvPr/>
+        </p:nvSpPr>
+        <p:spPr>
+          <a:xfrm>
+            <a:off x="12710160" y="8366759"/>
+            <a:ext cx="4846320" cy="365760"/>
+          </a:xfrm>
+          <a:prstGeom prst="rect">
+            <a:avLst/>
+          </a:prstGeom>
+          <a:noFill/>
+        </p:spPr>
+        <p:txBody>
+          <a:bodyPr wrap="square" lIns="0" rIns="0" tIns="0" bIns="0" anchor="t">
+            <a:spAutoFit/>
+          </a:bodyPr>
+          <a:lstStyle/>
+          <a:p>
+            <a:pPr algn="l"/>
+            <a:r>
+              <a:rPr sz="1400" b="0" i="0">
+                <a:solidFill>
+                  <a:srgbClr val="000000"/>
+                </a:solidFill>
+                <a:latin typeface="Georgia"/>
+              </a:rPr>
+              <a:t>Contas Instagram, Facebook, GMB</a:t>
+            </a:r>
+          </a:p>
+        </p:txBody>
+      </p:sp>
+      <p:sp>
+        <p:nvSpPr>
+          <p:cNvPr id="49" name="TextBox 48"/>
+          <p:cNvSpPr txBox="1"/>
+          <p:nvPr/>
+        </p:nvSpPr>
+        <p:spPr>
+          <a:xfrm>
+            <a:off x="12710160" y="8778240"/>
+            <a:ext cx="4846320" cy="777239"/>
+          </a:xfrm>
+          <a:prstGeom prst="rect">
+            <a:avLst/>
+          </a:prstGeom>
+          <a:noFill/>
+        </p:spPr>
+        <p:txBody>
+          <a:bodyPr wrap="square" lIns="0" rIns="0" tIns="0" bIns="0" anchor="t">
+            <a:spAutoFit/>
+          </a:bodyPr>
+          <a:lstStyle/>
+          <a:p>
+            <a:pPr algn="l"/>
+            <a:r>
+              <a:rPr sz="1000" b="0" i="0">
+                <a:solidFill>
+                  <a:srgbClr val="4B5563"/>
+                </a:solidFill>
+                <a:latin typeface="Calibri"/>
+              </a:rPr>
+              <a:t>Contas existentes ou criar do zero. Acessos administrativos necessários para P5.</a:t>
+            </a:r>
+          </a:p>
+        </p:txBody>
+      </p:sp>
+      <p:sp>
+        <p:nvSpPr>
+          <p:cNvPr id="50" name="TextBox 49"/>
           <p:cNvSpPr txBox="1"/>
           <p:nvPr/>
         </p:nvSpPr>
@@ -10151,7 +11580,7 @@
       </p:sp>
       <p:sp>
         <p:nvSpPr>
-          <p:cNvPr id="36" name="TextBox 35"/>
+          <p:cNvPr id="51" name="TextBox 50"/>
           <p:cNvSpPr txBox="1"/>
           <p:nvPr/>
         </p:nvSpPr>
@@ -10186,7 +11615,7 @@
       </p:sp>
       <p:sp>
         <p:nvSpPr>
-          <p:cNvPr id="37" name="TextBox 36"/>
+          <p:cNvPr id="52" name="TextBox 51"/>
           <p:cNvSpPr txBox="1"/>
           <p:nvPr/>
         </p:nvSpPr>
@@ -10275,7 +11704,7 @@
                 </a:solidFill>
                 <a:latin typeface="Calibri"/>
               </a:rPr>
-              <a:t>COMO CHEGAMOS LÁ · 4 FASES · ~30 DIAS</a:t>
+              <a:t>COMO CHEGAMOS LÁ · 4 FASES · ~45 DIAS</a:t>
             </a:r>
           </a:p>
         </p:txBody>
@@ -10310,7 +11739,7 @@
                 </a:solidFill>
                 <a:latin typeface="Georgia"/>
               </a:rPr>
-              <a:t>Quatro fases. Trinta dias.</a:t>
+              <a:t>Quatro fases. Quarenta e cinco dias.</a:t>
             </a:r>
           </a:p>
         </p:txBody>
@@ -10345,7 +11774,7 @@
                 </a:solidFill>
                 <a:latin typeface="Calibri"/>
               </a:rPr>
-              <a:t>A primeira prioridade em produção em cerca de três semanas. As restantes em vagas subsequentes, uma de cada vez, sempre depois da anterior estar estável.</a:t>
+              <a:t>Patient-ops e marketing &amp; website em paralelo. Prioridade 1 e Prioridade 4 em produção até ao Dia 14; site novo e redes sociais até ao Dia 30; ads em produção até ao Dia 40.</a:t>
             </a:r>
           </a:p>
         </p:txBody>
@@ -10507,7 +11936,7 @@
                 </a:solidFill>
                 <a:latin typeface="Calibri"/>
               </a:rPr>
-              <a:t>DIAS 1–3</a:t>
+              <a:t>DIAS 1–5</a:t>
             </a:r>
           </a:p>
         </p:txBody>
@@ -10612,7 +12041,7 @@
                 </a:solidFill>
                 <a:latin typeface="Calibri"/>
               </a:rPr>
-              <a:t>Workshop com a Sara. Confirmar plataforma de marcações. Mapear a automação atual. Escolher abordagem para notas em papel. Blueprint de implementação.</a:t>
+              <a:t>Workshop alargado: patient-ops + brand + website + ads. Confirmar plataforma de marcações, domínio, contas Meta/Google, brand kit ou plano de derivação. Blueprint de implementação.</a:t>
             </a:r>
           </a:p>
         </p:txBody>
@@ -10774,7 +12203,7 @@
                 </a:solidFill>
                 <a:latin typeface="Calibri"/>
               </a:rPr>
-              <a:t>DIAS 4–10</a:t>
+              <a:t>DIAS 6–25</a:t>
             </a:r>
           </a:p>
         </p:txBody>
@@ -10879,7 +12308,7 @@
                 </a:solidFill>
                 <a:latin typeface="Calibri"/>
               </a:rPr>
-              <a:t>MCPs, schema Airtable, scheduled tasks Cowork, prompts de jornada e briefing, derivação da voz da clínica, motor de sugestões em teste.</a:t>
+              <a:t>MCPs (booking, WhatsApp, Meta, Google Ads, CMS), schema Airtable, daemon Code no VPS, scheduled tasks Cowork, prompts P1–P8, voz da clínica, site novo em build paralelo.</a:t>
             </a:r>
           </a:p>
         </p:txBody>
@@ -11041,7 +12470,7 @@
                 </a:solidFill>
                 <a:latin typeface="Calibri"/>
               </a:rPr>
-              <a:t>DIAS 11–14</a:t>
+              <a:t>DIAS 26–32</a:t>
             </a:r>
           </a:p>
         </p:txBody>
@@ -11146,7 +12575,7 @@
                 </a:solidFill>
                 <a:latin typeface="Calibri"/>
               </a:rPr>
-              <a:t>Testes ponta-a-ponta, formação da equipa, arranque por fases. Prioridade 1 e Prioridade 4 em produção primeiro.</a:t>
+              <a:t>Testes ponta-a-ponta de cada prioridade. Formação da equipa. Soft launch: P1 + P4 (patient-ops) + site novo no ar. P5 (social) live até Dia 30.</a:t>
             </a:r>
           </a:p>
         </p:txBody>
@@ -11308,7 +12737,7 @@
                 </a:solidFill>
                 <a:latin typeface="Calibri"/>
               </a:rPr>
-              <a:t>DIAS 15–30+</a:t>
+              <a:t>DIAS 33–45+</a:t>
             </a:r>
           </a:p>
         </p:txBody>
@@ -11413,7 +12842,7 @@
                 </a:solidFill>
                 <a:latin typeface="Calibri"/>
               </a:rPr>
-              <a:t>Afinação sobre dados reais. Roll-out da Prioridade 2 e 3 em sequência. Entrada formal em Managed Service.</a:t>
+              <a:t>Roll-out de P2 + P3 patient-ops. P6 + P7 ads em produção até Dia 40. Afinação sobre dados reais. Entrada formal em Managed Service após Dia 45.</a:t>
             </a:r>
           </a:p>
         </p:txBody>
@@ -11448,7 +12877,7 @@
                 </a:solidFill>
                 <a:latin typeface="Georgia"/>
               </a:rPr>
-              <a:t>Após o Dia 30 entramos em Managed Service: monitorização, manutenção, revisão mensal e revisão trimestral de capacidades.</a:t>
+              <a:t>Após o Dia 45 entramos em Managed Service: monitorização, manutenção, revisão mensal e revisão trimestral de capacidades. Cronograma ambicioso — assumido.</a:t>
             </a:r>
           </a:p>
         </p:txBody>
@@ -11698,7 +13127,7 @@
         <p:spPr>
           <a:xfrm>
             <a:off x="914400" y="3657600"/>
-            <a:ext cx="5394960" cy="5029200"/>
+            <a:ext cx="3941063" cy="5029200"/>
           </a:xfrm>
           <a:prstGeom prst="roundRect">
             <a:avLst>
@@ -11779,28 +13208,28 @@
         <p:spPr>
           <a:xfrm>
             <a:off x="1188720" y="4480560"/>
-            <a:ext cx="4846320" cy="640080"/>
-          </a:xfrm>
-          <a:prstGeom prst="rect">
-            <a:avLst/>
-          </a:prstGeom>
-          <a:noFill/>
-        </p:spPr>
-        <p:txBody>
-          <a:bodyPr wrap="square" lIns="0" rIns="0" tIns="0" bIns="0" anchor="t">
-            <a:spAutoFit/>
-          </a:bodyPr>
-          <a:lstStyle/>
-          <a:p>
-            <a:pPr algn="l"/>
-            <a:r>
-              <a:rPr sz="1800" b="0" i="0">
+            <a:ext cx="3392423" cy="731520"/>
+          </a:xfrm>
+          <a:prstGeom prst="rect">
+            <a:avLst/>
+          </a:prstGeom>
+          <a:noFill/>
+        </p:spPr>
+        <p:txBody>
+          <a:bodyPr wrap="square" lIns="0" rIns="0" tIns="0" bIns="0" anchor="t">
+            <a:spAutoFit/>
+          </a:bodyPr>
+          <a:lstStyle/>
+          <a:p>
+            <a:pPr algn="l"/>
+            <a:r>
+              <a:rPr sz="1600" b="0" i="0">
                 <a:solidFill>
                   <a:srgbClr val="000000"/>
                 </a:solidFill>
                 <a:latin typeface="Georgia"/>
               </a:rPr>
-              <a:t>Alargar prioridades</a:t>
+              <a:t>Portal do paciente</a:t>
             </a:r>
           </a:p>
         </p:txBody>
@@ -11814,7 +13243,7 @@
         <p:spPr>
           <a:xfrm>
             <a:off x="1188720" y="5349240"/>
-            <a:ext cx="4846320" cy="0"/>
+            <a:ext cx="3392424" cy="0"/>
           </a:xfrm>
           <a:prstGeom prst="line">
             <a:avLst/>
@@ -11849,28 +13278,28 @@
         <p:spPr>
           <a:xfrm>
             <a:off x="1188720" y="5486400"/>
-            <a:ext cx="4846320" cy="3017520"/>
-          </a:xfrm>
-          <a:prstGeom prst="rect">
-            <a:avLst/>
-          </a:prstGeom>
-          <a:noFill/>
-        </p:spPr>
-        <p:txBody>
-          <a:bodyPr wrap="square" lIns="0" rIns="0" tIns="0" bIns="0" anchor="t">
-            <a:spAutoFit/>
-          </a:bodyPr>
-          <a:lstStyle/>
-          <a:p>
-            <a:pPr algn="l"/>
-            <a:r>
-              <a:rPr sz="1100" b="0" i="0">
+            <a:ext cx="3392423" cy="3017520"/>
+          </a:xfrm>
+          <a:prstGeom prst="rect">
+            <a:avLst/>
+          </a:prstGeom>
+          <a:noFill/>
+        </p:spPr>
+        <p:txBody>
+          <a:bodyPr wrap="square" lIns="0" rIns="0" tIns="0" bIns="0" anchor="t">
+            <a:spAutoFit/>
+          </a:bodyPr>
+          <a:lstStyle/>
+          <a:p>
+            <a:pPr algn="l"/>
+            <a:r>
+              <a:rPr sz="1050" b="0" i="0">
                 <a:solidFill>
                   <a:srgbClr val="4B5563"/>
                 </a:solidFill>
                 <a:latin typeface="Calibri"/>
               </a:rPr>
-              <a:t>Trazer para produção o que ficou parado (notas em papel · no-show recovery · GMB + reviews) à medida que a base permite.</a:t>
+              <a:t>Área autenticada onde o paciente vê o estado dos pacotes, histórico de visitas, próximas sessões, e gere consentimentos. Administrada pelo Cowork — sem CMS para gerir.</a:t>
             </a:r>
           </a:p>
         </p:txBody>
@@ -11883,8 +13312,8 @@
         </p:nvSpPr>
         <p:spPr>
           <a:xfrm>
-            <a:off x="6675120" y="3657600"/>
-            <a:ext cx="5394960" cy="5029200"/>
+            <a:off x="5097779" y="3657600"/>
+            <a:ext cx="3941063" cy="5029200"/>
           </a:xfrm>
           <a:prstGeom prst="roundRect">
             <a:avLst>
@@ -11929,7 +13358,7 @@
         </p:nvSpPr>
         <p:spPr>
           <a:xfrm>
-            <a:off x="6949440" y="3886200"/>
+            <a:off x="5372099" y="3886200"/>
             <a:ext cx="914400" cy="411480"/>
           </a:xfrm>
           <a:prstGeom prst="rect">
@@ -11964,29 +13393,29 @@
         </p:nvSpPr>
         <p:spPr>
           <a:xfrm>
-            <a:off x="6949440" y="4480560"/>
-            <a:ext cx="4846320" cy="640080"/>
-          </a:xfrm>
-          <a:prstGeom prst="rect">
-            <a:avLst/>
-          </a:prstGeom>
-          <a:noFill/>
-        </p:spPr>
-        <p:txBody>
-          <a:bodyPr wrap="square" lIns="0" rIns="0" tIns="0" bIns="0" anchor="t">
-            <a:spAutoFit/>
-          </a:bodyPr>
-          <a:lstStyle/>
-          <a:p>
-            <a:pPr algn="l"/>
-            <a:r>
-              <a:rPr sz="1800" b="0" i="0">
+            <a:off x="5372099" y="4480560"/>
+            <a:ext cx="3392423" cy="731520"/>
+          </a:xfrm>
+          <a:prstGeom prst="rect">
+            <a:avLst/>
+          </a:prstGeom>
+          <a:noFill/>
+        </p:spPr>
+        <p:txBody>
+          <a:bodyPr wrap="square" lIns="0" rIns="0" tIns="0" bIns="0" anchor="t">
+            <a:spAutoFit/>
+          </a:bodyPr>
+          <a:lstStyle/>
+          <a:p>
+            <a:pPr algn="l"/>
+            <a:r>
+              <a:rPr sz="1600" b="0" i="0">
                 <a:solidFill>
                   <a:srgbClr val="000000"/>
                 </a:solidFill>
                 <a:latin typeface="Georgia"/>
               </a:rPr>
-              <a:t>Autonomia gradual</a:t>
+              <a:t>Alargar prioridades</a:t>
             </a:r>
           </a:p>
         </p:txBody>
@@ -11999,8 +13428,8 @@
         </p:nvCxnSpPr>
         <p:spPr>
           <a:xfrm>
-            <a:off x="6949440" y="5349240"/>
-            <a:ext cx="4846320" cy="0"/>
+            <a:off x="5372099" y="5349240"/>
+            <a:ext cx="3392424" cy="0"/>
           </a:xfrm>
           <a:prstGeom prst="line">
             <a:avLst/>
@@ -12034,29 +13463,29 @@
         </p:nvSpPr>
         <p:spPr>
           <a:xfrm>
-            <a:off x="6949440" y="5486400"/>
-            <a:ext cx="4846320" cy="3017520"/>
-          </a:xfrm>
-          <a:prstGeom prst="rect">
-            <a:avLst/>
-          </a:prstGeom>
-          <a:noFill/>
-        </p:spPr>
-        <p:txBody>
-          <a:bodyPr wrap="square" lIns="0" rIns="0" tIns="0" bIns="0" anchor="t">
-            <a:spAutoFit/>
-          </a:bodyPr>
-          <a:lstStyle/>
-          <a:p>
-            <a:pPr algn="l"/>
-            <a:r>
-              <a:rPr sz="1100" b="0" i="0">
+            <a:off x="5372099" y="5486400"/>
+            <a:ext cx="3392423" cy="3017520"/>
+          </a:xfrm>
+          <a:prstGeom prst="rect">
+            <a:avLst/>
+          </a:prstGeom>
+          <a:noFill/>
+        </p:spPr>
+        <p:txBody>
+          <a:bodyPr wrap="square" lIns="0" rIns="0" tIns="0" bIns="0" anchor="t">
+            <a:spAutoFit/>
+          </a:bodyPr>
+          <a:lstStyle/>
+          <a:p>
+            <a:pPr algn="l"/>
+            <a:r>
+              <a:rPr sz="1050" b="0" i="0">
                 <a:solidFill>
                   <a:srgbClr val="4B5563"/>
                 </a:solidFill>
                 <a:latin typeface="Calibri"/>
               </a:rPr>
-              <a:t>Categoria a categoria, mover gates de aprovação humana para verificação automática conforme o histórico mostra fiabilidade. Sara fica para os casos sensíveis.</a:t>
+              <a:t>Trazer para produção o que ficou parado (notas em papel · no-show recovery) à medida que a base permite.</a:t>
             </a:r>
           </a:p>
         </p:txBody>
@@ -12069,8 +13498,8 @@
         </p:nvSpPr>
         <p:spPr>
           <a:xfrm>
-            <a:off x="12435840" y="3657600"/>
-            <a:ext cx="5394960" cy="5029200"/>
+            <a:off x="9281159" y="3657600"/>
+            <a:ext cx="3941063" cy="5029200"/>
           </a:xfrm>
           <a:prstGeom prst="roundRect">
             <a:avLst>
@@ -12115,7 +13544,7 @@
         </p:nvSpPr>
         <p:spPr>
           <a:xfrm>
-            <a:off x="12710160" y="3886200"/>
+            <a:off x="9555480" y="3886200"/>
             <a:ext cx="914400" cy="411480"/>
           </a:xfrm>
           <a:prstGeom prst="rect">
@@ -12150,29 +13579,29 @@
         </p:nvSpPr>
         <p:spPr>
           <a:xfrm>
-            <a:off x="12710160" y="4480560"/>
-            <a:ext cx="4846320" cy="640080"/>
-          </a:xfrm>
-          <a:prstGeom prst="rect">
-            <a:avLst/>
-          </a:prstGeom>
-          <a:noFill/>
-        </p:spPr>
-        <p:txBody>
-          <a:bodyPr wrap="square" lIns="0" rIns="0" tIns="0" bIns="0" anchor="t">
-            <a:spAutoFit/>
-          </a:bodyPr>
-          <a:lstStyle/>
-          <a:p>
-            <a:pPr algn="l"/>
-            <a:r>
-              <a:rPr sz="1800" b="0" i="0">
+            <a:off x="9555480" y="4480560"/>
+            <a:ext cx="3392423" cy="731520"/>
+          </a:xfrm>
+          <a:prstGeom prst="rect">
+            <a:avLst/>
+          </a:prstGeom>
+          <a:noFill/>
+        </p:spPr>
+        <p:txBody>
+          <a:bodyPr wrap="square" lIns="0" rIns="0" tIns="0" bIns="0" anchor="t">
+            <a:spAutoFit/>
+          </a:bodyPr>
+          <a:lstStyle/>
+          <a:p>
+            <a:pPr algn="l"/>
+            <a:r>
+              <a:rPr sz="1600" b="0" i="0">
                 <a:solidFill>
                   <a:srgbClr val="000000"/>
                 </a:solidFill>
                 <a:latin typeface="Georgia"/>
               </a:rPr>
-              <a:t>Capacidades adicionais</a:t>
+              <a:t>Autonomia gradual</a:t>
             </a:r>
           </a:p>
         </p:txBody>
@@ -12185,8 +13614,8 @@
         </p:nvCxnSpPr>
         <p:spPr>
           <a:xfrm>
-            <a:off x="12710160" y="5349240"/>
-            <a:ext cx="4846320" cy="0"/>
+            <a:off x="9555480" y="5349240"/>
+            <a:ext cx="3392423" cy="0"/>
           </a:xfrm>
           <a:prstGeom prst="line">
             <a:avLst/>
@@ -12220,36 +13649,222 @@
         </p:nvSpPr>
         <p:spPr>
           <a:xfrm>
-            <a:off x="12710160" y="5486400"/>
-            <a:ext cx="4846320" cy="3017520"/>
-          </a:xfrm>
-          <a:prstGeom prst="rect">
-            <a:avLst/>
-          </a:prstGeom>
-          <a:noFill/>
-        </p:spPr>
-        <p:txBody>
-          <a:bodyPr wrap="square" lIns="0" rIns="0" tIns="0" bIns="0" anchor="t">
-            <a:spAutoFit/>
-          </a:bodyPr>
-          <a:lstStyle/>
-          <a:p>
-            <a:pPr algn="l"/>
-            <a:r>
-              <a:rPr sz="1100" b="0" i="0">
+            <a:off x="9555480" y="5486400"/>
+            <a:ext cx="3392423" cy="3017520"/>
+          </a:xfrm>
+          <a:prstGeom prst="rect">
+            <a:avLst/>
+          </a:prstGeom>
+          <a:noFill/>
+        </p:spPr>
+        <p:txBody>
+          <a:bodyPr wrap="square" lIns="0" rIns="0" tIns="0" bIns="0" anchor="t">
+            <a:spAutoFit/>
+          </a:bodyPr>
+          <a:lstStyle/>
+          <a:p>
+            <a:pPr algn="l"/>
+            <a:r>
+              <a:rPr sz="1050" b="0" i="0">
                 <a:solidFill>
                   <a:srgbClr val="4B5563"/>
                 </a:solidFill>
                 <a:latin typeface="Calibri"/>
               </a:rPr>
-              <a:t>Marketing &amp; growth (Hugo, se evoluirmos), expansão para múltiplas localizações, integração com mais ferramentas — tudo em cima da mesma base.</a:t>
-            </a:r>
-          </a:p>
-        </p:txBody>
-      </p:sp>
-      <p:sp>
-        <p:nvSpPr>
-          <p:cNvPr id="20" name="TextBox 19"/>
+              <a:t>Categoria a categoria, mover gates de aprovação humana para verificação automática conforme o histórico mostra fiabilidade. Sara fica para os casos sensíveis.</a:t>
+            </a:r>
+          </a:p>
+        </p:txBody>
+      </p:sp>
+      <p:sp>
+        <p:nvSpPr>
+          <p:cNvPr id="20" name="Rounded Rectangle 19"/>
+          <p:cNvSpPr/>
+          <p:nvPr/>
+        </p:nvSpPr>
+        <p:spPr>
+          <a:xfrm>
+            <a:off x="13464539" y="3657600"/>
+            <a:ext cx="3941063" cy="5029200"/>
+          </a:xfrm>
+          <a:prstGeom prst="roundRect">
+            <a:avLst>
+              <a:gd name="adj" fmla="val 4000"/>
+            </a:avLst>
+          </a:prstGeom>
+          <a:solidFill>
+            <a:srgbClr val="F7F1E8"/>
+          </a:solidFill>
+          <a:ln>
+            <a:noFill/>
+          </a:ln>
+          <a:effectLst/>
+        </p:spPr>
+        <p:style>
+          <a:lnRef idx="1">
+            <a:schemeClr val="accent1"/>
+          </a:lnRef>
+          <a:fillRef idx="3">
+            <a:schemeClr val="accent1"/>
+          </a:fillRef>
+          <a:effectRef idx="2">
+            <a:schemeClr val="accent1"/>
+          </a:effectRef>
+          <a:fontRef idx="minor">
+            <a:schemeClr val="lt1"/>
+          </a:fontRef>
+        </p:style>
+        <p:txBody>
+          <a:bodyPr rtlCol="0" anchor="ctr"/>
+          <a:lstStyle/>
+          <a:p>
+            <a:pPr algn="ctr"/>
+          </a:p>
+        </p:txBody>
+      </p:sp>
+      <p:sp>
+        <p:nvSpPr>
+          <p:cNvPr id="21" name="TextBox 20"/>
+          <p:cNvSpPr txBox="1"/>
+          <p:nvPr/>
+        </p:nvSpPr>
+        <p:spPr>
+          <a:xfrm>
+            <a:off x="13738859" y="3886200"/>
+            <a:ext cx="914400" cy="411480"/>
+          </a:xfrm>
+          <a:prstGeom prst="rect">
+            <a:avLst/>
+          </a:prstGeom>
+          <a:noFill/>
+        </p:spPr>
+        <p:txBody>
+          <a:bodyPr wrap="square" lIns="0" rIns="0" tIns="0" bIns="0" anchor="t">
+            <a:spAutoFit/>
+          </a:bodyPr>
+          <a:lstStyle/>
+          <a:p>
+            <a:pPr algn="l"/>
+            <a:r>
+              <a:rPr sz="2200" b="0" i="0">
+                <a:solidFill>
+                  <a:srgbClr val="FF8449"/>
+                </a:solidFill>
+                <a:latin typeface="Georgia"/>
+              </a:rPr>
+              <a:t>04</a:t>
+            </a:r>
+          </a:p>
+        </p:txBody>
+      </p:sp>
+      <p:sp>
+        <p:nvSpPr>
+          <p:cNvPr id="22" name="TextBox 21"/>
+          <p:cNvSpPr txBox="1"/>
+          <p:nvPr/>
+        </p:nvSpPr>
+        <p:spPr>
+          <a:xfrm>
+            <a:off x="13738859" y="4480560"/>
+            <a:ext cx="3392423" cy="731520"/>
+          </a:xfrm>
+          <a:prstGeom prst="rect">
+            <a:avLst/>
+          </a:prstGeom>
+          <a:noFill/>
+        </p:spPr>
+        <p:txBody>
+          <a:bodyPr wrap="square" lIns="0" rIns="0" tIns="0" bIns="0" anchor="t">
+            <a:spAutoFit/>
+          </a:bodyPr>
+          <a:lstStyle/>
+          <a:p>
+            <a:pPr algn="l"/>
+            <a:r>
+              <a:rPr sz="1600" b="0" i="0">
+                <a:solidFill>
+                  <a:srgbClr val="000000"/>
+                </a:solidFill>
+                <a:latin typeface="Georgia"/>
+              </a:rPr>
+              <a:t>Capacidades adicionais</a:t>
+            </a:r>
+          </a:p>
+        </p:txBody>
+      </p:sp>
+      <p:cxnSp>
+        <p:nvCxnSpPr>
+          <p:cNvPr id="23" name="Connector 22"/>
+          <p:cNvCxnSpPr/>
+          <p:nvPr/>
+        </p:nvCxnSpPr>
+        <p:spPr>
+          <a:xfrm>
+            <a:off x="13738859" y="5349240"/>
+            <a:ext cx="3392424" cy="0"/>
+          </a:xfrm>
+          <a:prstGeom prst="line">
+            <a:avLst/>
+          </a:prstGeom>
+          <a:ln w="9525">
+            <a:solidFill>
+              <a:srgbClr val="D4D4D8"/>
+            </a:solidFill>
+          </a:ln>
+        </p:spPr>
+        <p:style>
+          <a:lnRef idx="2">
+            <a:schemeClr val="accent1"/>
+          </a:lnRef>
+          <a:fillRef idx="0">
+            <a:schemeClr val="accent1"/>
+          </a:fillRef>
+          <a:effectRef idx="1">
+            <a:schemeClr val="accent1"/>
+          </a:effectRef>
+          <a:fontRef idx="minor">
+            <a:schemeClr val="tx1"/>
+          </a:fontRef>
+        </p:style>
+      </p:cxnSp>
+      <p:sp>
+        <p:nvSpPr>
+          <p:cNvPr id="24" name="TextBox 23"/>
+          <p:cNvSpPr txBox="1"/>
+          <p:nvPr/>
+        </p:nvSpPr>
+        <p:spPr>
+          <a:xfrm>
+            <a:off x="13738859" y="5486400"/>
+            <a:ext cx="3392423" cy="3017520"/>
+          </a:xfrm>
+          <a:prstGeom prst="rect">
+            <a:avLst/>
+          </a:prstGeom>
+          <a:noFill/>
+        </p:spPr>
+        <p:txBody>
+          <a:bodyPr wrap="square" lIns="0" rIns="0" tIns="0" bIns="0" anchor="t">
+            <a:spAutoFit/>
+          </a:bodyPr>
+          <a:lstStyle/>
+          <a:p>
+            <a:pPr algn="l"/>
+            <a:r>
+              <a:rPr sz="1050" b="0" i="0">
+                <a:solidFill>
+                  <a:srgbClr val="4B5563"/>
+                </a:solidFill>
+                <a:latin typeface="Calibri"/>
+              </a:rPr>
+              <a:t>Expansão para múltiplas localizações, integração com mais ferramentas, autopilot de marketing (Hugo) — tudo em cima da mesma base.</a:t>
+            </a:r>
+          </a:p>
+        </p:txBody>
+      </p:sp>
+      <p:sp>
+        <p:nvSpPr>
+          <p:cNvPr id="25" name="TextBox 24"/>
           <p:cNvSpPr txBox="1"/>
           <p:nvPr/>
         </p:nvSpPr>
@@ -12284,7 +13899,7 @@
       </p:sp>
       <p:sp>
         <p:nvSpPr>
-          <p:cNvPr id="21" name="TextBox 20"/>
+          <p:cNvPr id="26" name="TextBox 25"/>
           <p:cNvSpPr txBox="1"/>
           <p:nvPr/>
         </p:nvSpPr>
@@ -12319,7 +13934,7 @@
       </p:sp>
       <p:sp>
         <p:nvSpPr>
-          <p:cNvPr id="22" name="TextBox 21"/>
+          <p:cNvPr id="27" name="TextBox 26"/>
           <p:cNvSpPr txBox="1"/>
           <p:nvPr/>
         </p:nvSpPr>
